--- a/slides/pptx/week-09.pptx
+++ b/slides/pptx/week-09.pptx
@@ -12,9 +12,10 @@
     <p:sldId id="260" r:id="rId6"/>
     <p:sldId id="261" r:id="rId7"/>
     <p:sldId id="262" r:id="rId8"/>
+    <p:sldId id="263" r:id="rId9"/>
   </p:sldIdLst>
   <p:notesMasterIdLst>
-    <p:notesMasterId r:id="rId9"/>
+    <p:notesMasterId r:id="rId10"/>
   </p:notesMasterIdLst>
   <p:sldSz cx="12191695" cy="6858000"/>
   <p:notesSz cx="6858000" cy="12191695"/>
@@ -1078,6 +1079,94 @@
 </p:notes>
 </file>
 
+<file path=ppt/notesSlides/notesSlide8.xml><?xml version="1.0" encoding="utf-8"?>
+<p:notes xmlns:a="http://schemas.openxmlformats.org/drawingml/2006/main" xmlns:r="http://schemas.openxmlformats.org/officeDocument/2006/relationships" xmlns:p="http://schemas.openxmlformats.org/presentationml/2006/main">
+  <p:cSld>
+    <p:spTree>
+      <p:nvGrpSpPr>
+        <p:cNvPr id="1" name=""/>
+        <p:cNvGrpSpPr/>
+        <p:nvPr/>
+      </p:nvGrpSpPr>
+      <p:grpSpPr>
+        <a:xfrm>
+          <a:off x="0" y="0"/>
+          <a:ext cx="0" cy="0"/>
+          <a:chOff x="0" y="0"/>
+          <a:chExt cx="0" cy="0"/>
+        </a:xfrm>
+      </p:grpSpPr>
+      <p:sp>
+        <p:nvSpPr>
+          <p:cNvPr id="2" name="Slide Image Placeholder 1"/>
+          <p:cNvSpPr>
+            <a:spLocks noGrp="1" noRot="1" noChangeAspect="1"/>
+          </p:cNvSpPr>
+          <p:nvPr>
+            <p:ph type="sldImg"/>
+          </p:nvPr>
+        </p:nvSpPr>
+        <p:spPr/>
+      </p:sp>
+      <p:sp>
+        <p:nvSpPr>
+          <p:cNvPr id="3" name="Notes Placeholder 2"/>
+          <p:cNvSpPr>
+            <a:spLocks noGrp="1"/>
+          </p:cNvSpPr>
+          <p:nvPr>
+            <p:ph type="body" idx="1"/>
+          </p:nvPr>
+        </p:nvSpPr>
+        <p:spPr/>
+        <p:txBody>
+          <a:bodyPr/>
+          <a:lstStyle/>
+          <a:p>
+            <a:r>
+              <a:rPr lang="en-US" dirty="0"/>
+              <a:t/>
+            </a:r>
+            <a:endParaRPr lang="en-US" dirty="0"/>
+          </a:p>
+        </p:txBody>
+      </p:sp>
+      <p:sp>
+        <p:nvSpPr>
+          <p:cNvPr id="4" name="Slide Number Placeholder 3"/>
+          <p:cNvSpPr>
+            <a:spLocks noGrp="1"/>
+          </p:cNvSpPr>
+          <p:nvPr>
+            <p:ph type="sldNum" sz="quarter" idx="10"/>
+          </p:nvPr>
+        </p:nvSpPr>
+        <p:spPr/>
+        <p:txBody>
+          <a:bodyPr/>
+          <a:lstStyle/>
+          <a:p>
+            <a:fld id="{F7021451-1387-4CA6-816F-3879F97B5CBC}" type="slidenum">
+              <a:rPr lang="en-US"/>
+              <a:t>8</a:t>
+            </a:fld>
+            <a:endParaRPr lang="en-US"/>
+          </a:p>
+        </p:txBody>
+      </p:sp>
+    </p:spTree>
+    <p:extLst>
+      <p:ext uri="{BB962C8B-B14F-4D97-AF65-F5344CB8AC3E}">
+        <p14:creationId xmlns:p14="http://schemas.microsoft.com/office/powerpoint/2010/main" val="1024086991"/>
+      </p:ext>
+    </p:extLst>
+  </p:cSld>
+  <p:clrMapOvr>
+    <a:masterClrMapping/>
+  </p:clrMapOvr>
+</p:notes>
+</file>
+
 <file path=ppt/slideLayouts/slideLayout1.xml><?xml version="1.0" encoding="utf-8"?>
 <p:sldLayout xmlns:a="http://schemas.openxmlformats.org/drawingml/2006/main" xmlns:r="http://schemas.openxmlformats.org/officeDocument/2006/relationships" xmlns:p="http://schemas.openxmlformats.org/presentationml/2006/main" preserve="1">
   <p:cSld name="DEFAULT">
@@ -3988,6 +4077,548 @@
 <file path=ppt/slides/slide7.xml><?xml version="1.0" encoding="utf-8"?>
 <p:sld xmlns:a="http://schemas.openxmlformats.org/drawingml/2006/main" xmlns:r="http://schemas.openxmlformats.org/officeDocument/2006/relationships" xmlns:p="http://schemas.openxmlformats.org/presentationml/2006/main">
   <p:cSld name="Slide 7">
+    <p:bg>
+      <p:bgPr>
+        <a:solidFill>
+          <a:srgbClr val="FFFFFF"/>
+        </a:solidFill>
+      </p:bgPr>
+    </p:bg>
+    <p:spTree>
+      <p:nvGrpSpPr>
+        <p:cNvPr id="1" name=""/>
+        <p:cNvGrpSpPr/>
+        <p:nvPr/>
+      </p:nvGrpSpPr>
+      <p:grpSpPr>
+        <a:xfrm>
+          <a:off x="0" y="0"/>
+          <a:ext cx="0" cy="0"/>
+          <a:chOff x="0" y="0"/>
+          <a:chExt cx="0" cy="0"/>
+        </a:xfrm>
+      </p:grpSpPr>
+      <p:sp>
+        <p:nvSpPr>
+          <p:cNvPr id="2" name="Text 0"/>
+          <p:cNvSpPr/>
+          <p:nvPr/>
+        </p:nvSpPr>
+        <p:spPr>
+          <a:xfrm>
+            <a:off x="640080" y="640080"/>
+            <a:ext cx="10058400" cy="320040"/>
+          </a:xfrm>
+          <a:prstGeom prst="rect">
+            <a:avLst/>
+          </a:prstGeom>
+          <a:noFill/>
+          <a:ln/>
+        </p:spPr>
+        <p:txBody>
+          <a:bodyPr wrap="square" rtlCol="0" anchor="ctr"/>
+          <a:lstStyle/>
+          <a:p>
+            <a:pPr indent="0" marL="0">
+              <a:buNone/>
+            </a:pPr>
+            <a:r>
+              <a:rPr lang="en-US" sz="1300" b="1" spc="300" kern="0" dirty="0">
+                <a:solidFill>
+                  <a:srgbClr val="7A3B2E"/>
+                </a:solidFill>
+                <a:latin typeface="Calibri" pitchFamily="34" charset="0"/>
+                <a:ea typeface="Calibri" pitchFamily="34" charset="-122"/>
+                <a:cs typeface="Calibri" pitchFamily="34" charset="-120"/>
+              </a:rPr>
+              <a:t>HOW THIS WEEK CONNECTS</a:t>
+            </a:r>
+            <a:endParaRPr lang="en-US" sz="1300" dirty="0"/>
+          </a:p>
+        </p:txBody>
+      </p:sp>
+      <p:sp>
+        <p:nvSpPr>
+          <p:cNvPr id="3" name="Text 1"/>
+          <p:cNvSpPr/>
+          <p:nvPr/>
+        </p:nvSpPr>
+        <p:spPr>
+          <a:xfrm>
+            <a:off x="640080" y="987552"/>
+            <a:ext cx="10058400" cy="640080"/>
+          </a:xfrm>
+          <a:prstGeom prst="rect">
+            <a:avLst/>
+          </a:prstGeom>
+          <a:noFill/>
+          <a:ln/>
+        </p:spPr>
+        <p:txBody>
+          <a:bodyPr wrap="square" rtlCol="0" anchor="ctr"/>
+          <a:lstStyle/>
+          <a:p>
+            <a:pPr indent="0" marL="0">
+              <a:buNone/>
+            </a:pPr>
+            <a:r>
+              <a:rPr lang="en-US" sz="2800" b="1" dirty="0">
+                <a:solidFill>
+                  <a:srgbClr val="1A1A1A"/>
+                </a:solidFill>
+                <a:latin typeface="Cambria" pitchFamily="34" charset="0"/>
+                <a:ea typeface="Cambria" pitchFamily="34" charset="-122"/>
+                <a:cs typeface="Cambria" pitchFamily="34" charset="-120"/>
+              </a:rPr>
+              <a:t>The course's through-lines</a:t>
+            </a:r>
+            <a:endParaRPr lang="en-US" sz="2800" dirty="0"/>
+          </a:p>
+        </p:txBody>
+      </p:sp>
+      <p:sp>
+        <p:nvSpPr>
+          <p:cNvPr id="4" name="Shape 2"/>
+          <p:cNvSpPr/>
+          <p:nvPr/>
+        </p:nvSpPr>
+        <p:spPr>
+          <a:xfrm>
+            <a:off x="640080" y="2057400"/>
+            <a:ext cx="457200" cy="457200"/>
+          </a:xfrm>
+          <a:prstGeom prst="roundRect">
+            <a:avLst>
+              <a:gd name="adj" fmla="val 16000"/>
+            </a:avLst>
+          </a:prstGeom>
+          <a:solidFill>
+            <a:srgbClr val="7A3B2E"/>
+          </a:solidFill>
+          <a:ln/>
+        </p:spPr>
+      </p:sp>
+      <p:sp>
+        <p:nvSpPr>
+          <p:cNvPr id="5" name="Text 3"/>
+          <p:cNvSpPr/>
+          <p:nvPr/>
+        </p:nvSpPr>
+        <p:spPr>
+          <a:xfrm>
+            <a:off x="640080" y="2057400"/>
+            <a:ext cx="457200" cy="457200"/>
+          </a:xfrm>
+          <a:prstGeom prst="rect">
+            <a:avLst/>
+          </a:prstGeom>
+          <a:noFill/>
+          <a:ln/>
+        </p:spPr>
+        <p:txBody>
+          <a:bodyPr wrap="square" rtlCol="0" anchor="ctr"/>
+          <a:lstStyle/>
+          <a:p>
+            <a:pPr algn="ctr" indent="0" marL="0">
+              <a:buNone/>
+            </a:pPr>
+            <a:r>
+              <a:rPr lang="en-US" sz="2000" b="1" dirty="0">
+                <a:solidFill>
+                  <a:srgbClr val="FFFFFF"/>
+                </a:solidFill>
+                <a:latin typeface="Cambria" pitchFamily="34" charset="0"/>
+                <a:ea typeface="Cambria" pitchFamily="34" charset="-122"/>
+                <a:cs typeface="Cambria" pitchFamily="34" charset="-120"/>
+              </a:rPr>
+              <a:t>1</a:t>
+            </a:r>
+            <a:endParaRPr lang="en-US" sz="2000" dirty="0"/>
+          </a:p>
+        </p:txBody>
+      </p:sp>
+      <p:sp>
+        <p:nvSpPr>
+          <p:cNvPr id="6" name="Text 4"/>
+          <p:cNvSpPr/>
+          <p:nvPr/>
+        </p:nvSpPr>
+        <p:spPr>
+          <a:xfrm>
+            <a:off x="1371600" y="2020824"/>
+            <a:ext cx="10332720" cy="411480"/>
+          </a:xfrm>
+          <a:prstGeom prst="rect">
+            <a:avLst/>
+          </a:prstGeom>
+          <a:noFill/>
+          <a:ln/>
+        </p:spPr>
+        <p:txBody>
+          <a:bodyPr wrap="square" rtlCol="0" anchor="ctr"/>
+          <a:lstStyle/>
+          <a:p>
+            <a:pPr indent="0" marL="0">
+              <a:buNone/>
+            </a:pPr>
+            <a:r>
+              <a:rPr lang="en-US" sz="1900" b="1" dirty="0">
+                <a:solidFill>
+                  <a:srgbClr val="7A3B2E"/>
+                </a:solidFill>
+                <a:latin typeface="Cambria" pitchFamily="34" charset="0"/>
+                <a:ea typeface="Cambria" pitchFamily="34" charset="-122"/>
+                <a:cs typeface="Cambria" pitchFamily="34" charset="-120"/>
+              </a:rPr>
+              <a:t>Interrogate your own chart</a:t>
+            </a:r>
+            <a:endParaRPr lang="en-US" sz="1900" dirty="0"/>
+          </a:p>
+        </p:txBody>
+      </p:sp>
+      <p:sp>
+        <p:nvSpPr>
+          <p:cNvPr id="7" name="Text 5"/>
+          <p:cNvSpPr/>
+          <p:nvPr/>
+        </p:nvSpPr>
+        <p:spPr>
+          <a:xfrm>
+            <a:off x="1371600" y="2441448"/>
+            <a:ext cx="10332720" cy="914400"/>
+          </a:xfrm>
+          <a:prstGeom prst="rect">
+            <a:avLst/>
+          </a:prstGeom>
+          <a:noFill/>
+          <a:ln/>
+        </p:spPr>
+        <p:txBody>
+          <a:bodyPr wrap="square" rtlCol="0" anchor="t">
+            <a:spAutoFit/>
+          </a:bodyPr>
+          <a:lstStyle/>
+          <a:p>
+            <a:pPr indent="0" marL="0">
+              <a:lnSpc>
+                <a:spcPct val="112000"/>
+              </a:lnSpc>
+              <a:buNone/>
+            </a:pPr>
+            <a:r>
+              <a:rPr lang="en-US" sz="1450" dirty="0">
+                <a:solidFill>
+                  <a:srgbClr val="1A1A1A"/>
+                </a:solidFill>
+                <a:latin typeface="Calibri" pitchFamily="34" charset="0"/>
+                <a:ea typeface="Calibri" pitchFamily="34" charset="-122"/>
+                <a:cs typeface="Calibri" pitchFamily="34" charset="-120"/>
+              </a:rPr>
+              <a:t>Ten weeks on other people's charts; now the ten minutes on yours.</a:t>
+            </a:r>
+            <a:endParaRPr lang="en-US" sz="1450" dirty="0"/>
+          </a:p>
+        </p:txBody>
+      </p:sp>
+      <p:sp>
+        <p:nvSpPr>
+          <p:cNvPr id="8" name="Shape 6"/>
+          <p:cNvSpPr/>
+          <p:nvPr/>
+        </p:nvSpPr>
+        <p:spPr>
+          <a:xfrm>
+            <a:off x="640080" y="3520440"/>
+            <a:ext cx="457200" cy="457200"/>
+          </a:xfrm>
+          <a:prstGeom prst="roundRect">
+            <a:avLst>
+              <a:gd name="adj" fmla="val 16000"/>
+            </a:avLst>
+          </a:prstGeom>
+          <a:solidFill>
+            <a:srgbClr val="3F6F5F"/>
+          </a:solidFill>
+          <a:ln/>
+        </p:spPr>
+      </p:sp>
+      <p:sp>
+        <p:nvSpPr>
+          <p:cNvPr id="9" name="Text 7"/>
+          <p:cNvSpPr/>
+          <p:nvPr/>
+        </p:nvSpPr>
+        <p:spPr>
+          <a:xfrm>
+            <a:off x="640080" y="3520440"/>
+            <a:ext cx="457200" cy="457200"/>
+          </a:xfrm>
+          <a:prstGeom prst="rect">
+            <a:avLst/>
+          </a:prstGeom>
+          <a:noFill/>
+          <a:ln/>
+        </p:spPr>
+        <p:txBody>
+          <a:bodyPr wrap="square" rtlCol="0" anchor="ctr"/>
+          <a:lstStyle/>
+          <a:p>
+            <a:pPr algn="ctr" indent="0" marL="0">
+              <a:buNone/>
+            </a:pPr>
+            <a:r>
+              <a:rPr lang="en-US" sz="2000" b="1" dirty="0">
+                <a:solidFill>
+                  <a:srgbClr val="FFFFFF"/>
+                </a:solidFill>
+                <a:latin typeface="Cambria" pitchFamily="34" charset="0"/>
+                <a:ea typeface="Cambria" pitchFamily="34" charset="-122"/>
+                <a:cs typeface="Cambria" pitchFamily="34" charset="-120"/>
+              </a:rPr>
+              <a:t>2</a:t>
+            </a:r>
+            <a:endParaRPr lang="en-US" sz="2000" dirty="0"/>
+          </a:p>
+        </p:txBody>
+      </p:sp>
+      <p:sp>
+        <p:nvSpPr>
+          <p:cNvPr id="10" name="Text 8"/>
+          <p:cNvSpPr/>
+          <p:nvPr/>
+        </p:nvSpPr>
+        <p:spPr>
+          <a:xfrm>
+            <a:off x="1371600" y="3483864"/>
+            <a:ext cx="10332720" cy="411480"/>
+          </a:xfrm>
+          <a:prstGeom prst="rect">
+            <a:avLst/>
+          </a:prstGeom>
+          <a:noFill/>
+          <a:ln/>
+        </p:spPr>
+        <p:txBody>
+          <a:bodyPr wrap="square" rtlCol="0" anchor="ctr"/>
+          <a:lstStyle/>
+          <a:p>
+            <a:pPr indent="0" marL="0">
+              <a:buNone/>
+            </a:pPr>
+            <a:r>
+              <a:rPr lang="en-US" sz="1900" b="1" dirty="0">
+                <a:solidFill>
+                  <a:srgbClr val="3F6F5F"/>
+                </a:solidFill>
+                <a:latin typeface="Cambria" pitchFamily="34" charset="0"/>
+                <a:ea typeface="Cambria" pitchFamily="34" charset="-122"/>
+                <a:cs typeface="Cambria" pitchFamily="34" charset="-120"/>
+              </a:rPr>
+              <a:t>No single right way</a:t>
+            </a:r>
+            <a:endParaRPr lang="en-US" sz="1900" dirty="0"/>
+          </a:p>
+        </p:txBody>
+      </p:sp>
+      <p:sp>
+        <p:nvSpPr>
+          <p:cNvPr id="11" name="Text 9"/>
+          <p:cNvSpPr/>
+          <p:nvPr/>
+        </p:nvSpPr>
+        <p:spPr>
+          <a:xfrm>
+            <a:off x="1371600" y="3904488"/>
+            <a:ext cx="10332720" cy="914400"/>
+          </a:xfrm>
+          <a:prstGeom prst="rect">
+            <a:avLst/>
+          </a:prstGeom>
+          <a:noFill/>
+          <a:ln/>
+        </p:spPr>
+        <p:txBody>
+          <a:bodyPr wrap="square" rtlCol="0" anchor="t">
+            <a:spAutoFit/>
+          </a:bodyPr>
+          <a:lstStyle/>
+          <a:p>
+            <a:pPr indent="0" marL="0">
+              <a:lnSpc>
+                <a:spcPct val="112000"/>
+              </a:lnSpc>
+              <a:buNone/>
+            </a:pPr>
+            <a:r>
+              <a:rPr lang="en-US" sz="1450" dirty="0">
+                <a:solidFill>
+                  <a:srgbClr val="1A1A1A"/>
+                </a:solidFill>
+                <a:latin typeface="Calibri" pitchFamily="34" charset="0"/>
+                <a:ea typeface="Calibri" pitchFamily="34" charset="-122"/>
+                <a:cs typeface="Calibri" pitchFamily="34" charset="-120"/>
+              </a:rPr>
+              <a:t>Three published essays, three defensible sets of choices.</a:t>
+            </a:r>
+            <a:endParaRPr lang="en-US" sz="1450" dirty="0"/>
+          </a:p>
+        </p:txBody>
+      </p:sp>
+      <p:sp>
+        <p:nvSpPr>
+          <p:cNvPr id="12" name="Shape 10"/>
+          <p:cNvSpPr/>
+          <p:nvPr/>
+        </p:nvSpPr>
+        <p:spPr>
+          <a:xfrm>
+            <a:off x="640080" y="4983480"/>
+            <a:ext cx="457200" cy="457200"/>
+          </a:xfrm>
+          <a:prstGeom prst="roundRect">
+            <a:avLst>
+              <a:gd name="adj" fmla="val 16000"/>
+            </a:avLst>
+          </a:prstGeom>
+          <a:solidFill>
+            <a:srgbClr val="B9852F"/>
+          </a:solidFill>
+          <a:ln/>
+        </p:spPr>
+      </p:sp>
+      <p:sp>
+        <p:nvSpPr>
+          <p:cNvPr id="13" name="Text 11"/>
+          <p:cNvSpPr/>
+          <p:nvPr/>
+        </p:nvSpPr>
+        <p:spPr>
+          <a:xfrm>
+            <a:off x="640080" y="4983480"/>
+            <a:ext cx="457200" cy="457200"/>
+          </a:xfrm>
+          <a:prstGeom prst="rect">
+            <a:avLst/>
+          </a:prstGeom>
+          <a:noFill/>
+          <a:ln/>
+        </p:spPr>
+        <p:txBody>
+          <a:bodyPr wrap="square" rtlCol="0" anchor="ctr"/>
+          <a:lstStyle/>
+          <a:p>
+            <a:pPr algn="ctr" indent="0" marL="0">
+              <a:buNone/>
+            </a:pPr>
+            <a:r>
+              <a:rPr lang="en-US" sz="2000" b="1" dirty="0">
+                <a:solidFill>
+                  <a:srgbClr val="FFFFFF"/>
+                </a:solidFill>
+                <a:latin typeface="Cambria" pitchFamily="34" charset="0"/>
+                <a:ea typeface="Cambria" pitchFamily="34" charset="-122"/>
+                <a:cs typeface="Cambria" pitchFamily="34" charset="-120"/>
+              </a:rPr>
+              <a:t>3</a:t>
+            </a:r>
+            <a:endParaRPr lang="en-US" sz="2000" dirty="0"/>
+          </a:p>
+        </p:txBody>
+      </p:sp>
+      <p:sp>
+        <p:nvSpPr>
+          <p:cNvPr id="14" name="Text 12"/>
+          <p:cNvSpPr/>
+          <p:nvPr/>
+        </p:nvSpPr>
+        <p:spPr>
+          <a:xfrm>
+            <a:off x="1371600" y="4946904"/>
+            <a:ext cx="10332720" cy="411480"/>
+          </a:xfrm>
+          <a:prstGeom prst="rect">
+            <a:avLst/>
+          </a:prstGeom>
+          <a:noFill/>
+          <a:ln/>
+        </p:spPr>
+        <p:txBody>
+          <a:bodyPr wrap="square" rtlCol="0" anchor="ctr"/>
+          <a:lstStyle/>
+          <a:p>
+            <a:pPr indent="0" marL="0">
+              <a:buNone/>
+            </a:pPr>
+            <a:r>
+              <a:rPr lang="en-US" sz="1900" b="1" dirty="0">
+                <a:solidFill>
+                  <a:srgbClr val="B9852F"/>
+                </a:solidFill>
+                <a:latin typeface="Cambria" pitchFamily="34" charset="0"/>
+                <a:ea typeface="Cambria" pitchFamily="34" charset="-122"/>
+                <a:cs typeface="Cambria" pitchFamily="34" charset="-120"/>
+              </a:rPr>
+              <a:t>Make something real</a:t>
+            </a:r>
+            <a:endParaRPr lang="en-US" sz="1900" dirty="0"/>
+          </a:p>
+        </p:txBody>
+      </p:sp>
+      <p:sp>
+        <p:nvSpPr>
+          <p:cNvPr id="15" name="Text 13"/>
+          <p:cNvSpPr/>
+          <p:nvPr/>
+        </p:nvSpPr>
+        <p:spPr>
+          <a:xfrm>
+            <a:off x="1371600" y="5367528"/>
+            <a:ext cx="10332720" cy="914400"/>
+          </a:xfrm>
+          <a:prstGeom prst="rect">
+            <a:avLst/>
+          </a:prstGeom>
+          <a:noFill/>
+          <a:ln/>
+        </p:spPr>
+        <p:txBody>
+          <a:bodyPr wrap="square" rtlCol="0" anchor="t">
+            <a:spAutoFit/>
+          </a:bodyPr>
+          <a:lstStyle/>
+          <a:p>
+            <a:pPr indent="0" marL="0">
+              <a:lnSpc>
+                <a:spcPct val="112000"/>
+              </a:lnSpc>
+              <a:buNone/>
+            </a:pPr>
+            <a:r>
+              <a:rPr lang="en-US" sz="1450" dirty="0">
+                <a:solidFill>
+                  <a:srgbClr val="1A1A1A"/>
+                </a:solidFill>
+                <a:latin typeface="Calibri" pitchFamily="34" charset="0"/>
+                <a:ea typeface="Calibri" pitchFamily="34" charset="-122"/>
+                <a:cs typeface="Calibri" pitchFamily="34" charset="-120"/>
+              </a:rPr>
+              <a:t>You leave with a deployed URL.</a:t>
+            </a:r>
+            <a:endParaRPr lang="en-US" sz="1450" dirty="0"/>
+          </a:p>
+        </p:txBody>
+      </p:sp>
+    </p:spTree>
+  </p:cSld>
+  <p:clrMapOvr>
+    <a:masterClrMapping/>
+  </p:clrMapOvr>
+</p:sld>
+</file>
+
+<file path=ppt/slides/slide8.xml><?xml version="1.0" encoding="utf-8"?>
+<p:sld xmlns:a="http://schemas.openxmlformats.org/drawingml/2006/main" xmlns:r="http://schemas.openxmlformats.org/officeDocument/2006/relationships" xmlns:p="http://schemas.openxmlformats.org/presentationml/2006/main">
+  <p:cSld name="Slide 8">
     <p:bg>
       <p:bgPr>
         <a:solidFill>

--- a/slides/pptx/week-09.pptx
+++ b/slides/pptx/week-09.pptx
@@ -13,9 +13,12 @@
     <p:sldId id="261" r:id="rId7"/>
     <p:sldId id="262" r:id="rId8"/>
     <p:sldId id="263" r:id="rId9"/>
+    <p:sldId id="264" r:id="rId10"/>
+    <p:sldId id="265" r:id="rId11"/>
+    <p:sldId id="266" r:id="rId12"/>
   </p:sldIdLst>
   <p:notesMasterIdLst>
-    <p:notesMasterId r:id="rId10"/>
+    <p:notesMasterId r:id="rId13"/>
   </p:notesMasterIdLst>
   <p:sldSz cx="12191695" cy="6858000"/>
   <p:notesSz cx="6858000" cy="12191695"/>
@@ -551,6 +554,182 @@
 </p:notes>
 </file>
 
+<file path=ppt/notesSlides/notesSlide10.xml><?xml version="1.0" encoding="utf-8"?>
+<p:notes xmlns:a="http://schemas.openxmlformats.org/drawingml/2006/main" xmlns:r="http://schemas.openxmlformats.org/officeDocument/2006/relationships" xmlns:p="http://schemas.openxmlformats.org/presentationml/2006/main">
+  <p:cSld>
+    <p:spTree>
+      <p:nvGrpSpPr>
+        <p:cNvPr id="1" name=""/>
+        <p:cNvGrpSpPr/>
+        <p:nvPr/>
+      </p:nvGrpSpPr>
+      <p:grpSpPr>
+        <a:xfrm>
+          <a:off x="0" y="0"/>
+          <a:ext cx="0" cy="0"/>
+          <a:chOff x="0" y="0"/>
+          <a:chExt cx="0" cy="0"/>
+        </a:xfrm>
+      </p:grpSpPr>
+      <p:sp>
+        <p:nvSpPr>
+          <p:cNvPr id="2" name="Slide Image Placeholder 1"/>
+          <p:cNvSpPr>
+            <a:spLocks noGrp="1" noRot="1" noChangeAspect="1"/>
+          </p:cNvSpPr>
+          <p:nvPr>
+            <p:ph type="sldImg"/>
+          </p:nvPr>
+        </p:nvSpPr>
+        <p:spPr/>
+      </p:sp>
+      <p:sp>
+        <p:nvSpPr>
+          <p:cNvPr id="3" name="Notes Placeholder 2"/>
+          <p:cNvSpPr>
+            <a:spLocks noGrp="1"/>
+          </p:cNvSpPr>
+          <p:nvPr>
+            <p:ph type="body" idx="1"/>
+          </p:nvPr>
+        </p:nvSpPr>
+        <p:spPr/>
+        <p:txBody>
+          <a:bodyPr/>
+          <a:lstStyle/>
+          <a:p>
+            <a:r>
+              <a:rPr lang="en-US" dirty="0"/>
+              <a:t/>
+            </a:r>
+            <a:endParaRPr lang="en-US" dirty="0"/>
+          </a:p>
+        </p:txBody>
+      </p:sp>
+      <p:sp>
+        <p:nvSpPr>
+          <p:cNvPr id="4" name="Slide Number Placeholder 3"/>
+          <p:cNvSpPr>
+            <a:spLocks noGrp="1"/>
+          </p:cNvSpPr>
+          <p:nvPr>
+            <p:ph type="sldNum" sz="quarter" idx="10"/>
+          </p:nvPr>
+        </p:nvSpPr>
+        <p:spPr/>
+        <p:txBody>
+          <a:bodyPr/>
+          <a:lstStyle/>
+          <a:p>
+            <a:fld id="{F7021451-1387-4CA6-816F-3879F97B5CBC}" type="slidenum">
+              <a:rPr lang="en-US"/>
+              <a:t>10</a:t>
+            </a:fld>
+            <a:endParaRPr lang="en-US"/>
+          </a:p>
+        </p:txBody>
+      </p:sp>
+    </p:spTree>
+    <p:extLst>
+      <p:ext uri="{BB962C8B-B14F-4D97-AF65-F5344CB8AC3E}">
+        <p14:creationId xmlns:p14="http://schemas.microsoft.com/office/powerpoint/2010/main" val="1024086991"/>
+      </p:ext>
+    </p:extLst>
+  </p:cSld>
+  <p:clrMapOvr>
+    <a:masterClrMapping/>
+  </p:clrMapOvr>
+</p:notes>
+</file>
+
+<file path=ppt/notesSlides/notesSlide11.xml><?xml version="1.0" encoding="utf-8"?>
+<p:notes xmlns:a="http://schemas.openxmlformats.org/drawingml/2006/main" xmlns:r="http://schemas.openxmlformats.org/officeDocument/2006/relationships" xmlns:p="http://schemas.openxmlformats.org/presentationml/2006/main">
+  <p:cSld>
+    <p:spTree>
+      <p:nvGrpSpPr>
+        <p:cNvPr id="1" name=""/>
+        <p:cNvGrpSpPr/>
+        <p:nvPr/>
+      </p:nvGrpSpPr>
+      <p:grpSpPr>
+        <a:xfrm>
+          <a:off x="0" y="0"/>
+          <a:ext cx="0" cy="0"/>
+          <a:chOff x="0" y="0"/>
+          <a:chExt cx="0" cy="0"/>
+        </a:xfrm>
+      </p:grpSpPr>
+      <p:sp>
+        <p:nvSpPr>
+          <p:cNvPr id="2" name="Slide Image Placeholder 1"/>
+          <p:cNvSpPr>
+            <a:spLocks noGrp="1" noRot="1" noChangeAspect="1"/>
+          </p:cNvSpPr>
+          <p:nvPr>
+            <p:ph type="sldImg"/>
+          </p:nvPr>
+        </p:nvSpPr>
+        <p:spPr/>
+      </p:sp>
+      <p:sp>
+        <p:nvSpPr>
+          <p:cNvPr id="3" name="Notes Placeholder 2"/>
+          <p:cNvSpPr>
+            <a:spLocks noGrp="1"/>
+          </p:cNvSpPr>
+          <p:nvPr>
+            <p:ph type="body" idx="1"/>
+          </p:nvPr>
+        </p:nvSpPr>
+        <p:spPr/>
+        <p:txBody>
+          <a:bodyPr/>
+          <a:lstStyle/>
+          <a:p>
+            <a:r>
+              <a:rPr lang="en-US" dirty="0"/>
+              <a:t/>
+            </a:r>
+            <a:endParaRPr lang="en-US" dirty="0"/>
+          </a:p>
+        </p:txBody>
+      </p:sp>
+      <p:sp>
+        <p:nvSpPr>
+          <p:cNvPr id="4" name="Slide Number Placeholder 3"/>
+          <p:cNvSpPr>
+            <a:spLocks noGrp="1"/>
+          </p:cNvSpPr>
+          <p:nvPr>
+            <p:ph type="sldNum" sz="quarter" idx="10"/>
+          </p:nvPr>
+        </p:nvSpPr>
+        <p:spPr/>
+        <p:txBody>
+          <a:bodyPr/>
+          <a:lstStyle/>
+          <a:p>
+            <a:fld id="{F7021451-1387-4CA6-816F-3879F97B5CBC}" type="slidenum">
+              <a:rPr lang="en-US"/>
+              <a:t>11</a:t>
+            </a:fld>
+            <a:endParaRPr lang="en-US"/>
+          </a:p>
+        </p:txBody>
+      </p:sp>
+    </p:spTree>
+    <p:extLst>
+      <p:ext uri="{BB962C8B-B14F-4D97-AF65-F5344CB8AC3E}">
+        <p14:creationId xmlns:p14="http://schemas.microsoft.com/office/powerpoint/2010/main" val="1024086991"/>
+      </p:ext>
+    </p:extLst>
+  </p:cSld>
+  <p:clrMapOvr>
+    <a:masterClrMapping/>
+  </p:clrMapOvr>
+</p:notes>
+</file>
+
 <file path=ppt/notesSlides/notesSlide2.xml><?xml version="1.0" encoding="utf-8"?>
 <p:notes xmlns:a="http://schemas.openxmlformats.org/drawingml/2006/main" xmlns:r="http://schemas.openxmlformats.org/officeDocument/2006/relationships" xmlns:p="http://schemas.openxmlformats.org/presentationml/2006/main">
   <p:cSld>
@@ -1149,6 +1328,94 @@
             <a:fld id="{F7021451-1387-4CA6-816F-3879F97B5CBC}" type="slidenum">
               <a:rPr lang="en-US"/>
               <a:t>8</a:t>
+            </a:fld>
+            <a:endParaRPr lang="en-US"/>
+          </a:p>
+        </p:txBody>
+      </p:sp>
+    </p:spTree>
+    <p:extLst>
+      <p:ext uri="{BB962C8B-B14F-4D97-AF65-F5344CB8AC3E}">
+        <p14:creationId xmlns:p14="http://schemas.microsoft.com/office/powerpoint/2010/main" val="1024086991"/>
+      </p:ext>
+    </p:extLst>
+  </p:cSld>
+  <p:clrMapOvr>
+    <a:masterClrMapping/>
+  </p:clrMapOvr>
+</p:notes>
+</file>
+
+<file path=ppt/notesSlides/notesSlide9.xml><?xml version="1.0" encoding="utf-8"?>
+<p:notes xmlns:a="http://schemas.openxmlformats.org/drawingml/2006/main" xmlns:r="http://schemas.openxmlformats.org/officeDocument/2006/relationships" xmlns:p="http://schemas.openxmlformats.org/presentationml/2006/main">
+  <p:cSld>
+    <p:spTree>
+      <p:nvGrpSpPr>
+        <p:cNvPr id="1" name=""/>
+        <p:cNvGrpSpPr/>
+        <p:nvPr/>
+      </p:nvGrpSpPr>
+      <p:grpSpPr>
+        <a:xfrm>
+          <a:off x="0" y="0"/>
+          <a:ext cx="0" cy="0"/>
+          <a:chOff x="0" y="0"/>
+          <a:chExt cx="0" cy="0"/>
+        </a:xfrm>
+      </p:grpSpPr>
+      <p:sp>
+        <p:nvSpPr>
+          <p:cNvPr id="2" name="Slide Image Placeholder 1"/>
+          <p:cNvSpPr>
+            <a:spLocks noGrp="1" noRot="1" noChangeAspect="1"/>
+          </p:cNvSpPr>
+          <p:nvPr>
+            <p:ph type="sldImg"/>
+          </p:nvPr>
+        </p:nvSpPr>
+        <p:spPr/>
+      </p:sp>
+      <p:sp>
+        <p:nvSpPr>
+          <p:cNvPr id="3" name="Notes Placeholder 2"/>
+          <p:cNvSpPr>
+            <a:spLocks noGrp="1"/>
+          </p:cNvSpPr>
+          <p:nvPr>
+            <p:ph type="body" idx="1"/>
+          </p:nvPr>
+        </p:nvSpPr>
+        <p:spPr/>
+        <p:txBody>
+          <a:bodyPr/>
+          <a:lstStyle/>
+          <a:p>
+            <a:r>
+              <a:rPr lang="en-US" dirty="0"/>
+              <a:t/>
+            </a:r>
+            <a:endParaRPr lang="en-US" dirty="0"/>
+          </a:p>
+        </p:txBody>
+      </p:sp>
+      <p:sp>
+        <p:nvSpPr>
+          <p:cNvPr id="4" name="Slide Number Placeholder 3"/>
+          <p:cNvSpPr>
+            <a:spLocks noGrp="1"/>
+          </p:cNvSpPr>
+          <p:nvPr>
+            <p:ph type="sldNum" sz="quarter" idx="10"/>
+          </p:nvPr>
+        </p:nvSpPr>
+        <p:spPr/>
+        <p:txBody>
+          <a:bodyPr/>
+          <a:lstStyle/>
+          <a:p>
+            <a:fld id="{F7021451-1387-4CA6-816F-3879F97B5CBC}" type="slidenum">
+              <a:rPr lang="en-US"/>
+              <a:t>9</a:t>
             </a:fld>
             <a:endParaRPr lang="en-US"/>
           </a:p>
@@ -2025,6 +2292,982 @@
 </p:sld>
 </file>
 
+<file path=ppt/slides/slide10.xml><?xml version="1.0" encoding="utf-8"?>
+<p:sld xmlns:a="http://schemas.openxmlformats.org/drawingml/2006/main" xmlns:r="http://schemas.openxmlformats.org/officeDocument/2006/relationships" xmlns:p="http://schemas.openxmlformats.org/presentationml/2006/main">
+  <p:cSld name="Slide 10">
+    <p:bg>
+      <p:bgPr>
+        <a:solidFill>
+          <a:srgbClr val="FFFFFF"/>
+        </a:solidFill>
+      </p:bgPr>
+    </p:bg>
+    <p:spTree>
+      <p:nvGrpSpPr>
+        <p:cNvPr id="1" name=""/>
+        <p:cNvGrpSpPr/>
+        <p:nvPr/>
+      </p:nvGrpSpPr>
+      <p:grpSpPr>
+        <a:xfrm>
+          <a:off x="0" y="0"/>
+          <a:ext cx="0" cy="0"/>
+          <a:chOff x="0" y="0"/>
+          <a:chExt cx="0" cy="0"/>
+        </a:xfrm>
+      </p:grpSpPr>
+      <p:sp>
+        <p:nvSpPr>
+          <p:cNvPr id="2" name="Text 0"/>
+          <p:cNvSpPr/>
+          <p:nvPr/>
+        </p:nvSpPr>
+        <p:spPr>
+          <a:xfrm>
+            <a:off x="640080" y="640080"/>
+            <a:ext cx="10058400" cy="320040"/>
+          </a:xfrm>
+          <a:prstGeom prst="rect">
+            <a:avLst/>
+          </a:prstGeom>
+          <a:noFill/>
+          <a:ln/>
+        </p:spPr>
+        <p:txBody>
+          <a:bodyPr wrap="square" rtlCol="0" anchor="ctr"/>
+          <a:lstStyle/>
+          <a:p>
+            <a:pPr indent="0" marL="0">
+              <a:buNone/>
+            </a:pPr>
+            <a:r>
+              <a:rPr lang="en-US" sz="1300" b="1" spc="300" kern="0" dirty="0">
+                <a:solidFill>
+                  <a:srgbClr val="7A3B2E"/>
+                </a:solidFill>
+                <a:latin typeface="Calibri" pitchFamily="34" charset="0"/>
+                <a:ea typeface="Calibri" pitchFamily="34" charset="-122"/>
+                <a:cs typeface="Calibri" pitchFamily="34" charset="-120"/>
+              </a:rPr>
+              <a:t>HOW THIS WEEK CONNECTS</a:t>
+            </a:r>
+            <a:endParaRPr lang="en-US" sz="1300" dirty="0"/>
+          </a:p>
+        </p:txBody>
+      </p:sp>
+      <p:sp>
+        <p:nvSpPr>
+          <p:cNvPr id="3" name="Text 1"/>
+          <p:cNvSpPr/>
+          <p:nvPr/>
+        </p:nvSpPr>
+        <p:spPr>
+          <a:xfrm>
+            <a:off x="640080" y="987552"/>
+            <a:ext cx="10058400" cy="640080"/>
+          </a:xfrm>
+          <a:prstGeom prst="rect">
+            <a:avLst/>
+          </a:prstGeom>
+          <a:noFill/>
+          <a:ln/>
+        </p:spPr>
+        <p:txBody>
+          <a:bodyPr wrap="square" rtlCol="0" anchor="ctr"/>
+          <a:lstStyle/>
+          <a:p>
+            <a:pPr indent="0" marL="0">
+              <a:buNone/>
+            </a:pPr>
+            <a:r>
+              <a:rPr lang="en-US" sz="2800" b="1" dirty="0">
+                <a:solidFill>
+                  <a:srgbClr val="1A1A1A"/>
+                </a:solidFill>
+                <a:latin typeface="Cambria" pitchFamily="34" charset="0"/>
+                <a:ea typeface="Cambria" pitchFamily="34" charset="-122"/>
+                <a:cs typeface="Cambria" pitchFamily="34" charset="-120"/>
+              </a:rPr>
+              <a:t>The course's through-lines</a:t>
+            </a:r>
+            <a:endParaRPr lang="en-US" sz="2800" dirty="0"/>
+          </a:p>
+        </p:txBody>
+      </p:sp>
+      <p:sp>
+        <p:nvSpPr>
+          <p:cNvPr id="4" name="Shape 2"/>
+          <p:cNvSpPr/>
+          <p:nvPr/>
+        </p:nvSpPr>
+        <p:spPr>
+          <a:xfrm>
+            <a:off x="640080" y="2057400"/>
+            <a:ext cx="457200" cy="457200"/>
+          </a:xfrm>
+          <a:prstGeom prst="roundRect">
+            <a:avLst>
+              <a:gd name="adj" fmla="val 16000"/>
+            </a:avLst>
+          </a:prstGeom>
+          <a:solidFill>
+            <a:srgbClr val="7A3B2E"/>
+          </a:solidFill>
+          <a:ln/>
+        </p:spPr>
+      </p:sp>
+      <p:sp>
+        <p:nvSpPr>
+          <p:cNvPr id="5" name="Text 3"/>
+          <p:cNvSpPr/>
+          <p:nvPr/>
+        </p:nvSpPr>
+        <p:spPr>
+          <a:xfrm>
+            <a:off x="640080" y="2057400"/>
+            <a:ext cx="457200" cy="457200"/>
+          </a:xfrm>
+          <a:prstGeom prst="rect">
+            <a:avLst/>
+          </a:prstGeom>
+          <a:noFill/>
+          <a:ln/>
+        </p:spPr>
+        <p:txBody>
+          <a:bodyPr wrap="square" rtlCol="0" anchor="ctr"/>
+          <a:lstStyle/>
+          <a:p>
+            <a:pPr algn="ctr" indent="0" marL="0">
+              <a:buNone/>
+            </a:pPr>
+            <a:r>
+              <a:rPr lang="en-US" sz="2000" b="1" dirty="0">
+                <a:solidFill>
+                  <a:srgbClr val="FFFFFF"/>
+                </a:solidFill>
+                <a:latin typeface="Cambria" pitchFamily="34" charset="0"/>
+                <a:ea typeface="Cambria" pitchFamily="34" charset="-122"/>
+                <a:cs typeface="Cambria" pitchFamily="34" charset="-120"/>
+              </a:rPr>
+              <a:t>1</a:t>
+            </a:r>
+            <a:endParaRPr lang="en-US" sz="2000" dirty="0"/>
+          </a:p>
+        </p:txBody>
+      </p:sp>
+      <p:sp>
+        <p:nvSpPr>
+          <p:cNvPr id="6" name="Text 4"/>
+          <p:cNvSpPr/>
+          <p:nvPr/>
+        </p:nvSpPr>
+        <p:spPr>
+          <a:xfrm>
+            <a:off x="1371600" y="2020824"/>
+            <a:ext cx="10332720" cy="411480"/>
+          </a:xfrm>
+          <a:prstGeom prst="rect">
+            <a:avLst/>
+          </a:prstGeom>
+          <a:noFill/>
+          <a:ln/>
+        </p:spPr>
+        <p:txBody>
+          <a:bodyPr wrap="square" rtlCol="0" anchor="ctr"/>
+          <a:lstStyle/>
+          <a:p>
+            <a:pPr indent="0" marL="0">
+              <a:buNone/>
+            </a:pPr>
+            <a:r>
+              <a:rPr lang="en-US" sz="1900" b="1" dirty="0">
+                <a:solidFill>
+                  <a:srgbClr val="7A3B2E"/>
+                </a:solidFill>
+                <a:latin typeface="Cambria" pitchFamily="34" charset="0"/>
+                <a:ea typeface="Cambria" pitchFamily="34" charset="-122"/>
+                <a:cs typeface="Cambria" pitchFamily="34" charset="-120"/>
+              </a:rPr>
+              <a:t>Interrogate your own chart</a:t>
+            </a:r>
+            <a:endParaRPr lang="en-US" sz="1900" dirty="0"/>
+          </a:p>
+        </p:txBody>
+      </p:sp>
+      <p:sp>
+        <p:nvSpPr>
+          <p:cNvPr id="7" name="Text 5"/>
+          <p:cNvSpPr/>
+          <p:nvPr/>
+        </p:nvSpPr>
+        <p:spPr>
+          <a:xfrm>
+            <a:off x="1371600" y="2441448"/>
+            <a:ext cx="10332720" cy="914400"/>
+          </a:xfrm>
+          <a:prstGeom prst="rect">
+            <a:avLst/>
+          </a:prstGeom>
+          <a:noFill/>
+          <a:ln/>
+        </p:spPr>
+        <p:txBody>
+          <a:bodyPr wrap="square" rtlCol="0" anchor="t">
+            <a:spAutoFit/>
+          </a:bodyPr>
+          <a:lstStyle/>
+          <a:p>
+            <a:pPr indent="0" marL="0">
+              <a:lnSpc>
+                <a:spcPct val="112000"/>
+              </a:lnSpc>
+              <a:buNone/>
+            </a:pPr>
+            <a:r>
+              <a:rPr lang="en-US" sz="1450" dirty="0">
+                <a:solidFill>
+                  <a:srgbClr val="1A1A1A"/>
+                </a:solidFill>
+                <a:latin typeface="Calibri" pitchFamily="34" charset="0"/>
+                <a:ea typeface="Calibri" pitchFamily="34" charset="-122"/>
+                <a:cs typeface="Calibri" pitchFamily="34" charset="-120"/>
+              </a:rPr>
+              <a:t>Ten weeks on other people's charts; now the ten minutes on yours.</a:t>
+            </a:r>
+            <a:endParaRPr lang="en-US" sz="1450" dirty="0"/>
+          </a:p>
+        </p:txBody>
+      </p:sp>
+      <p:sp>
+        <p:nvSpPr>
+          <p:cNvPr id="8" name="Shape 6"/>
+          <p:cNvSpPr/>
+          <p:nvPr/>
+        </p:nvSpPr>
+        <p:spPr>
+          <a:xfrm>
+            <a:off x="640080" y="3520440"/>
+            <a:ext cx="457200" cy="457200"/>
+          </a:xfrm>
+          <a:prstGeom prst="roundRect">
+            <a:avLst>
+              <a:gd name="adj" fmla="val 16000"/>
+            </a:avLst>
+          </a:prstGeom>
+          <a:solidFill>
+            <a:srgbClr val="3F6F5F"/>
+          </a:solidFill>
+          <a:ln/>
+        </p:spPr>
+      </p:sp>
+      <p:sp>
+        <p:nvSpPr>
+          <p:cNvPr id="9" name="Text 7"/>
+          <p:cNvSpPr/>
+          <p:nvPr/>
+        </p:nvSpPr>
+        <p:spPr>
+          <a:xfrm>
+            <a:off x="640080" y="3520440"/>
+            <a:ext cx="457200" cy="457200"/>
+          </a:xfrm>
+          <a:prstGeom prst="rect">
+            <a:avLst/>
+          </a:prstGeom>
+          <a:noFill/>
+          <a:ln/>
+        </p:spPr>
+        <p:txBody>
+          <a:bodyPr wrap="square" rtlCol="0" anchor="ctr"/>
+          <a:lstStyle/>
+          <a:p>
+            <a:pPr algn="ctr" indent="0" marL="0">
+              <a:buNone/>
+            </a:pPr>
+            <a:r>
+              <a:rPr lang="en-US" sz="2000" b="1" dirty="0">
+                <a:solidFill>
+                  <a:srgbClr val="FFFFFF"/>
+                </a:solidFill>
+                <a:latin typeface="Cambria" pitchFamily="34" charset="0"/>
+                <a:ea typeface="Cambria" pitchFamily="34" charset="-122"/>
+                <a:cs typeface="Cambria" pitchFamily="34" charset="-120"/>
+              </a:rPr>
+              <a:t>2</a:t>
+            </a:r>
+            <a:endParaRPr lang="en-US" sz="2000" dirty="0"/>
+          </a:p>
+        </p:txBody>
+      </p:sp>
+      <p:sp>
+        <p:nvSpPr>
+          <p:cNvPr id="10" name="Text 8"/>
+          <p:cNvSpPr/>
+          <p:nvPr/>
+        </p:nvSpPr>
+        <p:spPr>
+          <a:xfrm>
+            <a:off x="1371600" y="3483864"/>
+            <a:ext cx="10332720" cy="411480"/>
+          </a:xfrm>
+          <a:prstGeom prst="rect">
+            <a:avLst/>
+          </a:prstGeom>
+          <a:noFill/>
+          <a:ln/>
+        </p:spPr>
+        <p:txBody>
+          <a:bodyPr wrap="square" rtlCol="0" anchor="ctr"/>
+          <a:lstStyle/>
+          <a:p>
+            <a:pPr indent="0" marL="0">
+              <a:buNone/>
+            </a:pPr>
+            <a:r>
+              <a:rPr lang="en-US" sz="1900" b="1" dirty="0">
+                <a:solidFill>
+                  <a:srgbClr val="3F6F5F"/>
+                </a:solidFill>
+                <a:latin typeface="Cambria" pitchFamily="34" charset="0"/>
+                <a:ea typeface="Cambria" pitchFamily="34" charset="-122"/>
+                <a:cs typeface="Cambria" pitchFamily="34" charset="-120"/>
+              </a:rPr>
+              <a:t>No single right way</a:t>
+            </a:r>
+            <a:endParaRPr lang="en-US" sz="1900" dirty="0"/>
+          </a:p>
+        </p:txBody>
+      </p:sp>
+      <p:sp>
+        <p:nvSpPr>
+          <p:cNvPr id="11" name="Text 9"/>
+          <p:cNvSpPr/>
+          <p:nvPr/>
+        </p:nvSpPr>
+        <p:spPr>
+          <a:xfrm>
+            <a:off x="1371600" y="3904488"/>
+            <a:ext cx="10332720" cy="914400"/>
+          </a:xfrm>
+          <a:prstGeom prst="rect">
+            <a:avLst/>
+          </a:prstGeom>
+          <a:noFill/>
+          <a:ln/>
+        </p:spPr>
+        <p:txBody>
+          <a:bodyPr wrap="square" rtlCol="0" anchor="t">
+            <a:spAutoFit/>
+          </a:bodyPr>
+          <a:lstStyle/>
+          <a:p>
+            <a:pPr indent="0" marL="0">
+              <a:lnSpc>
+                <a:spcPct val="112000"/>
+              </a:lnSpc>
+              <a:buNone/>
+            </a:pPr>
+            <a:r>
+              <a:rPr lang="en-US" sz="1450" dirty="0">
+                <a:solidFill>
+                  <a:srgbClr val="1A1A1A"/>
+                </a:solidFill>
+                <a:latin typeface="Calibri" pitchFamily="34" charset="0"/>
+                <a:ea typeface="Calibri" pitchFamily="34" charset="-122"/>
+                <a:cs typeface="Calibri" pitchFamily="34" charset="-120"/>
+              </a:rPr>
+              <a:t>Three published essays, three defensible sets of choices.</a:t>
+            </a:r>
+            <a:endParaRPr lang="en-US" sz="1450" dirty="0"/>
+          </a:p>
+        </p:txBody>
+      </p:sp>
+      <p:sp>
+        <p:nvSpPr>
+          <p:cNvPr id="12" name="Shape 10"/>
+          <p:cNvSpPr/>
+          <p:nvPr/>
+        </p:nvSpPr>
+        <p:spPr>
+          <a:xfrm>
+            <a:off x="640080" y="4983480"/>
+            <a:ext cx="457200" cy="457200"/>
+          </a:xfrm>
+          <a:prstGeom prst="roundRect">
+            <a:avLst>
+              <a:gd name="adj" fmla="val 16000"/>
+            </a:avLst>
+          </a:prstGeom>
+          <a:solidFill>
+            <a:srgbClr val="B9852F"/>
+          </a:solidFill>
+          <a:ln/>
+        </p:spPr>
+      </p:sp>
+      <p:sp>
+        <p:nvSpPr>
+          <p:cNvPr id="13" name="Text 11"/>
+          <p:cNvSpPr/>
+          <p:nvPr/>
+        </p:nvSpPr>
+        <p:spPr>
+          <a:xfrm>
+            <a:off x="640080" y="4983480"/>
+            <a:ext cx="457200" cy="457200"/>
+          </a:xfrm>
+          <a:prstGeom prst="rect">
+            <a:avLst/>
+          </a:prstGeom>
+          <a:noFill/>
+          <a:ln/>
+        </p:spPr>
+        <p:txBody>
+          <a:bodyPr wrap="square" rtlCol="0" anchor="ctr"/>
+          <a:lstStyle/>
+          <a:p>
+            <a:pPr algn="ctr" indent="0" marL="0">
+              <a:buNone/>
+            </a:pPr>
+            <a:r>
+              <a:rPr lang="en-US" sz="2000" b="1" dirty="0">
+                <a:solidFill>
+                  <a:srgbClr val="FFFFFF"/>
+                </a:solidFill>
+                <a:latin typeface="Cambria" pitchFamily="34" charset="0"/>
+                <a:ea typeface="Cambria" pitchFamily="34" charset="-122"/>
+                <a:cs typeface="Cambria" pitchFamily="34" charset="-120"/>
+              </a:rPr>
+              <a:t>3</a:t>
+            </a:r>
+            <a:endParaRPr lang="en-US" sz="2000" dirty="0"/>
+          </a:p>
+        </p:txBody>
+      </p:sp>
+      <p:sp>
+        <p:nvSpPr>
+          <p:cNvPr id="14" name="Text 12"/>
+          <p:cNvSpPr/>
+          <p:nvPr/>
+        </p:nvSpPr>
+        <p:spPr>
+          <a:xfrm>
+            <a:off x="1371600" y="4946904"/>
+            <a:ext cx="10332720" cy="411480"/>
+          </a:xfrm>
+          <a:prstGeom prst="rect">
+            <a:avLst/>
+          </a:prstGeom>
+          <a:noFill/>
+          <a:ln/>
+        </p:spPr>
+        <p:txBody>
+          <a:bodyPr wrap="square" rtlCol="0" anchor="ctr"/>
+          <a:lstStyle/>
+          <a:p>
+            <a:pPr indent="0" marL="0">
+              <a:buNone/>
+            </a:pPr>
+            <a:r>
+              <a:rPr lang="en-US" sz="1900" b="1" dirty="0">
+                <a:solidFill>
+                  <a:srgbClr val="B9852F"/>
+                </a:solidFill>
+                <a:latin typeface="Cambria" pitchFamily="34" charset="0"/>
+                <a:ea typeface="Cambria" pitchFamily="34" charset="-122"/>
+                <a:cs typeface="Cambria" pitchFamily="34" charset="-120"/>
+              </a:rPr>
+              <a:t>Make something real</a:t>
+            </a:r>
+            <a:endParaRPr lang="en-US" sz="1900" dirty="0"/>
+          </a:p>
+        </p:txBody>
+      </p:sp>
+      <p:sp>
+        <p:nvSpPr>
+          <p:cNvPr id="15" name="Text 13"/>
+          <p:cNvSpPr/>
+          <p:nvPr/>
+        </p:nvSpPr>
+        <p:spPr>
+          <a:xfrm>
+            <a:off x="1371600" y="5367528"/>
+            <a:ext cx="10332720" cy="914400"/>
+          </a:xfrm>
+          <a:prstGeom prst="rect">
+            <a:avLst/>
+          </a:prstGeom>
+          <a:noFill/>
+          <a:ln/>
+        </p:spPr>
+        <p:txBody>
+          <a:bodyPr wrap="square" rtlCol="0" anchor="t">
+            <a:spAutoFit/>
+          </a:bodyPr>
+          <a:lstStyle/>
+          <a:p>
+            <a:pPr indent="0" marL="0">
+              <a:lnSpc>
+                <a:spcPct val="112000"/>
+              </a:lnSpc>
+              <a:buNone/>
+            </a:pPr>
+            <a:r>
+              <a:rPr lang="en-US" sz="1450" dirty="0">
+                <a:solidFill>
+                  <a:srgbClr val="1A1A1A"/>
+                </a:solidFill>
+                <a:latin typeface="Calibri" pitchFamily="34" charset="0"/>
+                <a:ea typeface="Calibri" pitchFamily="34" charset="-122"/>
+                <a:cs typeface="Calibri" pitchFamily="34" charset="-120"/>
+              </a:rPr>
+              <a:t>You leave with a deployed URL.</a:t>
+            </a:r>
+            <a:endParaRPr lang="en-US" sz="1450" dirty="0"/>
+          </a:p>
+        </p:txBody>
+      </p:sp>
+    </p:spTree>
+  </p:cSld>
+  <p:clrMapOvr>
+    <a:masterClrMapping/>
+  </p:clrMapOvr>
+</p:sld>
+</file>
+
+<file path=ppt/slides/slide11.xml><?xml version="1.0" encoding="utf-8"?>
+<p:sld xmlns:a="http://schemas.openxmlformats.org/drawingml/2006/main" xmlns:r="http://schemas.openxmlformats.org/officeDocument/2006/relationships" xmlns:p="http://schemas.openxmlformats.org/presentationml/2006/main">
+  <p:cSld name="Slide 11">
+    <p:bg>
+      <p:bgPr>
+        <a:solidFill>
+          <a:srgbClr val="4E261D"/>
+        </a:solidFill>
+      </p:bgPr>
+    </p:bg>
+    <p:spTree>
+      <p:nvGrpSpPr>
+        <p:cNvPr id="1" name=""/>
+        <p:cNvGrpSpPr/>
+        <p:nvPr/>
+      </p:nvGrpSpPr>
+      <p:grpSpPr>
+        <a:xfrm>
+          <a:off x="0" y="0"/>
+          <a:ext cx="0" cy="0"/>
+          <a:chOff x="0" y="0"/>
+          <a:chExt cx="0" cy="0"/>
+        </a:xfrm>
+      </p:grpSpPr>
+      <p:sp>
+        <p:nvSpPr>
+          <p:cNvPr id="2" name="Text 0"/>
+          <p:cNvSpPr/>
+          <p:nvPr/>
+        </p:nvSpPr>
+        <p:spPr>
+          <a:xfrm>
+            <a:off x="640080" y="1005840"/>
+            <a:ext cx="8229600" cy="320040"/>
+          </a:xfrm>
+          <a:prstGeom prst="rect">
+            <a:avLst/>
+          </a:prstGeom>
+          <a:noFill/>
+          <a:ln/>
+        </p:spPr>
+        <p:txBody>
+          <a:bodyPr wrap="square" rtlCol="0" anchor="ctr"/>
+          <a:lstStyle/>
+          <a:p>
+            <a:pPr indent="0" marL="0">
+              <a:buNone/>
+            </a:pPr>
+            <a:r>
+              <a:rPr lang="en-US" sz="1300" b="1" spc="300" kern="0" dirty="0">
+                <a:solidFill>
+                  <a:srgbClr val="B9852F"/>
+                </a:solidFill>
+                <a:latin typeface="Calibri" pitchFamily="34" charset="0"/>
+                <a:ea typeface="Calibri" pitchFamily="34" charset="-122"/>
+                <a:cs typeface="Calibri" pitchFamily="34" charset="-120"/>
+              </a:rPr>
+              <a:t>THE CHECK, AI CLOSED</a:t>
+            </a:r>
+            <a:endParaRPr lang="en-US" sz="1300" dirty="0"/>
+          </a:p>
+        </p:txBody>
+      </p:sp>
+      <p:sp>
+        <p:nvSpPr>
+          <p:cNvPr id="3" name="Text 1"/>
+          <p:cNvSpPr/>
+          <p:nvPr/>
+        </p:nvSpPr>
+        <p:spPr>
+          <a:xfrm>
+            <a:off x="640080" y="1645920"/>
+            <a:ext cx="8686800" cy="3108960"/>
+          </a:xfrm>
+          <a:prstGeom prst="rect">
+            <a:avLst/>
+          </a:prstGeom>
+          <a:noFill/>
+          <a:ln/>
+        </p:spPr>
+        <p:txBody>
+          <a:bodyPr wrap="square" rtlCol="0" anchor="t">
+            <a:spAutoFit/>
+          </a:bodyPr>
+          <a:lstStyle/>
+          <a:p>
+            <a:pPr indent="0" marL="0">
+              <a:lnSpc>
+                <a:spcPct val="115000"/>
+              </a:lnSpc>
+              <a:buNone/>
+            </a:pPr>
+            <a:r>
+              <a:rPr lang="en-US" sz="2600" dirty="0">
+                <a:solidFill>
+                  <a:srgbClr val="FFFFFF"/>
+                </a:solidFill>
+                <a:latin typeface="Cambria" pitchFamily="34" charset="0"/>
+                <a:ea typeface="Cambria" pitchFamily="34" charset="-122"/>
+                <a:cs typeface="Cambria" pitchFamily="34" charset="-120"/>
+              </a:rPr>
+              <a:t>Fix it: a planted bug in publishing/layout code (or in opted-in JS). (Competencies 1, 7.)</a:t>
+            </a:r>
+            <a:endParaRPr lang="en-US" sz="2600" dirty="0"/>
+          </a:p>
+        </p:txBody>
+      </p:sp>
+      <p:sp>
+        <p:nvSpPr>
+          <p:cNvPr id="4" name="Text 2"/>
+          <p:cNvSpPr/>
+          <p:nvPr/>
+        </p:nvSpPr>
+        <p:spPr>
+          <a:xfrm>
+            <a:off x="640080" y="6126480"/>
+            <a:ext cx="7315200" cy="365760"/>
+          </a:xfrm>
+          <a:prstGeom prst="rect">
+            <a:avLst/>
+          </a:prstGeom>
+          <a:noFill/>
+          <a:ln/>
+        </p:spPr>
+        <p:txBody>
+          <a:bodyPr wrap="square" rtlCol="0" anchor="ctr"/>
+          <a:lstStyle/>
+          <a:p>
+            <a:pPr indent="0" marL="0">
+              <a:buNone/>
+            </a:pPr>
+            <a:r>
+              <a:rPr lang="en-US" sz="1200" dirty="0">
+                <a:solidFill>
+                  <a:srgbClr val="E8DCD6"/>
+                </a:solidFill>
+                <a:latin typeface="Calibri" pitchFamily="34" charset="0"/>
+                <a:ea typeface="Calibri" pitchFamily="34" charset="-122"/>
+                <a:cs typeface="Calibri" pitchFamily="34" charset="-120"/>
+              </a:rPr>
+              <a:t>Culture as Data  ·  Week 9</a:t>
+            </a:r>
+            <a:endParaRPr lang="en-US" sz="1200" dirty="0"/>
+          </a:p>
+        </p:txBody>
+      </p:sp>
+      <p:sp>
+        <p:nvSpPr>
+          <p:cNvPr id="5" name="Shape 3"/>
+          <p:cNvSpPr/>
+          <p:nvPr/>
+        </p:nvSpPr>
+        <p:spPr>
+          <a:xfrm>
+            <a:off x="10763226" y="5580873"/>
+            <a:ext cx="87686" cy="87686"/>
+          </a:xfrm>
+          <a:prstGeom prst="ellipse">
+            <a:avLst/>
+          </a:prstGeom>
+          <a:solidFill>
+            <a:srgbClr val="7A3B2E"/>
+          </a:solidFill>
+          <a:ln/>
+        </p:spPr>
+      </p:sp>
+      <p:sp>
+        <p:nvSpPr>
+          <p:cNvPr id="6" name="Shape 4"/>
+          <p:cNvSpPr/>
+          <p:nvPr/>
+        </p:nvSpPr>
+        <p:spPr>
+          <a:xfrm>
+            <a:off x="10770371" y="5503948"/>
+            <a:ext cx="97407" cy="97407"/>
+          </a:xfrm>
+          <a:prstGeom prst="ellipse">
+            <a:avLst/>
+          </a:prstGeom>
+          <a:solidFill>
+            <a:srgbClr val="3F6F5F"/>
+          </a:solidFill>
+          <a:ln/>
+        </p:spPr>
+      </p:sp>
+      <p:sp>
+        <p:nvSpPr>
+          <p:cNvPr id="7" name="Shape 5"/>
+          <p:cNvSpPr/>
+          <p:nvPr/>
+        </p:nvSpPr>
+        <p:spPr>
+          <a:xfrm>
+            <a:off x="10487110" y="5471260"/>
+            <a:ext cx="97856" cy="97856"/>
+          </a:xfrm>
+          <a:prstGeom prst="ellipse">
+            <a:avLst/>
+          </a:prstGeom>
+          <a:solidFill>
+            <a:srgbClr val="B9852F"/>
+          </a:solidFill>
+          <a:ln/>
+        </p:spPr>
+      </p:sp>
+      <p:sp>
+        <p:nvSpPr>
+          <p:cNvPr id="8" name="Shape 6"/>
+          <p:cNvSpPr/>
+          <p:nvPr/>
+        </p:nvSpPr>
+        <p:spPr>
+          <a:xfrm>
+            <a:off x="10980241" y="6206711"/>
+            <a:ext cx="57031" cy="57031"/>
+          </a:xfrm>
+          <a:prstGeom prst="ellipse">
+            <a:avLst/>
+          </a:prstGeom>
+          <a:solidFill>
+            <a:srgbClr val="7A3B2E"/>
+          </a:solidFill>
+          <a:ln/>
+        </p:spPr>
+      </p:sp>
+      <p:sp>
+        <p:nvSpPr>
+          <p:cNvPr id="9" name="Shape 7"/>
+          <p:cNvSpPr/>
+          <p:nvPr/>
+        </p:nvSpPr>
+        <p:spPr>
+          <a:xfrm>
+            <a:off x="10756246" y="4959481"/>
+            <a:ext cx="52654" cy="52654"/>
+          </a:xfrm>
+          <a:prstGeom prst="ellipse">
+            <a:avLst/>
+          </a:prstGeom>
+          <a:solidFill>
+            <a:srgbClr val="3F6F5F"/>
+          </a:solidFill>
+          <a:ln/>
+        </p:spPr>
+      </p:sp>
+      <p:sp>
+        <p:nvSpPr>
+          <p:cNvPr id="10" name="Shape 8"/>
+          <p:cNvSpPr/>
+          <p:nvPr/>
+        </p:nvSpPr>
+        <p:spPr>
+          <a:xfrm>
+            <a:off x="10881924" y="5928189"/>
+            <a:ext cx="52722" cy="52722"/>
+          </a:xfrm>
+          <a:prstGeom prst="ellipse">
+            <a:avLst/>
+          </a:prstGeom>
+          <a:solidFill>
+            <a:srgbClr val="B9852F"/>
+          </a:solidFill>
+          <a:ln/>
+        </p:spPr>
+      </p:sp>
+      <p:sp>
+        <p:nvSpPr>
+          <p:cNvPr id="11" name="Shape 9"/>
+          <p:cNvSpPr/>
+          <p:nvPr/>
+        </p:nvSpPr>
+        <p:spPr>
+          <a:xfrm>
+            <a:off x="9863756" y="4624655"/>
+            <a:ext cx="80096" cy="80096"/>
+          </a:xfrm>
+          <a:prstGeom prst="ellipse">
+            <a:avLst/>
+          </a:prstGeom>
+          <a:solidFill>
+            <a:srgbClr val="7A3B2E"/>
+          </a:solidFill>
+          <a:ln/>
+        </p:spPr>
+      </p:sp>
+      <p:sp>
+        <p:nvSpPr>
+          <p:cNvPr id="12" name="Shape 10"/>
+          <p:cNvSpPr/>
+          <p:nvPr/>
+        </p:nvSpPr>
+        <p:spPr>
+          <a:xfrm>
+            <a:off x="11328861" y="5247499"/>
+            <a:ext cx="47906" cy="47906"/>
+          </a:xfrm>
+          <a:prstGeom prst="ellipse">
+            <a:avLst/>
+          </a:prstGeom>
+          <a:solidFill>
+            <a:srgbClr val="3F6F5F"/>
+          </a:solidFill>
+          <a:ln/>
+        </p:spPr>
+      </p:sp>
+      <p:sp>
+        <p:nvSpPr>
+          <p:cNvPr id="13" name="Shape 11"/>
+          <p:cNvSpPr/>
+          <p:nvPr/>
+        </p:nvSpPr>
+        <p:spPr>
+          <a:xfrm>
+            <a:off x="11223399" y="5045902"/>
+            <a:ext cx="88742" cy="88742"/>
+          </a:xfrm>
+          <a:prstGeom prst="ellipse">
+            <a:avLst/>
+          </a:prstGeom>
+          <a:solidFill>
+            <a:srgbClr val="B9852F"/>
+          </a:solidFill>
+          <a:ln/>
+        </p:spPr>
+      </p:sp>
+      <p:sp>
+        <p:nvSpPr>
+          <p:cNvPr id="14" name="Shape 12"/>
+          <p:cNvSpPr/>
+          <p:nvPr/>
+        </p:nvSpPr>
+        <p:spPr>
+          <a:xfrm>
+            <a:off x="10614171" y="4743763"/>
+            <a:ext cx="60870" cy="60870"/>
+          </a:xfrm>
+          <a:prstGeom prst="ellipse">
+            <a:avLst/>
+          </a:prstGeom>
+          <a:solidFill>
+            <a:srgbClr val="7A3B2E"/>
+          </a:solidFill>
+          <a:ln/>
+        </p:spPr>
+      </p:sp>
+      <p:sp>
+        <p:nvSpPr>
+          <p:cNvPr id="15" name="Shape 13"/>
+          <p:cNvSpPr/>
+          <p:nvPr/>
+        </p:nvSpPr>
+        <p:spPr>
+          <a:xfrm>
+            <a:off x="10567976" y="5064983"/>
+            <a:ext cx="96880" cy="96880"/>
+          </a:xfrm>
+          <a:prstGeom prst="ellipse">
+            <a:avLst/>
+          </a:prstGeom>
+          <a:solidFill>
+            <a:srgbClr val="3F6F5F"/>
+          </a:solidFill>
+          <a:ln/>
+        </p:spPr>
+      </p:sp>
+      <p:sp>
+        <p:nvSpPr>
+          <p:cNvPr id="16" name="Shape 14"/>
+          <p:cNvSpPr/>
+          <p:nvPr/>
+        </p:nvSpPr>
+        <p:spPr>
+          <a:xfrm>
+            <a:off x="9591294" y="4996100"/>
+            <a:ext cx="55038" cy="55038"/>
+          </a:xfrm>
+          <a:prstGeom prst="ellipse">
+            <a:avLst/>
+          </a:prstGeom>
+          <a:solidFill>
+            <a:srgbClr val="B9852F"/>
+          </a:solidFill>
+          <a:ln/>
+        </p:spPr>
+      </p:sp>
+      <p:sp>
+        <p:nvSpPr>
+          <p:cNvPr id="17" name="Shape 15"/>
+          <p:cNvSpPr/>
+          <p:nvPr/>
+        </p:nvSpPr>
+        <p:spPr>
+          <a:xfrm>
+            <a:off x="11311246" y="5261017"/>
+            <a:ext cx="67933" cy="67933"/>
+          </a:xfrm>
+          <a:prstGeom prst="ellipse">
+            <a:avLst/>
+          </a:prstGeom>
+          <a:solidFill>
+            <a:srgbClr val="7A3B2E"/>
+          </a:solidFill>
+          <a:ln/>
+        </p:spPr>
+      </p:sp>
+      <p:sp>
+        <p:nvSpPr>
+          <p:cNvPr id="18" name="Shape 16"/>
+          <p:cNvSpPr/>
+          <p:nvPr/>
+        </p:nvSpPr>
+        <p:spPr>
+          <a:xfrm>
+            <a:off x="9113671" y="4846271"/>
+            <a:ext cx="48698" cy="48698"/>
+          </a:xfrm>
+          <a:prstGeom prst="ellipse">
+            <a:avLst/>
+          </a:prstGeom>
+          <a:solidFill>
+            <a:srgbClr val="3F6F5F"/>
+          </a:solidFill>
+          <a:ln/>
+        </p:spPr>
+      </p:sp>
+    </p:spTree>
+  </p:cSld>
+  <p:clrMapOvr>
+    <a:masterClrMapping/>
+  </p:clrMapOvr>
+</p:sld>
+</file>
+
 <file path=ppt/slides/slide2.xml><?xml version="1.0" encoding="utf-8"?>
 <p:sld xmlns:a="http://schemas.openxmlformats.org/drawingml/2006/main" xmlns:r="http://schemas.openxmlformats.org/officeDocument/2006/relationships" xmlns:p="http://schemas.openxmlformats.org/presentationml/2006/main">
   <p:cSld name="Slide 2">
@@ -2461,14 +3704,34 @@
       </p:grpSpPr>
       <p:sp>
         <p:nvSpPr>
-          <p:cNvPr id="2" name="Text 0"/>
-          <p:cNvSpPr/>
-          <p:nvPr/>
-        </p:nvSpPr>
-        <p:spPr>
-          <a:xfrm>
-            <a:off x="640080" y="731520"/>
-            <a:ext cx="10058400" cy="731520"/>
+          <p:cNvPr id="2" name="Shape 0"/>
+          <p:cNvSpPr/>
+          <p:nvPr/>
+        </p:nvSpPr>
+        <p:spPr>
+          <a:xfrm>
+            <a:off x="0" y="0"/>
+            <a:ext cx="164592" cy="6858000"/>
+          </a:xfrm>
+          <a:prstGeom prst="rect">
+            <a:avLst/>
+          </a:prstGeom>
+          <a:solidFill>
+            <a:srgbClr val="7A3B2E"/>
+          </a:solidFill>
+          <a:ln/>
+        </p:spPr>
+      </p:sp>
+      <p:sp>
+        <p:nvSpPr>
+          <p:cNvPr id="3" name="Text 1"/>
+          <p:cNvSpPr/>
+          <p:nvPr/>
+        </p:nvSpPr>
+        <p:spPr>
+          <a:xfrm>
+            <a:off x="640080" y="640080"/>
+            <a:ext cx="10058400" cy="320040"/>
           </a:xfrm>
           <a:prstGeom prst="rect">
             <a:avLst/>
@@ -2478,6 +3741,47 @@
         </p:spPr>
         <p:txBody>
           <a:bodyPr wrap="square" rtlCol="0" anchor="ctr"/>
+          <a:lstStyle/>
+          <a:p>
+            <a:pPr indent="0" marL="0">
+              <a:buNone/>
+            </a:pPr>
+            <a:r>
+              <a:rPr lang="en-US" sz="1200" b="1" spc="300" kern="0" dirty="0">
+                <a:solidFill>
+                  <a:srgbClr val="7A3B2E"/>
+                </a:solidFill>
+                <a:latin typeface="Calibri" pitchFamily="34" charset="0"/>
+                <a:ea typeface="Calibri" pitchFamily="34" charset="-122"/>
+                <a:cs typeface="Calibri" pitchFamily="34" charset="-120"/>
+              </a:rPr>
+              <a:t>WEEK 9 · THE MATERIAL</a:t>
+            </a:r>
+            <a:endParaRPr lang="en-US" sz="1200" dirty="0"/>
+          </a:p>
+        </p:txBody>
+      </p:sp>
+      <p:sp>
+        <p:nvSpPr>
+          <p:cNvPr id="4" name="Text 2"/>
+          <p:cNvSpPr/>
+          <p:nvPr/>
+        </p:nvSpPr>
+        <p:spPr>
+          <a:xfrm>
+            <a:off x="640080" y="1005840"/>
+            <a:ext cx="10881360" cy="914400"/>
+          </a:xfrm>
+          <a:prstGeom prst="rect">
+            <a:avLst/>
+          </a:prstGeom>
+          <a:noFill/>
+          <a:ln/>
+        </p:spPr>
+        <p:txBody>
+          <a:bodyPr wrap="square" rtlCol="0" anchor="t">
+            <a:spAutoFit/>
+          </a:bodyPr>
           <a:lstStyle/>
           <a:p>
             <a:pPr indent="0" marL="0">
@@ -2492,7 +3796,7 @@
                 <a:ea typeface="Cambria" pitchFamily="34" charset="-122"/>
                 <a:cs typeface="Cambria" pitchFamily="34" charset="-120"/>
               </a:rPr>
-              <a:t>Three modes today</a:t>
+              <a:t>Interrogate your own chart</a:t>
             </a:r>
             <a:endParaRPr lang="en-US" sz="3000" dirty="0"/>
           </a:p>
@@ -2500,134 +3804,98 @@
       </p:sp>
       <p:sp>
         <p:nvSpPr>
-          <p:cNvPr id="3" name="Text 1"/>
-          <p:cNvSpPr/>
-          <p:nvPr/>
-        </p:nvSpPr>
-        <p:spPr>
-          <a:xfrm>
-            <a:off x="640080" y="1417320"/>
-            <a:ext cx="10058400" cy="365760"/>
-          </a:xfrm>
-          <a:prstGeom prst="rect">
-            <a:avLst/>
-          </a:prstGeom>
-          <a:noFill/>
-          <a:ln/>
-        </p:spPr>
-        <p:txBody>
-          <a:bodyPr wrap="square" rtlCol="0" anchor="ctr"/>
+          <p:cNvPr id="5" name="Shape 3"/>
+          <p:cNvSpPr/>
+          <p:nvPr/>
+        </p:nvSpPr>
+        <p:spPr>
+          <a:xfrm>
+            <a:off x="640080" y="2331720"/>
+            <a:ext cx="201168" cy="201168"/>
+          </a:xfrm>
+          <a:prstGeom prst="ellipse">
+            <a:avLst/>
+          </a:prstGeom>
+          <a:solidFill>
+            <a:srgbClr val="7A3B2E"/>
+          </a:solidFill>
+          <a:ln/>
+        </p:spPr>
+      </p:sp>
+      <p:sp>
+        <p:nvSpPr>
+          <p:cNvPr id="6" name="Text 4"/>
+          <p:cNvSpPr/>
+          <p:nvPr/>
+        </p:nvSpPr>
+        <p:spPr>
+          <a:xfrm>
+            <a:off x="1097280" y="2240280"/>
+            <a:ext cx="10607040" cy="1017270"/>
+          </a:xfrm>
+          <a:prstGeom prst="rect">
+            <a:avLst/>
+          </a:prstGeom>
+          <a:noFill/>
+          <a:ln/>
+        </p:spPr>
+        <p:txBody>
+          <a:bodyPr wrap="square" rtlCol="0" anchor="t">
+            <a:spAutoFit/>
+          </a:bodyPr>
           <a:lstStyle/>
           <a:p>
             <a:pPr indent="0" marL="0">
-              <a:buNone/>
-            </a:pPr>
-            <a:r>
-              <a:rPr lang="en-US" sz="1400" i="1" dirty="0">
-                <a:solidFill>
-                  <a:srgbClr val="6B6B63"/>
+              <a:lnSpc>
+                <a:spcPct val="112000"/>
+              </a:lnSpc>
+              <a:buNone/>
+            </a:pPr>
+            <a:r>
+              <a:rPr lang="en-US" sz="1650" dirty="0">
+                <a:solidFill>
+                  <a:srgbClr val="1A1A1A"/>
                 </a:solidFill>
                 <a:latin typeface="Calibri" pitchFamily="34" charset="0"/>
                 <a:ea typeface="Calibri" pitchFamily="34" charset="-122"/>
                 <a:cs typeface="Calibri" pitchFamily="34" charset="-120"/>
               </a:rPr>
-              <a:t>about a third of the session each</a:t>
-            </a:r>
-            <a:endParaRPr lang="en-US" sz="1400" dirty="0"/>
-          </a:p>
-        </p:txBody>
-      </p:sp>
-      <p:sp>
-        <p:nvSpPr>
-          <p:cNvPr id="4" name="Shape 2"/>
-          <p:cNvSpPr/>
-          <p:nvPr/>
-        </p:nvSpPr>
-        <p:spPr>
-          <a:xfrm>
-            <a:off x="640080" y="2194560"/>
-            <a:ext cx="3383280" cy="3291840"/>
-          </a:xfrm>
-          <a:prstGeom prst="roundRect">
-            <a:avLst>
-              <a:gd name="adj" fmla="val 3333"/>
-            </a:avLst>
-          </a:prstGeom>
-          <a:solidFill>
-            <a:srgbClr val="F4EEE8"/>
-          </a:solidFill>
-          <a:ln/>
-        </p:spPr>
-      </p:sp>
-      <p:sp>
-        <p:nvSpPr>
-          <p:cNvPr id="5" name="Shape 3"/>
-          <p:cNvSpPr/>
-          <p:nvPr/>
-        </p:nvSpPr>
-        <p:spPr>
-          <a:xfrm>
-            <a:off x="1051560" y="2606040"/>
-            <a:ext cx="548640" cy="548640"/>
+              <a:t>Does the y-axis start at zero, or is the plotting default manufacturing your trend?</a:t>
+            </a:r>
+            <a:endParaRPr lang="en-US" sz="1650" dirty="0"/>
+          </a:p>
+        </p:txBody>
+      </p:sp>
+      <p:sp>
+        <p:nvSpPr>
+          <p:cNvPr id="7" name="Shape 5"/>
+          <p:cNvSpPr/>
+          <p:nvPr/>
+        </p:nvSpPr>
+        <p:spPr>
+          <a:xfrm>
+            <a:off x="640080" y="3348990"/>
+            <a:ext cx="201168" cy="201168"/>
           </a:xfrm>
           <a:prstGeom prst="ellipse">
             <a:avLst/>
           </a:prstGeom>
           <a:solidFill>
-            <a:srgbClr val="7A3B2E"/>
-          </a:solidFill>
-          <a:ln/>
-        </p:spPr>
-      </p:sp>
-      <p:sp>
-        <p:nvSpPr>
-          <p:cNvPr id="6" name="Text 4"/>
-          <p:cNvSpPr/>
-          <p:nvPr/>
-        </p:nvSpPr>
-        <p:spPr>
-          <a:xfrm>
-            <a:off x="1005840" y="3383280"/>
-            <a:ext cx="2651760" cy="548640"/>
-          </a:xfrm>
-          <a:prstGeom prst="rect">
-            <a:avLst/>
-          </a:prstGeom>
-          <a:noFill/>
-          <a:ln/>
-        </p:spPr>
-        <p:txBody>
-          <a:bodyPr wrap="square" rtlCol="0" anchor="ctr"/>
-          <a:lstStyle/>
-          <a:p>
-            <a:pPr indent="0" marL="0">
-              <a:buNone/>
-            </a:pPr>
-            <a:r>
-              <a:rPr lang="en-US" sz="2100" b="1" dirty="0">
-                <a:solidFill>
-                  <a:srgbClr val="1A1A1A"/>
-                </a:solidFill>
-                <a:latin typeface="Cambria" pitchFamily="34" charset="0"/>
-                <a:ea typeface="Cambria" pitchFamily="34" charset="-122"/>
-                <a:cs typeface="Cambria" pitchFamily="34" charset="-120"/>
-              </a:rPr>
-              <a:t>Lecture / demo</a:t>
-            </a:r>
-            <a:endParaRPr lang="en-US" sz="2100" dirty="0"/>
-          </a:p>
-        </p:txBody>
-      </p:sp>
-      <p:sp>
-        <p:nvSpPr>
-          <p:cNvPr id="7" name="Text 5"/>
-          <p:cNvSpPr/>
-          <p:nvPr/>
-        </p:nvSpPr>
-        <p:spPr>
-          <a:xfrm>
-            <a:off x="1005840" y="3977640"/>
-            <a:ext cx="2651760" cy="1371600"/>
+            <a:srgbClr val="3F6F5F"/>
+          </a:solidFill>
+          <a:ln/>
+        </p:spPr>
+      </p:sp>
+      <p:sp>
+        <p:nvSpPr>
+          <p:cNvPr id="8" name="Text 6"/>
+          <p:cNvSpPr/>
+          <p:nvPr/>
+        </p:nvSpPr>
+        <p:spPr>
+          <a:xfrm>
+            <a:off x="1097280" y="3257550"/>
+            <a:ext cx="10607040" cy="1017270"/>
           </a:xfrm>
           <a:prstGeom prst="rect">
             <a:avLst/>
@@ -2643,12 +3911,12 @@
           <a:p>
             <a:pPr indent="0" marL="0">
               <a:lnSpc>
-                <a:spcPct val="115000"/>
+                <a:spcPct val="112000"/>
               </a:lnSpc>
               <a:buNone/>
             </a:pPr>
             <a:r>
-              <a:rPr lang="en-US" sz="1500" dirty="0">
+              <a:rPr lang="en-US" sz="1650" dirty="0">
                 <a:solidFill>
                   <a:srgbClr val="1A1A1A"/>
                 </a:solidFill>
@@ -2656,33 +3924,11 @@
                 <a:ea typeface="Calibri" pitchFamily="34" charset="-122"/>
                 <a:cs typeface="Calibri" pitchFamily="34" charset="-120"/>
               </a:rPr>
-              <a:t>Publishing, Quarto to GitHub Pages, static by default</a:t>
-            </a:r>
-            <a:endParaRPr lang="en-US" sz="1500" dirty="0"/>
-          </a:p>
-        </p:txBody>
-      </p:sp>
-      <p:sp>
-        <p:nvSpPr>
-          <p:cNvPr id="8" name="Shape 6"/>
-          <p:cNvSpPr/>
-          <p:nvPr/>
-        </p:nvSpPr>
-        <p:spPr>
-          <a:xfrm>
-            <a:off x="4526280" y="2194560"/>
-            <a:ext cx="3383280" cy="3291840"/>
-          </a:xfrm>
-          <a:prstGeom prst="roundRect">
-            <a:avLst>
-              <a:gd name="adj" fmla="val 3333"/>
-            </a:avLst>
-          </a:prstGeom>
-          <a:solidFill>
-            <a:srgbClr val="F4EEE8"/>
-          </a:solidFill>
-          <a:ln/>
-        </p:spPr>
+              <a:t>Is the eye pulled toward a pattern the data won't support?</a:t>
+            </a:r>
+            <a:endParaRPr lang="en-US" sz="1650" dirty="0"/>
+          </a:p>
+        </p:txBody>
       </p:sp>
       <p:sp>
         <p:nvSpPr>
@@ -2692,14 +3938,14 @@
         </p:nvSpPr>
         <p:spPr>
           <a:xfrm>
-            <a:off x="4937760" y="2606040"/>
-            <a:ext cx="548640" cy="548640"/>
+            <a:off x="640080" y="4366260"/>
+            <a:ext cx="201168" cy="201168"/>
           </a:xfrm>
           <a:prstGeom prst="ellipse">
             <a:avLst/>
           </a:prstGeom>
           <a:solidFill>
-            <a:srgbClr val="3F6F5F"/>
+            <a:srgbClr val="B9852F"/>
           </a:solidFill>
           <a:ln/>
         </p:spPr>
@@ -2712,47 +3958,8 @@
         </p:nvSpPr>
         <p:spPr>
           <a:xfrm>
-            <a:off x="4892040" y="3383280"/>
-            <a:ext cx="2651760" cy="548640"/>
-          </a:xfrm>
-          <a:prstGeom prst="rect">
-            <a:avLst/>
-          </a:prstGeom>
-          <a:noFill/>
-          <a:ln/>
-        </p:spPr>
-        <p:txBody>
-          <a:bodyPr wrap="square" rtlCol="0" anchor="ctr"/>
-          <a:lstStyle/>
-          <a:p>
-            <a:pPr indent="0" marL="0">
-              <a:buNone/>
-            </a:pPr>
-            <a:r>
-              <a:rPr lang="en-US" sz="2100" b="1" dirty="0">
-                <a:solidFill>
-                  <a:srgbClr val="1A1A1A"/>
-                </a:solidFill>
-                <a:latin typeface="Cambria" pitchFamily="34" charset="0"/>
-                <a:ea typeface="Cambria" pitchFamily="34" charset="-122"/>
-                <a:cs typeface="Cambria" pitchFamily="34" charset="-120"/>
-              </a:rPr>
-              <a:t>Workshop</a:t>
-            </a:r>
-            <a:endParaRPr lang="en-US" sz="2100" dirty="0"/>
-          </a:p>
-        </p:txBody>
-      </p:sp>
-      <p:sp>
-        <p:nvSpPr>
-          <p:cNvPr id="11" name="Text 9"/>
-          <p:cNvSpPr/>
-          <p:nvPr/>
-        </p:nvSpPr>
-        <p:spPr>
-          <a:xfrm>
-            <a:off x="4892040" y="3977640"/>
-            <a:ext cx="2651760" cy="1371600"/>
+            <a:off x="1097280" y="4274820"/>
+            <a:ext cx="10607040" cy="1017270"/>
           </a:xfrm>
           <a:prstGeom prst="rect">
             <a:avLst/>
@@ -2768,12 +3975,12 @@
           <a:p>
             <a:pPr indent="0" marL="0">
               <a:lnSpc>
-                <a:spcPct val="115000"/>
+                <a:spcPct val="112000"/>
               </a:lnSpc>
               <a:buNone/>
             </a:pPr>
             <a:r>
-              <a:rPr lang="en-US" sz="1500" dirty="0">
+              <a:rPr lang="en-US" sz="1650" dirty="0">
                 <a:solidFill>
                   <a:srgbClr val="1A1A1A"/>
                 </a:solidFill>
@@ -2781,103 +3988,42 @@
                 <a:ea typeface="Calibri" pitchFamily="34" charset="-122"/>
                 <a:cs typeface="Calibri" pitchFamily="34" charset="-120"/>
               </a:rPr>
-              <a:t>Build hands-on on your own data.</a:t>
-            </a:r>
-            <a:endParaRPr lang="en-US" sz="1500" dirty="0"/>
-          </a:p>
-        </p:txBody>
-      </p:sp>
-      <p:sp>
-        <p:nvSpPr>
-          <p:cNvPr id="12" name="Shape 10"/>
-          <p:cNvSpPr/>
-          <p:nvPr/>
-        </p:nvSpPr>
-        <p:spPr>
-          <a:xfrm>
-            <a:off x="8412480" y="2194560"/>
-            <a:ext cx="3383280" cy="3291840"/>
-          </a:xfrm>
-          <a:prstGeom prst="roundRect">
-            <a:avLst>
-              <a:gd name="adj" fmla="val 3333"/>
-            </a:avLst>
-          </a:prstGeom>
-          <a:solidFill>
-            <a:srgbClr val="F4EEE8"/>
-          </a:solidFill>
-          <a:ln/>
-        </p:spPr>
-      </p:sp>
-      <p:sp>
-        <p:nvSpPr>
-          <p:cNvPr id="13" name="Shape 11"/>
-          <p:cNvSpPr/>
-          <p:nvPr/>
-        </p:nvSpPr>
-        <p:spPr>
-          <a:xfrm>
-            <a:off x="8823960" y="2606040"/>
-            <a:ext cx="548640" cy="548640"/>
+              <a:t>What does this chart hide that a different one would show?</a:t>
+            </a:r>
+            <a:endParaRPr lang="en-US" sz="1650" dirty="0"/>
+          </a:p>
+        </p:txBody>
+      </p:sp>
+      <p:sp>
+        <p:nvSpPr>
+          <p:cNvPr id="11" name="Shape 9"/>
+          <p:cNvSpPr/>
+          <p:nvPr/>
+        </p:nvSpPr>
+        <p:spPr>
+          <a:xfrm>
+            <a:off x="640080" y="5383530"/>
+            <a:ext cx="201168" cy="201168"/>
           </a:xfrm>
           <a:prstGeom prst="ellipse">
             <a:avLst/>
           </a:prstGeom>
           <a:solidFill>
-            <a:srgbClr val="B9852F"/>
-          </a:solidFill>
-          <a:ln/>
-        </p:spPr>
-      </p:sp>
-      <p:sp>
-        <p:nvSpPr>
-          <p:cNvPr id="14" name="Text 12"/>
-          <p:cNvSpPr/>
-          <p:nvPr/>
-        </p:nvSpPr>
-        <p:spPr>
-          <a:xfrm>
-            <a:off x="8778240" y="3383280"/>
-            <a:ext cx="2651760" cy="548640"/>
-          </a:xfrm>
-          <a:prstGeom prst="rect">
-            <a:avLst/>
-          </a:prstGeom>
-          <a:noFill/>
-          <a:ln/>
-        </p:spPr>
-        <p:txBody>
-          <a:bodyPr wrap="square" rtlCol="0" anchor="ctr"/>
-          <a:lstStyle/>
-          <a:p>
-            <a:pPr indent="0" marL="0">
-              <a:buNone/>
-            </a:pPr>
-            <a:r>
-              <a:rPr lang="en-US" sz="2100" b="1" dirty="0">
-                <a:solidFill>
-                  <a:srgbClr val="1A1A1A"/>
-                </a:solidFill>
-                <a:latin typeface="Cambria" pitchFamily="34" charset="0"/>
-                <a:ea typeface="Cambria" pitchFamily="34" charset="-122"/>
-                <a:cs typeface="Cambria" pitchFamily="34" charset="-120"/>
-              </a:rPr>
-              <a:t>Discussion</a:t>
-            </a:r>
-            <a:endParaRPr lang="en-US" sz="2100" dirty="0"/>
-          </a:p>
-        </p:txBody>
-      </p:sp>
-      <p:sp>
-        <p:nvSpPr>
-          <p:cNvPr id="15" name="Text 13"/>
-          <p:cNvSpPr/>
-          <p:nvPr/>
-        </p:nvSpPr>
-        <p:spPr>
-          <a:xfrm>
-            <a:off x="8778240" y="3977640"/>
-            <a:ext cx="2651760" cy="1371600"/>
+            <a:srgbClr val="7A3B2E"/>
+          </a:solidFill>
+          <a:ln/>
+        </p:spPr>
+      </p:sp>
+      <p:sp>
+        <p:nvSpPr>
+          <p:cNvPr id="12" name="Text 10"/>
+          <p:cNvSpPr/>
+          <p:nvPr/>
+        </p:nvSpPr>
+        <p:spPr>
+          <a:xfrm>
+            <a:off x="1097280" y="5292090"/>
+            <a:ext cx="10607040" cy="1017270"/>
           </a:xfrm>
           <a:prstGeom prst="rect">
             <a:avLst/>
@@ -2893,12 +4039,12 @@
           <a:p>
             <a:pPr indent="0" marL="0">
               <a:lnSpc>
-                <a:spcPct val="115000"/>
+                <a:spcPct val="112000"/>
               </a:lnSpc>
               <a:buNone/>
             </a:pPr>
             <a:r>
-              <a:rPr lang="en-US" sz="1500" dirty="0">
+              <a:rPr lang="en-US" sz="1650" dirty="0">
                 <a:solidFill>
                   <a:srgbClr val="1A1A1A"/>
                 </a:solidFill>
@@ -2906,9 +4052,9 @@
                 <a:ea typeface="Calibri" pitchFamily="34" charset="-122"/>
                 <a:cs typeface="Calibri" pitchFamily="34" charset="-120"/>
               </a:rPr>
-              <a:t>Interrogate the study, debate it, or critique each other's work.</a:t>
-            </a:r>
-            <a:endParaRPr lang="en-US" sz="1500" dirty="0"/>
+              <a:t>Ten weeks interrogating other people's charts. These ten minutes are for yours. Fix one thing.</a:t>
+            </a:r>
+            <a:endParaRPr lang="en-US" sz="1650" dirty="0"/>
           </a:p>
         </p:txBody>
       </p:sp>
@@ -2946,14 +4092,34 @@
       </p:grpSpPr>
       <p:sp>
         <p:nvSpPr>
-          <p:cNvPr id="2" name="Text 0"/>
+          <p:cNvPr id="2" name="Shape 0"/>
+          <p:cNvSpPr/>
+          <p:nvPr/>
+        </p:nvSpPr>
+        <p:spPr>
+          <a:xfrm>
+            <a:off x="0" y="0"/>
+            <a:ext cx="164592" cy="6858000"/>
+          </a:xfrm>
+          <a:prstGeom prst="rect">
+            <a:avLst/>
+          </a:prstGeom>
+          <a:solidFill>
+            <a:srgbClr val="3F6F5F"/>
+          </a:solidFill>
+          <a:ln/>
+        </p:spPr>
+      </p:sp>
+      <p:sp>
+        <p:nvSpPr>
+          <p:cNvPr id="3" name="Text 1"/>
           <p:cNvSpPr/>
           <p:nvPr/>
         </p:nvSpPr>
         <p:spPr>
           <a:xfrm>
             <a:off x="640080" y="640080"/>
-            <a:ext cx="10058400" cy="731520"/>
+            <a:ext cx="10058400" cy="320040"/>
           </a:xfrm>
           <a:prstGeom prst="rect">
             <a:avLst/>
@@ -2963,6 +4129,47 @@
         </p:spPr>
         <p:txBody>
           <a:bodyPr wrap="square" rtlCol="0" anchor="ctr"/>
+          <a:lstStyle/>
+          <a:p>
+            <a:pPr indent="0" marL="0">
+              <a:buNone/>
+            </a:pPr>
+            <a:r>
+              <a:rPr lang="en-US" sz="1200" b="1" spc="300" kern="0" dirty="0">
+                <a:solidFill>
+                  <a:srgbClr val="3F6F5F"/>
+                </a:solidFill>
+                <a:latin typeface="Calibri" pitchFamily="34" charset="0"/>
+                <a:ea typeface="Calibri" pitchFamily="34" charset="-122"/>
+                <a:cs typeface="Calibri" pitchFamily="34" charset="-120"/>
+              </a:rPr>
+              <a:t>WEEK 9 · THE MATERIAL</a:t>
+            </a:r>
+            <a:endParaRPr lang="en-US" sz="1200" dirty="0"/>
+          </a:p>
+        </p:txBody>
+      </p:sp>
+      <p:sp>
+        <p:nvSpPr>
+          <p:cNvPr id="4" name="Text 2"/>
+          <p:cNvSpPr/>
+          <p:nvPr/>
+        </p:nvSpPr>
+        <p:spPr>
+          <a:xfrm>
+            <a:off x="640080" y="1005840"/>
+            <a:ext cx="10881360" cy="914400"/>
+          </a:xfrm>
+          <a:prstGeom prst="rect">
+            <a:avLst/>
+          </a:prstGeom>
+          <a:noFill/>
+          <a:ln/>
+        </p:spPr>
+        <p:txBody>
+          <a:bodyPr wrap="square" rtlCol="0" anchor="t">
+            <a:spAutoFit/>
+          </a:bodyPr>
           <a:lstStyle/>
           <a:p>
             <a:pPr indent="0" marL="0">
@@ -2977,7 +4184,7 @@
                 <a:ea typeface="Cambria" pitchFamily="34" charset="-122"/>
                 <a:cs typeface="Cambria" pitchFamily="34" charset="-120"/>
               </a:rPr>
-              <a:t>The session</a:t>
+              <a:t>No single right way</a:t>
             </a:r>
             <a:endParaRPr lang="en-US" sz="3000" dirty="0"/>
           </a:p>
@@ -2985,19 +4192,17 @@
       </p:sp>
       <p:sp>
         <p:nvSpPr>
-          <p:cNvPr id="3" name="Shape 1"/>
-          <p:cNvSpPr/>
-          <p:nvPr/>
-        </p:nvSpPr>
-        <p:spPr>
-          <a:xfrm>
-            <a:off x="640080" y="1572768"/>
-            <a:ext cx="868680" cy="457200"/>
-          </a:xfrm>
-          <a:prstGeom prst="roundRect">
-            <a:avLst>
-              <a:gd name="adj" fmla="val 12000"/>
-            </a:avLst>
+          <p:cNvPr id="5" name="Shape 3"/>
+          <p:cNvSpPr/>
+          <p:nvPr/>
+        </p:nvSpPr>
+        <p:spPr>
+          <a:xfrm>
+            <a:off x="640080" y="2331720"/>
+            <a:ext cx="201168" cy="201168"/>
+          </a:xfrm>
+          <a:prstGeom prst="ellipse">
+            <a:avLst/>
           </a:prstGeom>
           <a:solidFill>
             <a:srgbClr val="7A3B2E"/>
@@ -3007,71 +4212,99 @@
       </p:sp>
       <p:sp>
         <p:nvSpPr>
-          <p:cNvPr id="4" name="Text 2"/>
-          <p:cNvSpPr/>
-          <p:nvPr/>
-        </p:nvSpPr>
-        <p:spPr>
-          <a:xfrm>
-            <a:off x="640080" y="1572768"/>
-            <a:ext cx="868680" cy="457200"/>
-          </a:xfrm>
-          <a:prstGeom prst="rect">
-            <a:avLst/>
-          </a:prstGeom>
-          <a:noFill/>
-          <a:ln/>
-        </p:spPr>
-        <p:txBody>
-          <a:bodyPr wrap="square" rtlCol="0" anchor="ctr"/>
-          <a:lstStyle/>
-          <a:p>
-            <a:pPr algn="ctr" indent="0" marL="0">
-              <a:buNone/>
-            </a:pPr>
-            <a:r>
-              <a:rPr lang="en-US" sz="1100" b="1" dirty="0">
-                <a:solidFill>
-                  <a:srgbClr val="FFFFFF"/>
+          <p:cNvPr id="6" name="Text 4"/>
+          <p:cNvSpPr/>
+          <p:nvPr/>
+        </p:nvSpPr>
+        <p:spPr>
+          <a:xfrm>
+            <a:off x="1097280" y="2240280"/>
+            <a:ext cx="10607040" cy="1051560"/>
+          </a:xfrm>
+          <a:prstGeom prst="rect">
+            <a:avLst/>
+          </a:prstGeom>
+          <a:noFill/>
+          <a:ln/>
+        </p:spPr>
+        <p:txBody>
+          <a:bodyPr wrap="square" rtlCol="0" anchor="t">
+            <a:spAutoFit/>
+          </a:bodyPr>
+          <a:lstStyle/>
+          <a:p>
+            <a:pPr indent="0" marL="0">
+              <a:lnSpc>
+                <a:spcPct val="112000"/>
+              </a:lnSpc>
+              <a:buNone/>
+            </a:pPr>
+            <a:r>
+              <a:rPr lang="en-US" sz="1650" dirty="0">
+                <a:solidFill>
+                  <a:srgbClr val="1A1A1A"/>
                 </a:solidFill>
                 <a:latin typeface="Calibri" pitchFamily="34" charset="0"/>
                 <a:ea typeface="Calibri" pitchFamily="34" charset="-122"/>
                 <a:cs typeface="Calibri" pitchFamily="34" charset="-120"/>
               </a:rPr>
-              <a:t>0:00</a:t>
-            </a:r>
-            <a:endParaRPr lang="en-US" sz="1100" dirty="0"/>
-          </a:p>
-        </p:txBody>
-      </p:sp>
-      <p:sp>
-        <p:nvSpPr>
-          <p:cNvPr id="5" name="Text 3"/>
-          <p:cNvSpPr/>
-          <p:nvPr/>
-        </p:nvSpPr>
-        <p:spPr>
-          <a:xfrm>
-            <a:off x="1691640" y="1554480"/>
-            <a:ext cx="9646920" cy="566928"/>
-          </a:xfrm>
-          <a:prstGeom prst="rect">
-            <a:avLst/>
-          </a:prstGeom>
-          <a:noFill/>
-          <a:ln/>
-        </p:spPr>
-        <p:txBody>
-          <a:bodyPr wrap="square" rtlCol="0" anchor="ctr">
+              <a:t>Three published essays, same goal, three defensible sets of choices: a Pudding piece, an Observable notebook, a Quarto site.</a:t>
+            </a:r>
+            <a:endParaRPr lang="en-US" sz="1650" dirty="0"/>
+          </a:p>
+        </p:txBody>
+      </p:sp>
+      <p:sp>
+        <p:nvSpPr>
+          <p:cNvPr id="7" name="Shape 5"/>
+          <p:cNvSpPr/>
+          <p:nvPr/>
+        </p:nvSpPr>
+        <p:spPr>
+          <a:xfrm>
+            <a:off x="640080" y="3383280"/>
+            <a:ext cx="201168" cy="201168"/>
+          </a:xfrm>
+          <a:prstGeom prst="ellipse">
+            <a:avLst/>
+          </a:prstGeom>
+          <a:solidFill>
+            <a:srgbClr val="3F6F5F"/>
+          </a:solidFill>
+          <a:ln/>
+        </p:spPr>
+      </p:sp>
+      <p:sp>
+        <p:nvSpPr>
+          <p:cNvPr id="8" name="Text 6"/>
+          <p:cNvSpPr/>
+          <p:nvPr/>
+        </p:nvSpPr>
+        <p:spPr>
+          <a:xfrm>
+            <a:off x="1097280" y="3291840"/>
+            <a:ext cx="10607040" cy="1051560"/>
+          </a:xfrm>
+          <a:prstGeom prst="rect">
+            <a:avLst/>
+          </a:prstGeom>
+          <a:noFill/>
+          <a:ln/>
+        </p:spPr>
+        <p:txBody>
+          <a:bodyPr wrap="square" rtlCol="0" anchor="t">
             <a:spAutoFit/>
           </a:bodyPr>
           <a:lstStyle/>
           <a:p>
             <a:pPr indent="0" marL="0">
-              <a:buNone/>
-            </a:pPr>
-            <a:r>
-              <a:rPr lang="en-US" sz="1250" dirty="0">
+              <a:lnSpc>
+                <a:spcPct val="112000"/>
+              </a:lnSpc>
+              <a:buNone/>
+            </a:pPr>
+            <a:r>
+              <a:rPr lang="en-US" sz="1650" dirty="0">
                 <a:solidFill>
                   <a:srgbClr val="1A1A1A"/>
                 </a:solidFill>
@@ -3079,519 +4312,73 @@
                 <a:ea typeface="Calibri" pitchFamily="34" charset="-122"/>
                 <a:cs typeface="Calibri" pitchFamily="34" charset="-120"/>
               </a:rPr>
-              <a:t>Look at This: the three essays, common structure, divergent choices.</a:t>
-            </a:r>
-            <a:endParaRPr lang="en-US" sz="1250" dirty="0"/>
-          </a:p>
-        </p:txBody>
-      </p:sp>
-      <p:sp>
-        <p:nvSpPr>
-          <p:cNvPr id="6" name="Shape 4"/>
-          <p:cNvSpPr/>
-          <p:nvPr/>
-        </p:nvSpPr>
-        <p:spPr>
-          <a:xfrm>
-            <a:off x="640080" y="2139696"/>
-            <a:ext cx="868680" cy="457200"/>
-          </a:xfrm>
-          <a:prstGeom prst="roundRect">
-            <a:avLst>
-              <a:gd name="adj" fmla="val 12000"/>
-            </a:avLst>
-          </a:prstGeom>
-          <a:solidFill>
-            <a:srgbClr val="7A3B2E"/>
-          </a:solidFill>
-          <a:ln/>
-        </p:spPr>
-      </p:sp>
-      <p:sp>
-        <p:nvSpPr>
-          <p:cNvPr id="7" name="Text 5"/>
-          <p:cNvSpPr/>
-          <p:nvPr/>
-        </p:nvSpPr>
-        <p:spPr>
-          <a:xfrm>
-            <a:off x="640080" y="2139696"/>
-            <a:ext cx="868680" cy="457200"/>
-          </a:xfrm>
-          <a:prstGeom prst="rect">
-            <a:avLst/>
-          </a:prstGeom>
-          <a:noFill/>
-          <a:ln/>
-        </p:spPr>
-        <p:txBody>
-          <a:bodyPr wrap="square" rtlCol="0" anchor="ctr"/>
-          <a:lstStyle/>
-          <a:p>
-            <a:pPr algn="ctr" indent="0" marL="0">
-              <a:buNone/>
-            </a:pPr>
-            <a:r>
-              <a:rPr lang="en-US" sz="1100" b="1" dirty="0">
-                <a:solidFill>
-                  <a:srgbClr val="FFFFFF"/>
+              <a:t>A structure that works: hook, corpus note, finding, how-it-could-be-wrong, appendix.</a:t>
+            </a:r>
+            <a:endParaRPr lang="en-US" sz="1650" dirty="0"/>
+          </a:p>
+        </p:txBody>
+      </p:sp>
+      <p:sp>
+        <p:nvSpPr>
+          <p:cNvPr id="9" name="Shape 7"/>
+          <p:cNvSpPr/>
+          <p:nvPr/>
+        </p:nvSpPr>
+        <p:spPr>
+          <a:xfrm>
+            <a:off x="640080" y="4434840"/>
+            <a:ext cx="201168" cy="201168"/>
+          </a:xfrm>
+          <a:prstGeom prst="ellipse">
+            <a:avLst/>
+          </a:prstGeom>
+          <a:solidFill>
+            <a:srgbClr val="B9852F"/>
+          </a:solidFill>
+          <a:ln/>
+        </p:spPr>
+      </p:sp>
+      <p:sp>
+        <p:nvSpPr>
+          <p:cNvPr id="10" name="Text 8"/>
+          <p:cNvSpPr/>
+          <p:nvPr/>
+        </p:nvSpPr>
+        <p:spPr>
+          <a:xfrm>
+            <a:off x="1097280" y="4343400"/>
+            <a:ext cx="10607040" cy="1051560"/>
+          </a:xfrm>
+          <a:prstGeom prst="rect">
+            <a:avLst/>
+          </a:prstGeom>
+          <a:noFill/>
+          <a:ln/>
+        </p:spPr>
+        <p:txBody>
+          <a:bodyPr wrap="square" rtlCol="0" anchor="t">
+            <a:spAutoFit/>
+          </a:bodyPr>
+          <a:lstStyle/>
+          <a:p>
+            <a:pPr indent="0" marL="0">
+              <a:lnSpc>
+                <a:spcPct val="112000"/>
+              </a:lnSpc>
+              <a:buNone/>
+            </a:pPr>
+            <a:r>
+              <a:rPr lang="en-US" sz="1650" dirty="0">
+                <a:solidFill>
+                  <a:srgbClr val="1A1A1A"/>
                 </a:solidFill>
                 <a:latin typeface="Calibri" pitchFamily="34" charset="0"/>
                 <a:ea typeface="Calibri" pitchFamily="34" charset="-122"/>
                 <a:cs typeface="Calibri" pitchFamily="34" charset="-120"/>
               </a:rPr>
-              <a:t>0:15</a:t>
-            </a:r>
-            <a:endParaRPr lang="en-US" sz="1100" dirty="0"/>
-          </a:p>
-        </p:txBody>
-      </p:sp>
-      <p:sp>
-        <p:nvSpPr>
-          <p:cNvPr id="8" name="Text 6"/>
-          <p:cNvSpPr/>
-          <p:nvPr/>
-        </p:nvSpPr>
-        <p:spPr>
-          <a:xfrm>
-            <a:off x="1691640" y="2121408"/>
-            <a:ext cx="9646920" cy="566928"/>
-          </a:xfrm>
-          <a:prstGeom prst="rect">
-            <a:avLst/>
-          </a:prstGeom>
-          <a:noFill/>
-          <a:ln/>
-        </p:spPr>
-        <p:txBody>
-          <a:bodyPr wrap="square" rtlCol="0" anchor="ctr">
-            <a:spAutoFit/>
-          </a:bodyPr>
-          <a:lstStyle/>
-          <a:p>
-            <a:pPr indent="0" marL="0">
-              <a:buNone/>
-            </a:pPr>
-            <a:r>
-              <a:rPr lang="en-US" sz="1250" dirty="0">
-                <a:solidFill>
-                  <a:srgbClr val="1A1A1A"/>
-                </a:solidFill>
-                <a:latin typeface="Calibri" pitchFamily="34" charset="0"/>
-                <a:ea typeface="Calibri" pitchFamily="34" charset="-122"/>
-                <a:cs typeface="Calibri" pitchFamily="34" charset="-120"/>
-              </a:rPr>
-              <a:t>Structured critique (Critical Response Process) in trios: statements of meaning, maker's questions, neutral questions, permissioned opinions.</a:t>
-            </a:r>
-            <a:endParaRPr lang="en-US" sz="1250" dirty="0"/>
-          </a:p>
-        </p:txBody>
-      </p:sp>
-      <p:sp>
-        <p:nvSpPr>
-          <p:cNvPr id="9" name="Shape 7"/>
-          <p:cNvSpPr/>
-          <p:nvPr/>
-        </p:nvSpPr>
-        <p:spPr>
-          <a:xfrm>
-            <a:off x="640080" y="2706624"/>
-            <a:ext cx="868680" cy="457200"/>
-          </a:xfrm>
-          <a:prstGeom prst="roundRect">
-            <a:avLst>
-              <a:gd name="adj" fmla="val 12000"/>
-            </a:avLst>
-          </a:prstGeom>
-          <a:solidFill>
-            <a:srgbClr val="7A3B2E"/>
-          </a:solidFill>
-          <a:ln/>
-        </p:spPr>
-      </p:sp>
-      <p:sp>
-        <p:nvSpPr>
-          <p:cNvPr id="10" name="Text 8"/>
-          <p:cNvSpPr/>
-          <p:nvPr/>
-        </p:nvSpPr>
-        <p:spPr>
-          <a:xfrm>
-            <a:off x="640080" y="2706624"/>
-            <a:ext cx="868680" cy="457200"/>
-          </a:xfrm>
-          <a:prstGeom prst="rect">
-            <a:avLst/>
-          </a:prstGeom>
-          <a:noFill/>
-          <a:ln/>
-        </p:spPr>
-        <p:txBody>
-          <a:bodyPr wrap="square" rtlCol="0" anchor="ctr"/>
-          <a:lstStyle/>
-          <a:p>
-            <a:pPr algn="ctr" indent="0" marL="0">
-              <a:buNone/>
-            </a:pPr>
-            <a:r>
-              <a:rPr lang="en-US" sz="1100" b="1" dirty="0">
-                <a:solidFill>
-                  <a:srgbClr val="FFFFFF"/>
-                </a:solidFill>
-                <a:latin typeface="Calibri" pitchFamily="34" charset="0"/>
-                <a:ea typeface="Calibri" pitchFamily="34" charset="-122"/>
-                <a:cs typeface="Calibri" pitchFamily="34" charset="-120"/>
-              </a:rPr>
-              <a:t>0:50</a:t>
-            </a:r>
-            <a:endParaRPr lang="en-US" sz="1100" dirty="0"/>
-          </a:p>
-        </p:txBody>
-      </p:sp>
-      <p:sp>
-        <p:nvSpPr>
-          <p:cNvPr id="11" name="Text 9"/>
-          <p:cNvSpPr/>
-          <p:nvPr/>
-        </p:nvSpPr>
-        <p:spPr>
-          <a:xfrm>
-            <a:off x="1691640" y="2688336"/>
-            <a:ext cx="9646920" cy="566928"/>
-          </a:xfrm>
-          <a:prstGeom prst="rect">
-            <a:avLst/>
-          </a:prstGeom>
-          <a:noFill/>
-          <a:ln/>
-        </p:spPr>
-        <p:txBody>
-          <a:bodyPr wrap="square" rtlCol="0" anchor="ctr">
-            <a:spAutoFit/>
-          </a:bodyPr>
-          <a:lstStyle/>
-          <a:p>
-            <a:pPr indent="0" marL="0">
-              <a:buNone/>
-            </a:pPr>
-            <a:r>
-              <a:rPr lang="en-US" sz="1250" dirty="0">
-                <a:solidFill>
-                  <a:srgbClr val="1A1A1A"/>
-                </a:solidFill>
-                <a:latin typeface="Calibri" pitchFamily="34" charset="0"/>
-                <a:ea typeface="Calibri" pitchFamily="34" charset="-122"/>
-                <a:cs typeface="Calibri" pitchFamily="34" charset="-120"/>
-              </a:rPr>
-              <a:t>Break</a:t>
-            </a:r>
-            <a:endParaRPr lang="en-US" sz="1250" dirty="0"/>
-          </a:p>
-        </p:txBody>
-      </p:sp>
-      <p:sp>
-        <p:nvSpPr>
-          <p:cNvPr id="12" name="Shape 10"/>
-          <p:cNvSpPr/>
-          <p:nvPr/>
-        </p:nvSpPr>
-        <p:spPr>
-          <a:xfrm>
-            <a:off x="640080" y="3273552"/>
-            <a:ext cx="868680" cy="457200"/>
-          </a:xfrm>
-          <a:prstGeom prst="roundRect">
-            <a:avLst>
-              <a:gd name="adj" fmla="val 12000"/>
-            </a:avLst>
-          </a:prstGeom>
-          <a:solidFill>
-            <a:srgbClr val="7A3B2E"/>
-          </a:solidFill>
-          <a:ln/>
-        </p:spPr>
-      </p:sp>
-      <p:sp>
-        <p:nvSpPr>
-          <p:cNvPr id="13" name="Text 11"/>
-          <p:cNvSpPr/>
-          <p:nvPr/>
-        </p:nvSpPr>
-        <p:spPr>
-          <a:xfrm>
-            <a:off x="640080" y="3273552"/>
-            <a:ext cx="868680" cy="457200"/>
-          </a:xfrm>
-          <a:prstGeom prst="rect">
-            <a:avLst/>
-          </a:prstGeom>
-          <a:noFill/>
-          <a:ln/>
-        </p:spPr>
-        <p:txBody>
-          <a:bodyPr wrap="square" rtlCol="0" anchor="ctr"/>
-          <a:lstStyle/>
-          <a:p>
-            <a:pPr algn="ctr" indent="0" marL="0">
-              <a:buNone/>
-            </a:pPr>
-            <a:r>
-              <a:rPr lang="en-US" sz="1100" b="1" dirty="0">
-                <a:solidFill>
-                  <a:srgbClr val="FFFFFF"/>
-                </a:solidFill>
-                <a:latin typeface="Calibri" pitchFamily="34" charset="0"/>
-                <a:ea typeface="Calibri" pitchFamily="34" charset="-122"/>
-                <a:cs typeface="Calibri" pitchFamily="34" charset="-120"/>
-              </a:rPr>
-              <a:t>1:00</a:t>
-            </a:r>
-            <a:endParaRPr lang="en-US" sz="1100" dirty="0"/>
-          </a:p>
-        </p:txBody>
-      </p:sp>
-      <p:sp>
-        <p:nvSpPr>
-          <p:cNvPr id="14" name="Text 12"/>
-          <p:cNvSpPr/>
-          <p:nvPr/>
-        </p:nvSpPr>
-        <p:spPr>
-          <a:xfrm>
-            <a:off x="1691640" y="3255264"/>
-            <a:ext cx="9646920" cy="566928"/>
-          </a:xfrm>
-          <a:prstGeom prst="rect">
-            <a:avLst/>
-          </a:prstGeom>
-          <a:noFill/>
-          <a:ln/>
-        </p:spPr>
-        <p:txBody>
-          <a:bodyPr wrap="square" rtlCol="0" anchor="ctr">
-            <a:spAutoFit/>
-          </a:bodyPr>
-          <a:lstStyle/>
-          <a:p>
-            <a:pPr indent="0" marL="0">
-              <a:buNone/>
-            </a:pPr>
-            <a:r>
-              <a:rPr lang="en-US" sz="1250" dirty="0">
-                <a:solidFill>
-                  <a:srgbClr val="1A1A1A"/>
-                </a:solidFill>
-                <a:latin typeface="Calibri" pitchFamily="34" charset="0"/>
-                <a:ea typeface="Calibri" pitchFamily="34" charset="-122"/>
-                <a:cs typeface="Calibri" pitchFamily="34" charset="-120"/>
-              </a:rPr>
-              <a:t>Interrogate your own chart, the making-side mirror of Week 6's hand-labeling. Does the y-axis start at zero? Is the eye pulled toward a pattern the data won't support? Fix one thing.</a:t>
-            </a:r>
-            <a:endParaRPr lang="en-US" sz="1250" dirty="0"/>
-          </a:p>
-        </p:txBody>
-      </p:sp>
-      <p:sp>
-        <p:nvSpPr>
-          <p:cNvPr id="15" name="Shape 13"/>
-          <p:cNvSpPr/>
-          <p:nvPr/>
-        </p:nvSpPr>
-        <p:spPr>
-          <a:xfrm>
-            <a:off x="640080" y="3840480"/>
-            <a:ext cx="868680" cy="457200"/>
-          </a:xfrm>
-          <a:prstGeom prst="roundRect">
-            <a:avLst>
-              <a:gd name="adj" fmla="val 12000"/>
-            </a:avLst>
-          </a:prstGeom>
-          <a:solidFill>
-            <a:srgbClr val="7A3B2E"/>
-          </a:solidFill>
-          <a:ln/>
-        </p:spPr>
-      </p:sp>
-      <p:sp>
-        <p:nvSpPr>
-          <p:cNvPr id="16" name="Text 14"/>
-          <p:cNvSpPr/>
-          <p:nvPr/>
-        </p:nvSpPr>
-        <p:spPr>
-          <a:xfrm>
-            <a:off x="640080" y="3840480"/>
-            <a:ext cx="868680" cy="457200"/>
-          </a:xfrm>
-          <a:prstGeom prst="rect">
-            <a:avLst/>
-          </a:prstGeom>
-          <a:noFill/>
-          <a:ln/>
-        </p:spPr>
-        <p:txBody>
-          <a:bodyPr wrap="square" rtlCol="0" anchor="ctr"/>
-          <a:lstStyle/>
-          <a:p>
-            <a:pPr algn="ctr" indent="0" marL="0">
-              <a:buNone/>
-            </a:pPr>
-            <a:r>
-              <a:rPr lang="en-US" sz="1100" b="1" dirty="0">
-                <a:solidFill>
-                  <a:srgbClr val="FFFFFF"/>
-                </a:solidFill>
-                <a:latin typeface="Calibri" pitchFamily="34" charset="0"/>
-                <a:ea typeface="Calibri" pitchFamily="34" charset="-122"/>
-                <a:cs typeface="Calibri" pitchFamily="34" charset="-120"/>
-              </a:rPr>
-              <a:t>1:15</a:t>
-            </a:r>
-            <a:endParaRPr lang="en-US" sz="1100" dirty="0"/>
-          </a:p>
-        </p:txBody>
-      </p:sp>
-      <p:sp>
-        <p:nvSpPr>
-          <p:cNvPr id="17" name="Text 15"/>
-          <p:cNvSpPr/>
-          <p:nvPr/>
-        </p:nvSpPr>
-        <p:spPr>
-          <a:xfrm>
-            <a:off x="1691640" y="3822192"/>
-            <a:ext cx="9646920" cy="566928"/>
-          </a:xfrm>
-          <a:prstGeom prst="rect">
-            <a:avLst/>
-          </a:prstGeom>
-          <a:noFill/>
-          <a:ln/>
-        </p:spPr>
-        <p:txBody>
-          <a:bodyPr wrap="square" rtlCol="0" anchor="ctr">
-            <a:spAutoFit/>
-          </a:bodyPr>
-          <a:lstStyle/>
-          <a:p>
-            <a:pPr indent="0" marL="0">
-              <a:buNone/>
-            </a:pPr>
-            <a:r>
-              <a:rPr lang="en-US" sz="1250" dirty="0">
-                <a:solidFill>
-                  <a:srgbClr val="1A1A1A"/>
-                </a:solidFill>
-                <a:latin typeface="Calibri" pitchFamily="34" charset="0"/>
-                <a:ea typeface="Calibri" pitchFamily="34" charset="-122"/>
-                <a:cs typeface="Calibri" pitchFamily="34" charset="-120"/>
-              </a:rPr>
-              <a:t>Build lab: open the template you forked in Week 4; paste outline, charts, code; render; deploy. Static by default; JS opt-ins hit the code-review checkpoint.</a:t>
-            </a:r>
-            <a:endParaRPr lang="en-US" sz="1250" dirty="0"/>
-          </a:p>
-        </p:txBody>
-      </p:sp>
-      <p:sp>
-        <p:nvSpPr>
-          <p:cNvPr id="18" name="Shape 16"/>
-          <p:cNvSpPr/>
-          <p:nvPr/>
-        </p:nvSpPr>
-        <p:spPr>
-          <a:xfrm>
-            <a:off x="640080" y="4407408"/>
-            <a:ext cx="868680" cy="457200"/>
-          </a:xfrm>
-          <a:prstGeom prst="roundRect">
-            <a:avLst>
-              <a:gd name="adj" fmla="val 12000"/>
-            </a:avLst>
-          </a:prstGeom>
-          <a:solidFill>
-            <a:srgbClr val="7A3B2E"/>
-          </a:solidFill>
-          <a:ln/>
-        </p:spPr>
-      </p:sp>
-      <p:sp>
-        <p:nvSpPr>
-          <p:cNvPr id="19" name="Text 17"/>
-          <p:cNvSpPr/>
-          <p:nvPr/>
-        </p:nvSpPr>
-        <p:spPr>
-          <a:xfrm>
-            <a:off x="640080" y="4407408"/>
-            <a:ext cx="868680" cy="457200"/>
-          </a:xfrm>
-          <a:prstGeom prst="rect">
-            <a:avLst/>
-          </a:prstGeom>
-          <a:noFill/>
-          <a:ln/>
-        </p:spPr>
-        <p:txBody>
-          <a:bodyPr wrap="square" rtlCol="0" anchor="ctr"/>
-          <a:lstStyle/>
-          <a:p>
-            <a:pPr algn="ctr" indent="0" marL="0">
-              <a:buNone/>
-            </a:pPr>
-            <a:r>
-              <a:rPr lang="en-US" sz="1100" b="1" dirty="0">
-                <a:solidFill>
-                  <a:srgbClr val="FFFFFF"/>
-                </a:solidFill>
-                <a:latin typeface="Calibri" pitchFamily="34" charset="0"/>
-                <a:ea typeface="Calibri" pitchFamily="34" charset="-122"/>
-                <a:cs typeface="Calibri" pitchFamily="34" charset="-120"/>
-              </a:rPr>
-              <a:t>1:50</a:t>
-            </a:r>
-            <a:endParaRPr lang="en-US" sz="1100" dirty="0"/>
-          </a:p>
-        </p:txBody>
-      </p:sp>
-      <p:sp>
-        <p:nvSpPr>
-          <p:cNvPr id="20" name="Text 18"/>
-          <p:cNvSpPr/>
-          <p:nvPr/>
-        </p:nvSpPr>
-        <p:spPr>
-          <a:xfrm>
-            <a:off x="1691640" y="4389120"/>
-            <a:ext cx="9646920" cy="566928"/>
-          </a:xfrm>
-          <a:prstGeom prst="rect">
-            <a:avLst/>
-          </a:prstGeom>
-          <a:noFill/>
-          <a:ln/>
-        </p:spPr>
-        <p:txBody>
-          <a:bodyPr wrap="square" rtlCol="0" anchor="ctr">
-            <a:spAutoFit/>
-          </a:bodyPr>
-          <a:lstStyle/>
-          <a:p>
-            <a:pPr indent="0" marL="0">
-              <a:buNone/>
-            </a:pPr>
-            <a:r>
-              <a:rPr lang="en-US" sz="1250" dirty="0">
-                <a:solidFill>
-                  <a:srgbClr val="1A1A1A"/>
-                </a:solidFill>
-                <a:latin typeface="Calibri" pitchFamily="34" charset="0"/>
-                <a:ea typeface="Calibri" pitchFamily="34" charset="-122"/>
-                <a:cs typeface="Calibri" pitchFamily="34" charset="-120"/>
-              </a:rPr>
-              <a:t>Phone test in pairs. Check-out.</a:t>
-            </a:r>
-            <a:endParaRPr lang="en-US" sz="1250" dirty="0"/>
+              <a:t>Write the headline finding in one sentence before you write anything else. If you can't, the essay isn't ready.</a:t>
+            </a:r>
+            <a:endParaRPr lang="en-US" sz="1650" dirty="0"/>
           </a:p>
         </p:txBody>
       </p:sp>
@@ -3629,14 +4416,34 @@
       </p:grpSpPr>
       <p:sp>
         <p:nvSpPr>
-          <p:cNvPr id="2" name="Text 0"/>
+          <p:cNvPr id="2" name="Shape 0"/>
+          <p:cNvSpPr/>
+          <p:nvPr/>
+        </p:nvSpPr>
+        <p:spPr>
+          <a:xfrm>
+            <a:off x="0" y="0"/>
+            <a:ext cx="164592" cy="6858000"/>
+          </a:xfrm>
+          <a:prstGeom prst="rect">
+            <a:avLst/>
+          </a:prstGeom>
+          <a:solidFill>
+            <a:srgbClr val="B9852F"/>
+          </a:solidFill>
+          <a:ln/>
+        </p:spPr>
+      </p:sp>
+      <p:sp>
+        <p:nvSpPr>
+          <p:cNvPr id="3" name="Text 1"/>
           <p:cNvSpPr/>
           <p:nvPr/>
         </p:nvSpPr>
         <p:spPr>
           <a:xfrm>
             <a:off x="640080" y="640080"/>
-            <a:ext cx="10058400" cy="731520"/>
+            <a:ext cx="10058400" cy="320040"/>
           </a:xfrm>
           <a:prstGeom prst="rect">
             <a:avLst/>
@@ -3646,6 +4453,47 @@
         </p:spPr>
         <p:txBody>
           <a:bodyPr wrap="square" rtlCol="0" anchor="ctr"/>
+          <a:lstStyle/>
+          <a:p>
+            <a:pPr indent="0" marL="0">
+              <a:buNone/>
+            </a:pPr>
+            <a:r>
+              <a:rPr lang="en-US" sz="1200" b="1" spc="300" kern="0" dirty="0">
+                <a:solidFill>
+                  <a:srgbClr val="B9852F"/>
+                </a:solidFill>
+                <a:latin typeface="Calibri" pitchFamily="34" charset="0"/>
+                <a:ea typeface="Calibri" pitchFamily="34" charset="-122"/>
+                <a:cs typeface="Calibri" pitchFamily="34" charset="-120"/>
+              </a:rPr>
+              <a:t>WEEK 9 · THE MATERIAL</a:t>
+            </a:r>
+            <a:endParaRPr lang="en-US" sz="1200" dirty="0"/>
+          </a:p>
+        </p:txBody>
+      </p:sp>
+      <p:sp>
+        <p:nvSpPr>
+          <p:cNvPr id="4" name="Text 2"/>
+          <p:cNvSpPr/>
+          <p:nvPr/>
+        </p:nvSpPr>
+        <p:spPr>
+          <a:xfrm>
+            <a:off x="640080" y="1005840"/>
+            <a:ext cx="10881360" cy="914400"/>
+          </a:xfrm>
+          <a:prstGeom prst="rect">
+            <a:avLst/>
+          </a:prstGeom>
+          <a:noFill/>
+          <a:ln/>
+        </p:spPr>
+        <p:txBody>
+          <a:bodyPr wrap="square" rtlCol="0" anchor="t">
+            <a:spAutoFit/>
+          </a:bodyPr>
           <a:lstStyle/>
           <a:p>
             <a:pPr indent="0" marL="0">
@@ -3660,7 +4508,7 @@
                 <a:ea typeface="Cambria" pitchFamily="34" charset="-122"/>
                 <a:cs typeface="Cambria" pitchFamily="34" charset="-120"/>
               </a:rPr>
-              <a:t>Reading &amp; homework</a:t>
+              <a:t>Ship it</a:t>
             </a:r>
             <a:endParaRPr lang="en-US" sz="3000" dirty="0"/>
           </a:p>
@@ -3668,14 +4516,14 @@
       </p:sp>
       <p:sp>
         <p:nvSpPr>
-          <p:cNvPr id="3" name="Shape 1"/>
-          <p:cNvSpPr/>
-          <p:nvPr/>
-        </p:nvSpPr>
-        <p:spPr>
-          <a:xfrm>
-            <a:off x="640080" y="1810512"/>
-            <a:ext cx="219456" cy="219456"/>
+          <p:cNvPr id="5" name="Shape 3"/>
+          <p:cNvSpPr/>
+          <p:nvPr/>
+        </p:nvSpPr>
+        <p:spPr>
+          <a:xfrm>
+            <a:off x="640080" y="2331720"/>
+            <a:ext cx="201168" cy="201168"/>
           </a:xfrm>
           <a:prstGeom prst="ellipse">
             <a:avLst/>
@@ -3688,53 +4536,78 @@
       </p:sp>
       <p:sp>
         <p:nvSpPr>
-          <p:cNvPr id="4" name="Text 2"/>
-          <p:cNvSpPr/>
-          <p:nvPr/>
-        </p:nvSpPr>
-        <p:spPr>
-          <a:xfrm>
-            <a:off x="1051560" y="1737360"/>
-            <a:ext cx="10424160" cy="365760"/>
-          </a:xfrm>
-          <a:prstGeom prst="rect">
-            <a:avLst/>
-          </a:prstGeom>
-          <a:noFill/>
-          <a:ln/>
-        </p:spPr>
-        <p:txBody>
-          <a:bodyPr wrap="square" rtlCol="0" anchor="ctr"/>
+          <p:cNvPr id="6" name="Text 4"/>
+          <p:cNvSpPr/>
+          <p:nvPr/>
+        </p:nvSpPr>
+        <p:spPr>
+          <a:xfrm>
+            <a:off x="1097280" y="2240280"/>
+            <a:ext cx="10607040" cy="1051560"/>
+          </a:xfrm>
+          <a:prstGeom prst="rect">
+            <a:avLst/>
+          </a:prstGeom>
+          <a:noFill/>
+          <a:ln/>
+        </p:spPr>
+        <p:txBody>
+          <a:bodyPr wrap="square" rtlCol="0" anchor="t">
+            <a:spAutoFit/>
+          </a:bodyPr>
           <a:lstStyle/>
           <a:p>
             <a:pPr indent="0" marL="0">
-              <a:buNone/>
-            </a:pPr>
-            <a:r>
-              <a:rPr lang="en-US" sz="1500" b="1" dirty="0">
-                <a:solidFill>
-                  <a:srgbClr val="7A3B2E"/>
+              <a:lnSpc>
+                <a:spcPct val="112000"/>
+              </a:lnSpc>
+              <a:buNone/>
+            </a:pPr>
+            <a:r>
+              <a:rPr lang="en-US" sz="1650" dirty="0">
+                <a:solidFill>
+                  <a:srgbClr val="1A1A1A"/>
                 </a:solidFill>
                 <a:latin typeface="Calibri" pitchFamily="34" charset="0"/>
                 <a:ea typeface="Calibri" pitchFamily="34" charset="-122"/>
                 <a:cs typeface="Calibri" pitchFamily="34" charset="-120"/>
               </a:rPr>
-              <a:t>Reading</a:t>
-            </a:r>
-            <a:endParaRPr lang="en-US" sz="1500" dirty="0"/>
-          </a:p>
-        </p:txBody>
-      </p:sp>
-      <p:sp>
-        <p:nvSpPr>
-          <p:cNvPr id="5" name="Text 3"/>
-          <p:cNvSpPr/>
-          <p:nvPr/>
-        </p:nvSpPr>
-        <p:spPr>
-          <a:xfrm>
-            <a:off x="1051560" y="2121408"/>
-            <a:ext cx="10424160" cy="731520"/>
+              <a:t>Mullen's test, the course standard: "I must be able to run it." The notebook works for someone who is not you.</a:t>
+            </a:r>
+            <a:endParaRPr lang="en-US" sz="1650" dirty="0"/>
+          </a:p>
+        </p:txBody>
+      </p:sp>
+      <p:sp>
+        <p:nvSpPr>
+          <p:cNvPr id="7" name="Shape 5"/>
+          <p:cNvSpPr/>
+          <p:nvPr/>
+        </p:nvSpPr>
+        <p:spPr>
+          <a:xfrm>
+            <a:off x="640080" y="3383280"/>
+            <a:ext cx="201168" cy="201168"/>
+          </a:xfrm>
+          <a:prstGeom prst="ellipse">
+            <a:avLst/>
+          </a:prstGeom>
+          <a:solidFill>
+            <a:srgbClr val="3F6F5F"/>
+          </a:solidFill>
+          <a:ln/>
+        </p:spPr>
+      </p:sp>
+      <p:sp>
+        <p:nvSpPr>
+          <p:cNvPr id="8" name="Text 6"/>
+          <p:cNvSpPr/>
+          <p:nvPr/>
+        </p:nvSpPr>
+        <p:spPr>
+          <a:xfrm>
+            <a:off x="1097280" y="3291840"/>
+            <a:ext cx="10607040" cy="1051560"/>
           </a:xfrm>
           <a:prstGeom prst="rect">
             <a:avLst/>
@@ -3749,10 +4622,13 @@
           <a:lstStyle/>
           <a:p>
             <a:pPr indent="0" marL="0">
-              <a:buNone/>
-            </a:pPr>
-            <a:r>
-              <a:rPr lang="en-US" sz="1400" dirty="0">
+              <a:lnSpc>
+                <a:spcPct val="112000"/>
+              </a:lnSpc>
+              <a:buNone/>
+            </a:pPr>
+            <a:r>
+              <a:rPr lang="en-US" sz="1650" dirty="0">
                 <a:solidFill>
                   <a:srgbClr val="1A1A1A"/>
                 </a:solidFill>
@@ -3760,309 +4636,73 @@
                 <a:ea typeface="Calibri" pitchFamily="34" charset="-122"/>
                 <a:cs typeface="Calibri" pitchFamily="34" charset="-120"/>
               </a:rPr>
-              <a:t>None</a:t>
-            </a:r>
-            <a:endParaRPr lang="en-US" sz="1400" dirty="0"/>
-          </a:p>
-        </p:txBody>
-      </p:sp>
-      <p:sp>
-        <p:nvSpPr>
-          <p:cNvPr id="6" name="Shape 4"/>
-          <p:cNvSpPr/>
-          <p:nvPr/>
-        </p:nvSpPr>
-        <p:spPr>
-          <a:xfrm>
-            <a:off x="640080" y="2953512"/>
-            <a:ext cx="219456" cy="219456"/>
+              <a:t>A deployed URL leaves this room today.</a:t>
+            </a:r>
+            <a:endParaRPr lang="en-US" sz="1650" dirty="0"/>
+          </a:p>
+        </p:txBody>
+      </p:sp>
+      <p:sp>
+        <p:nvSpPr>
+          <p:cNvPr id="9" name="Shape 7"/>
+          <p:cNvSpPr/>
+          <p:nvPr/>
+        </p:nvSpPr>
+        <p:spPr>
+          <a:xfrm>
+            <a:off x="640080" y="4434840"/>
+            <a:ext cx="201168" cy="201168"/>
           </a:xfrm>
           <a:prstGeom prst="ellipse">
             <a:avLst/>
           </a:prstGeom>
           <a:solidFill>
-            <a:srgbClr val="3F6F5F"/>
-          </a:solidFill>
-          <a:ln/>
-        </p:spPr>
-      </p:sp>
-      <p:sp>
-        <p:nvSpPr>
-          <p:cNvPr id="7" name="Text 5"/>
-          <p:cNvSpPr/>
-          <p:nvPr/>
-        </p:nvSpPr>
-        <p:spPr>
-          <a:xfrm>
-            <a:off x="1051560" y="2880360"/>
-            <a:ext cx="10424160" cy="365760"/>
-          </a:xfrm>
-          <a:prstGeom prst="rect">
-            <a:avLst/>
-          </a:prstGeom>
-          <a:noFill/>
-          <a:ln/>
-        </p:spPr>
-        <p:txBody>
-          <a:bodyPr wrap="square" rtlCol="0" anchor="ctr"/>
+            <a:srgbClr val="B9852F"/>
+          </a:solidFill>
+          <a:ln/>
+        </p:spPr>
+      </p:sp>
+      <p:sp>
+        <p:nvSpPr>
+          <p:cNvPr id="10" name="Text 8"/>
+          <p:cNvSpPr/>
+          <p:nvPr/>
+        </p:nvSpPr>
+        <p:spPr>
+          <a:xfrm>
+            <a:off x="1097280" y="4343400"/>
+            <a:ext cx="10607040" cy="1051560"/>
+          </a:xfrm>
+          <a:prstGeom prst="rect">
+            <a:avLst/>
+          </a:prstGeom>
+          <a:noFill/>
+          <a:ln/>
+        </p:spPr>
+        <p:txBody>
+          <a:bodyPr wrap="square" rtlCol="0" anchor="t">
+            <a:spAutoFit/>
+          </a:bodyPr>
           <a:lstStyle/>
           <a:p>
             <a:pPr indent="0" marL="0">
-              <a:buNone/>
-            </a:pPr>
-            <a:r>
-              <a:rPr lang="en-US" sz="1500" b="1" dirty="0">
-                <a:solidFill>
-                  <a:srgbClr val="3F6F5F"/>
+              <a:lnSpc>
+                <a:spcPct val="112000"/>
+              </a:lnSpc>
+              <a:buNone/>
+            </a:pPr>
+            <a:r>
+              <a:rPr lang="en-US" sz="1650" dirty="0">
+                <a:solidFill>
+                  <a:srgbClr val="1A1A1A"/>
                 </a:solidFill>
                 <a:latin typeface="Calibri" pitchFamily="34" charset="0"/>
                 <a:ea typeface="Calibri" pitchFamily="34" charset="-122"/>
                 <a:cs typeface="Calibri" pitchFamily="34" charset="-120"/>
               </a:rPr>
-              <a:t>Supplement</a:t>
-            </a:r>
-            <a:endParaRPr lang="en-US" sz="1500" dirty="0"/>
-          </a:p>
-        </p:txBody>
-      </p:sp>
-      <p:sp>
-        <p:nvSpPr>
-          <p:cNvPr id="8" name="Text 6"/>
-          <p:cNvSpPr/>
-          <p:nvPr/>
-        </p:nvSpPr>
-        <p:spPr>
-          <a:xfrm>
-            <a:off x="1051560" y="3264408"/>
-            <a:ext cx="10424160" cy="731520"/>
-          </a:xfrm>
-          <a:prstGeom prst="rect">
-            <a:avLst/>
-          </a:prstGeom>
-          <a:noFill/>
-          <a:ln/>
-        </p:spPr>
-        <p:txBody>
-          <a:bodyPr wrap="square" rtlCol="0" anchor="t">
-            <a:spAutoFit/>
-          </a:bodyPr>
-          <a:lstStyle/>
-          <a:p>
-            <a:pPr indent="0" marL="0">
-              <a:buNone/>
-            </a:pPr>
-            <a:r>
-              <a:rPr lang="en-US" sz="1400" dirty="0">
-                <a:solidFill>
-                  <a:srgbClr val="1A1A1A"/>
-                </a:solidFill>
-                <a:latin typeface="Calibri" pitchFamily="34" charset="0"/>
-                <a:ea typeface="Calibri" pitchFamily="34" charset="-122"/>
-                <a:cs typeface="Calibri" pitchFamily="34" charset="-120"/>
-              </a:rPr>
-              <a:t>A Pudding process post</a:t>
-            </a:r>
-            <a:endParaRPr lang="en-US" sz="1400" dirty="0"/>
-          </a:p>
-        </p:txBody>
-      </p:sp>
-      <p:sp>
-        <p:nvSpPr>
-          <p:cNvPr id="9" name="Shape 7"/>
-          <p:cNvSpPr/>
-          <p:nvPr/>
-        </p:nvSpPr>
-        <p:spPr>
-          <a:xfrm>
-            <a:off x="640080" y="4096512"/>
-            <a:ext cx="219456" cy="219456"/>
-          </a:xfrm>
-          <a:prstGeom prst="ellipse">
-            <a:avLst/>
-          </a:prstGeom>
-          <a:solidFill>
-            <a:srgbClr val="B9852F"/>
-          </a:solidFill>
-          <a:ln/>
-        </p:spPr>
-      </p:sp>
-      <p:sp>
-        <p:nvSpPr>
-          <p:cNvPr id="10" name="Text 8"/>
-          <p:cNvSpPr/>
-          <p:nvPr/>
-        </p:nvSpPr>
-        <p:spPr>
-          <a:xfrm>
-            <a:off x="1051560" y="4023360"/>
-            <a:ext cx="10424160" cy="365760"/>
-          </a:xfrm>
-          <a:prstGeom prst="rect">
-            <a:avLst/>
-          </a:prstGeom>
-          <a:noFill/>
-          <a:ln/>
-        </p:spPr>
-        <p:txBody>
-          <a:bodyPr wrap="square" rtlCol="0" anchor="ctr"/>
-          <a:lstStyle/>
-          <a:p>
-            <a:pPr indent="0" marL="0">
-              <a:buNone/>
-            </a:pPr>
-            <a:r>
-              <a:rPr lang="en-US" sz="1500" b="1" dirty="0">
-                <a:solidFill>
-                  <a:srgbClr val="B9852F"/>
-                </a:solidFill>
-                <a:latin typeface="Calibri" pitchFamily="34" charset="0"/>
-                <a:ea typeface="Calibri" pitchFamily="34" charset="-122"/>
-                <a:cs typeface="Calibri" pitchFamily="34" charset="-120"/>
-              </a:rPr>
-              <a:t>Sketch</a:t>
-            </a:r>
-            <a:endParaRPr lang="en-US" sz="1500" dirty="0"/>
-          </a:p>
-        </p:txBody>
-      </p:sp>
-      <p:sp>
-        <p:nvSpPr>
-          <p:cNvPr id="11" name="Text 9"/>
-          <p:cNvSpPr/>
-          <p:nvPr/>
-        </p:nvSpPr>
-        <p:spPr>
-          <a:xfrm>
-            <a:off x="1051560" y="4407408"/>
-            <a:ext cx="10424160" cy="731520"/>
-          </a:xfrm>
-          <a:prstGeom prst="rect">
-            <a:avLst/>
-          </a:prstGeom>
-          <a:noFill/>
-          <a:ln/>
-        </p:spPr>
-        <p:txBody>
-          <a:bodyPr wrap="square" rtlCol="0" anchor="t">
-            <a:spAutoFit/>
-          </a:bodyPr>
-          <a:lstStyle/>
-          <a:p>
-            <a:pPr indent="0" marL="0">
-              <a:buNone/>
-            </a:pPr>
-            <a:r>
-              <a:rPr lang="en-US" sz="1400" dirty="0">
-                <a:solidFill>
-                  <a:srgbClr val="1A1A1A"/>
-                </a:solidFill>
-                <a:latin typeface="Calibri" pitchFamily="34" charset="0"/>
-                <a:ea typeface="Calibri" pitchFamily="34" charset="-122"/>
-                <a:cs typeface="Calibri" pitchFamily="34" charset="-120"/>
-              </a:rPr>
-              <a:t>Title your essay; write the headline finding in one sentence.</a:t>
-            </a:r>
-            <a:endParaRPr lang="en-US" sz="1400" dirty="0"/>
-          </a:p>
-        </p:txBody>
-      </p:sp>
-      <p:sp>
-        <p:nvSpPr>
-          <p:cNvPr id="12" name="Shape 10"/>
-          <p:cNvSpPr/>
-          <p:nvPr/>
-        </p:nvSpPr>
-        <p:spPr>
-          <a:xfrm>
-            <a:off x="640080" y="5239512"/>
-            <a:ext cx="219456" cy="219456"/>
-          </a:xfrm>
-          <a:prstGeom prst="ellipse">
-            <a:avLst/>
-          </a:prstGeom>
-          <a:solidFill>
-            <a:srgbClr val="7A3B2E"/>
-          </a:solidFill>
-          <a:ln/>
-        </p:spPr>
-      </p:sp>
-      <p:sp>
-        <p:nvSpPr>
-          <p:cNvPr id="13" name="Text 11"/>
-          <p:cNvSpPr/>
-          <p:nvPr/>
-        </p:nvSpPr>
-        <p:spPr>
-          <a:xfrm>
-            <a:off x="1051560" y="5166360"/>
-            <a:ext cx="10424160" cy="365760"/>
-          </a:xfrm>
-          <a:prstGeom prst="rect">
-            <a:avLst/>
-          </a:prstGeom>
-          <a:noFill/>
-          <a:ln/>
-        </p:spPr>
-        <p:txBody>
-          <a:bodyPr wrap="square" rtlCol="0" anchor="ctr"/>
-          <a:lstStyle/>
-          <a:p>
-            <a:pPr indent="0" marL="0">
-              <a:buNone/>
-            </a:pPr>
-            <a:r>
-              <a:rPr lang="en-US" sz="1500" b="1" dirty="0">
-                <a:solidFill>
-                  <a:srgbClr val="7A3B2E"/>
-                </a:solidFill>
-                <a:latin typeface="Calibri" pitchFamily="34" charset="0"/>
-                <a:ea typeface="Calibri" pitchFamily="34" charset="-122"/>
-                <a:cs typeface="Calibri" pitchFamily="34" charset="-120"/>
-              </a:rPr>
-              <a:t>Check (AI closed)</a:t>
-            </a:r>
-            <a:endParaRPr lang="en-US" sz="1500" dirty="0"/>
-          </a:p>
-        </p:txBody>
-      </p:sp>
-      <p:sp>
-        <p:nvSpPr>
-          <p:cNvPr id="14" name="Text 12"/>
-          <p:cNvSpPr/>
-          <p:nvPr/>
-        </p:nvSpPr>
-        <p:spPr>
-          <a:xfrm>
-            <a:off x="1051560" y="5550408"/>
-            <a:ext cx="10424160" cy="731520"/>
-          </a:xfrm>
-          <a:prstGeom prst="rect">
-            <a:avLst/>
-          </a:prstGeom>
-          <a:noFill/>
-          <a:ln/>
-        </p:spPr>
-        <p:txBody>
-          <a:bodyPr wrap="square" rtlCol="0" anchor="t">
-            <a:spAutoFit/>
-          </a:bodyPr>
-          <a:lstStyle/>
-          <a:p>
-            <a:pPr indent="0" marL="0">
-              <a:buNone/>
-            </a:pPr>
-            <a:r>
-              <a:rPr lang="en-US" sz="1400" dirty="0">
-                <a:solidFill>
-                  <a:srgbClr val="1A1A1A"/>
-                </a:solidFill>
-                <a:latin typeface="Calibri" pitchFamily="34" charset="0"/>
-                <a:ea typeface="Calibri" pitchFamily="34" charset="-122"/>
-                <a:cs typeface="Calibri" pitchFamily="34" charset="-120"/>
-              </a:rPr>
-              <a:t>Fix it: a planted bug in publishing/layout code (or in opted-in JS). (Competencies 1, 7.)</a:t>
-            </a:r>
-            <a:endParaRPr lang="en-US" sz="1400" dirty="0"/>
+              <a:t>The essay shows the thinking. The notebook proves it happened.</a:t>
+            </a:r>
+            <a:endParaRPr lang="en-US" sz="1650" dirty="0"/>
           </a:p>
         </p:txBody>
       </p:sp>
@@ -4106,8 +4746,8 @@
         </p:nvSpPr>
         <p:spPr>
           <a:xfrm>
-            <a:off x="640080" y="640080"/>
-            <a:ext cx="10058400" cy="320040"/>
+            <a:off x="640080" y="731520"/>
+            <a:ext cx="10058400" cy="731520"/>
           </a:xfrm>
           <a:prstGeom prst="rect">
             <a:avLst/>
@@ -4123,30 +4763,111 @@
               <a:buNone/>
             </a:pPr>
             <a:r>
-              <a:rPr lang="en-US" sz="1300" b="1" spc="300" kern="0" dirty="0">
-                <a:solidFill>
-                  <a:srgbClr val="7A3B2E"/>
+              <a:rPr lang="en-US" sz="3000" b="1" dirty="0">
+                <a:solidFill>
+                  <a:srgbClr val="1A1A1A"/>
+                </a:solidFill>
+                <a:latin typeface="Cambria" pitchFamily="34" charset="0"/>
+                <a:ea typeface="Cambria" pitchFamily="34" charset="-122"/>
+                <a:cs typeface="Cambria" pitchFamily="34" charset="-120"/>
+              </a:rPr>
+              <a:t>Three modes today</a:t>
+            </a:r>
+            <a:endParaRPr lang="en-US" sz="3000" dirty="0"/>
+          </a:p>
+        </p:txBody>
+      </p:sp>
+      <p:sp>
+        <p:nvSpPr>
+          <p:cNvPr id="3" name="Text 1"/>
+          <p:cNvSpPr/>
+          <p:nvPr/>
+        </p:nvSpPr>
+        <p:spPr>
+          <a:xfrm>
+            <a:off x="640080" y="1417320"/>
+            <a:ext cx="10058400" cy="365760"/>
+          </a:xfrm>
+          <a:prstGeom prst="rect">
+            <a:avLst/>
+          </a:prstGeom>
+          <a:noFill/>
+          <a:ln/>
+        </p:spPr>
+        <p:txBody>
+          <a:bodyPr wrap="square" rtlCol="0" anchor="ctr"/>
+          <a:lstStyle/>
+          <a:p>
+            <a:pPr indent="0" marL="0">
+              <a:buNone/>
+            </a:pPr>
+            <a:r>
+              <a:rPr lang="en-US" sz="1400" i="1" dirty="0">
+                <a:solidFill>
+                  <a:srgbClr val="6B6B63"/>
                 </a:solidFill>
                 <a:latin typeface="Calibri" pitchFamily="34" charset="0"/>
                 <a:ea typeface="Calibri" pitchFamily="34" charset="-122"/>
                 <a:cs typeface="Calibri" pitchFamily="34" charset="-120"/>
               </a:rPr>
-              <a:t>HOW THIS WEEK CONNECTS</a:t>
-            </a:r>
-            <a:endParaRPr lang="en-US" sz="1300" dirty="0"/>
-          </a:p>
-        </p:txBody>
-      </p:sp>
-      <p:sp>
-        <p:nvSpPr>
-          <p:cNvPr id="3" name="Text 1"/>
-          <p:cNvSpPr/>
-          <p:nvPr/>
-        </p:nvSpPr>
-        <p:spPr>
-          <a:xfrm>
-            <a:off x="640080" y="987552"/>
-            <a:ext cx="10058400" cy="640080"/>
+              <a:t>about a third of the session each</a:t>
+            </a:r>
+            <a:endParaRPr lang="en-US" sz="1400" dirty="0"/>
+          </a:p>
+        </p:txBody>
+      </p:sp>
+      <p:sp>
+        <p:nvSpPr>
+          <p:cNvPr id="4" name="Shape 2"/>
+          <p:cNvSpPr/>
+          <p:nvPr/>
+        </p:nvSpPr>
+        <p:spPr>
+          <a:xfrm>
+            <a:off x="640080" y="2194560"/>
+            <a:ext cx="3383280" cy="3291840"/>
+          </a:xfrm>
+          <a:prstGeom prst="roundRect">
+            <a:avLst>
+              <a:gd name="adj" fmla="val 3333"/>
+            </a:avLst>
+          </a:prstGeom>
+          <a:solidFill>
+            <a:srgbClr val="F4EEE8"/>
+          </a:solidFill>
+          <a:ln/>
+        </p:spPr>
+      </p:sp>
+      <p:sp>
+        <p:nvSpPr>
+          <p:cNvPr id="5" name="Shape 3"/>
+          <p:cNvSpPr/>
+          <p:nvPr/>
+        </p:nvSpPr>
+        <p:spPr>
+          <a:xfrm>
+            <a:off x="1051560" y="2606040"/>
+            <a:ext cx="548640" cy="548640"/>
+          </a:xfrm>
+          <a:prstGeom prst="ellipse">
+            <a:avLst/>
+          </a:prstGeom>
+          <a:solidFill>
+            <a:srgbClr val="7A3B2E"/>
+          </a:solidFill>
+          <a:ln/>
+        </p:spPr>
+      </p:sp>
+      <p:sp>
+        <p:nvSpPr>
+          <p:cNvPr id="6" name="Text 4"/>
+          <p:cNvSpPr/>
+          <p:nvPr/>
+        </p:nvSpPr>
+        <p:spPr>
+          <a:xfrm>
+            <a:off x="1005840" y="3383280"/>
+            <a:ext cx="2651760" cy="548640"/>
           </a:xfrm>
           <a:prstGeom prst="rect">
             <a:avLst/>
@@ -4162,7 +4883,7 @@
               <a:buNone/>
             </a:pPr>
             <a:r>
-              <a:rPr lang="en-US" sz="2800" b="1" dirty="0">
+              <a:rPr lang="en-US" sz="2100" b="1" dirty="0">
                 <a:solidFill>
                   <a:srgbClr val="1A1A1A"/>
                 </a:solidFill>
@@ -4170,44 +4891,108 @@
                 <a:ea typeface="Cambria" pitchFamily="34" charset="-122"/>
                 <a:cs typeface="Cambria" pitchFamily="34" charset="-120"/>
               </a:rPr>
-              <a:t>The course's through-lines</a:t>
-            </a:r>
-            <a:endParaRPr lang="en-US" sz="2800" dirty="0"/>
-          </a:p>
-        </p:txBody>
-      </p:sp>
-      <p:sp>
-        <p:nvSpPr>
-          <p:cNvPr id="4" name="Shape 2"/>
-          <p:cNvSpPr/>
-          <p:nvPr/>
-        </p:nvSpPr>
-        <p:spPr>
-          <a:xfrm>
-            <a:off x="640080" y="2057400"/>
-            <a:ext cx="457200" cy="457200"/>
+              <a:t>Lecture / demo</a:t>
+            </a:r>
+            <a:endParaRPr lang="en-US" sz="2100" dirty="0"/>
+          </a:p>
+        </p:txBody>
+      </p:sp>
+      <p:sp>
+        <p:nvSpPr>
+          <p:cNvPr id="7" name="Text 5"/>
+          <p:cNvSpPr/>
+          <p:nvPr/>
+        </p:nvSpPr>
+        <p:spPr>
+          <a:xfrm>
+            <a:off x="1005840" y="3977640"/>
+            <a:ext cx="2651760" cy="1371600"/>
+          </a:xfrm>
+          <a:prstGeom prst="rect">
+            <a:avLst/>
+          </a:prstGeom>
+          <a:noFill/>
+          <a:ln/>
+        </p:spPr>
+        <p:txBody>
+          <a:bodyPr wrap="square" rtlCol="0" anchor="t">
+            <a:spAutoFit/>
+          </a:bodyPr>
+          <a:lstStyle/>
+          <a:p>
+            <a:pPr indent="0" marL="0">
+              <a:lnSpc>
+                <a:spcPct val="115000"/>
+              </a:lnSpc>
+              <a:buNone/>
+            </a:pPr>
+            <a:r>
+              <a:rPr lang="en-US" sz="1500" dirty="0">
+                <a:solidFill>
+                  <a:srgbClr val="1A1A1A"/>
+                </a:solidFill>
+                <a:latin typeface="Calibri" pitchFamily="34" charset="0"/>
+                <a:ea typeface="Calibri" pitchFamily="34" charset="-122"/>
+                <a:cs typeface="Calibri" pitchFamily="34" charset="-120"/>
+              </a:rPr>
+              <a:t>Publishing, Quarto to GitHub Pages, static by default</a:t>
+            </a:r>
+            <a:endParaRPr lang="en-US" sz="1500" dirty="0"/>
+          </a:p>
+        </p:txBody>
+      </p:sp>
+      <p:sp>
+        <p:nvSpPr>
+          <p:cNvPr id="8" name="Shape 6"/>
+          <p:cNvSpPr/>
+          <p:nvPr/>
+        </p:nvSpPr>
+        <p:spPr>
+          <a:xfrm>
+            <a:off x="4526280" y="2194560"/>
+            <a:ext cx="3383280" cy="3291840"/>
           </a:xfrm>
           <a:prstGeom prst="roundRect">
             <a:avLst>
-              <a:gd name="adj" fmla="val 16000"/>
+              <a:gd name="adj" fmla="val 3333"/>
             </a:avLst>
           </a:prstGeom>
           <a:solidFill>
-            <a:srgbClr val="7A3B2E"/>
-          </a:solidFill>
-          <a:ln/>
-        </p:spPr>
-      </p:sp>
-      <p:sp>
-        <p:nvSpPr>
-          <p:cNvPr id="5" name="Text 3"/>
-          <p:cNvSpPr/>
-          <p:nvPr/>
-        </p:nvSpPr>
-        <p:spPr>
-          <a:xfrm>
-            <a:off x="640080" y="2057400"/>
-            <a:ext cx="457200" cy="457200"/>
+            <a:srgbClr val="F4EEE8"/>
+          </a:solidFill>
+          <a:ln/>
+        </p:spPr>
+      </p:sp>
+      <p:sp>
+        <p:nvSpPr>
+          <p:cNvPr id="9" name="Shape 7"/>
+          <p:cNvSpPr/>
+          <p:nvPr/>
+        </p:nvSpPr>
+        <p:spPr>
+          <a:xfrm>
+            <a:off x="4937760" y="2606040"/>
+            <a:ext cx="548640" cy="548640"/>
+          </a:xfrm>
+          <a:prstGeom prst="ellipse">
+            <a:avLst/>
+          </a:prstGeom>
+          <a:solidFill>
+            <a:srgbClr val="3F6F5F"/>
+          </a:solidFill>
+          <a:ln/>
+        </p:spPr>
+      </p:sp>
+      <p:sp>
+        <p:nvSpPr>
+          <p:cNvPr id="10" name="Text 8"/>
+          <p:cNvSpPr/>
+          <p:nvPr/>
+        </p:nvSpPr>
+        <p:spPr>
+          <a:xfrm>
+            <a:off x="4892040" y="3383280"/>
+            <a:ext cx="2651760" cy="548640"/>
           </a:xfrm>
           <a:prstGeom prst="rect">
             <a:avLst/>
@@ -4219,34 +5004,120 @@
           <a:bodyPr wrap="square" rtlCol="0" anchor="ctr"/>
           <a:lstStyle/>
           <a:p>
-            <a:pPr algn="ctr" indent="0" marL="0">
-              <a:buNone/>
-            </a:pPr>
-            <a:r>
-              <a:rPr lang="en-US" sz="2000" b="1" dirty="0">
-                <a:solidFill>
-                  <a:srgbClr val="FFFFFF"/>
+            <a:pPr indent="0" marL="0">
+              <a:buNone/>
+            </a:pPr>
+            <a:r>
+              <a:rPr lang="en-US" sz="2100" b="1" dirty="0">
+                <a:solidFill>
+                  <a:srgbClr val="1A1A1A"/>
                 </a:solidFill>
                 <a:latin typeface="Cambria" pitchFamily="34" charset="0"/>
                 <a:ea typeface="Cambria" pitchFamily="34" charset="-122"/>
                 <a:cs typeface="Cambria" pitchFamily="34" charset="-120"/>
               </a:rPr>
-              <a:t>1</a:t>
-            </a:r>
-            <a:endParaRPr lang="en-US" sz="2000" dirty="0"/>
-          </a:p>
-        </p:txBody>
-      </p:sp>
-      <p:sp>
-        <p:nvSpPr>
-          <p:cNvPr id="6" name="Text 4"/>
-          <p:cNvSpPr/>
-          <p:nvPr/>
-        </p:nvSpPr>
-        <p:spPr>
-          <a:xfrm>
-            <a:off x="1371600" y="2020824"/>
-            <a:ext cx="10332720" cy="411480"/>
+              <a:t>Workshop</a:t>
+            </a:r>
+            <a:endParaRPr lang="en-US" sz="2100" dirty="0"/>
+          </a:p>
+        </p:txBody>
+      </p:sp>
+      <p:sp>
+        <p:nvSpPr>
+          <p:cNvPr id="11" name="Text 9"/>
+          <p:cNvSpPr/>
+          <p:nvPr/>
+        </p:nvSpPr>
+        <p:spPr>
+          <a:xfrm>
+            <a:off x="4892040" y="3977640"/>
+            <a:ext cx="2651760" cy="1371600"/>
+          </a:xfrm>
+          <a:prstGeom prst="rect">
+            <a:avLst/>
+          </a:prstGeom>
+          <a:noFill/>
+          <a:ln/>
+        </p:spPr>
+        <p:txBody>
+          <a:bodyPr wrap="square" rtlCol="0" anchor="t">
+            <a:spAutoFit/>
+          </a:bodyPr>
+          <a:lstStyle/>
+          <a:p>
+            <a:pPr indent="0" marL="0">
+              <a:lnSpc>
+                <a:spcPct val="115000"/>
+              </a:lnSpc>
+              <a:buNone/>
+            </a:pPr>
+            <a:r>
+              <a:rPr lang="en-US" sz="1500" dirty="0">
+                <a:solidFill>
+                  <a:srgbClr val="1A1A1A"/>
+                </a:solidFill>
+                <a:latin typeface="Calibri" pitchFamily="34" charset="0"/>
+                <a:ea typeface="Calibri" pitchFamily="34" charset="-122"/>
+                <a:cs typeface="Calibri" pitchFamily="34" charset="-120"/>
+              </a:rPr>
+              <a:t>Build hands-on on your own data.</a:t>
+            </a:r>
+            <a:endParaRPr lang="en-US" sz="1500" dirty="0"/>
+          </a:p>
+        </p:txBody>
+      </p:sp>
+      <p:sp>
+        <p:nvSpPr>
+          <p:cNvPr id="12" name="Shape 10"/>
+          <p:cNvSpPr/>
+          <p:nvPr/>
+        </p:nvSpPr>
+        <p:spPr>
+          <a:xfrm>
+            <a:off x="8412480" y="2194560"/>
+            <a:ext cx="3383280" cy="3291840"/>
+          </a:xfrm>
+          <a:prstGeom prst="roundRect">
+            <a:avLst>
+              <a:gd name="adj" fmla="val 3333"/>
+            </a:avLst>
+          </a:prstGeom>
+          <a:solidFill>
+            <a:srgbClr val="F4EEE8"/>
+          </a:solidFill>
+          <a:ln/>
+        </p:spPr>
+      </p:sp>
+      <p:sp>
+        <p:nvSpPr>
+          <p:cNvPr id="13" name="Shape 11"/>
+          <p:cNvSpPr/>
+          <p:nvPr/>
+        </p:nvSpPr>
+        <p:spPr>
+          <a:xfrm>
+            <a:off x="8823960" y="2606040"/>
+            <a:ext cx="548640" cy="548640"/>
+          </a:xfrm>
+          <a:prstGeom prst="ellipse">
+            <a:avLst/>
+          </a:prstGeom>
+          <a:solidFill>
+            <a:srgbClr val="B9852F"/>
+          </a:solidFill>
+          <a:ln/>
+        </p:spPr>
+      </p:sp>
+      <p:sp>
+        <p:nvSpPr>
+          <p:cNvPr id="14" name="Text 12"/>
+          <p:cNvSpPr/>
+          <p:nvPr/>
+        </p:nvSpPr>
+        <p:spPr>
+          <a:xfrm>
+            <a:off x="8778240" y="3383280"/>
+            <a:ext cx="2651760" cy="548640"/>
           </a:xfrm>
           <a:prstGeom prst="rect">
             <a:avLst/>
@@ -4262,30 +5133,30 @@
               <a:buNone/>
             </a:pPr>
             <a:r>
-              <a:rPr lang="en-US" sz="1900" b="1" dirty="0">
-                <a:solidFill>
-                  <a:srgbClr val="7A3B2E"/>
+              <a:rPr lang="en-US" sz="2100" b="1" dirty="0">
+                <a:solidFill>
+                  <a:srgbClr val="1A1A1A"/>
                 </a:solidFill>
                 <a:latin typeface="Cambria" pitchFamily="34" charset="0"/>
                 <a:ea typeface="Cambria" pitchFamily="34" charset="-122"/>
                 <a:cs typeface="Cambria" pitchFamily="34" charset="-120"/>
               </a:rPr>
-              <a:t>Interrogate your own chart</a:t>
-            </a:r>
-            <a:endParaRPr lang="en-US" sz="1900" dirty="0"/>
-          </a:p>
-        </p:txBody>
-      </p:sp>
-      <p:sp>
-        <p:nvSpPr>
-          <p:cNvPr id="7" name="Text 5"/>
-          <p:cNvSpPr/>
-          <p:nvPr/>
-        </p:nvSpPr>
-        <p:spPr>
-          <a:xfrm>
-            <a:off x="1371600" y="2441448"/>
-            <a:ext cx="10332720" cy="914400"/>
+              <a:t>Discussion</a:t>
+            </a:r>
+            <a:endParaRPr lang="en-US" sz="2100" dirty="0"/>
+          </a:p>
+        </p:txBody>
+      </p:sp>
+      <p:sp>
+        <p:nvSpPr>
+          <p:cNvPr id="15" name="Text 13"/>
+          <p:cNvSpPr/>
+          <p:nvPr/>
+        </p:nvSpPr>
+        <p:spPr>
+          <a:xfrm>
+            <a:off x="8778240" y="3977640"/>
+            <a:ext cx="2651760" cy="1371600"/>
           </a:xfrm>
           <a:prstGeom prst="rect">
             <a:avLst/>
@@ -4301,12 +5172,12 @@
           <a:p>
             <a:pPr indent="0" marL="0">
               <a:lnSpc>
-                <a:spcPct val="112000"/>
+                <a:spcPct val="115000"/>
               </a:lnSpc>
               <a:buNone/>
             </a:pPr>
             <a:r>
-              <a:rPr lang="en-US" sz="1450" dirty="0">
+              <a:rPr lang="en-US" sz="1500" dirty="0">
                 <a:solidFill>
                   <a:srgbClr val="1A1A1A"/>
                 </a:solidFill>
@@ -4314,297 +5185,9 @@
                 <a:ea typeface="Calibri" pitchFamily="34" charset="-122"/>
                 <a:cs typeface="Calibri" pitchFamily="34" charset="-120"/>
               </a:rPr>
-              <a:t>Ten weeks on other people's charts; now the ten minutes on yours.</a:t>
-            </a:r>
-            <a:endParaRPr lang="en-US" sz="1450" dirty="0"/>
-          </a:p>
-        </p:txBody>
-      </p:sp>
-      <p:sp>
-        <p:nvSpPr>
-          <p:cNvPr id="8" name="Shape 6"/>
-          <p:cNvSpPr/>
-          <p:nvPr/>
-        </p:nvSpPr>
-        <p:spPr>
-          <a:xfrm>
-            <a:off x="640080" y="3520440"/>
-            <a:ext cx="457200" cy="457200"/>
-          </a:xfrm>
-          <a:prstGeom prst="roundRect">
-            <a:avLst>
-              <a:gd name="adj" fmla="val 16000"/>
-            </a:avLst>
-          </a:prstGeom>
-          <a:solidFill>
-            <a:srgbClr val="3F6F5F"/>
-          </a:solidFill>
-          <a:ln/>
-        </p:spPr>
-      </p:sp>
-      <p:sp>
-        <p:nvSpPr>
-          <p:cNvPr id="9" name="Text 7"/>
-          <p:cNvSpPr/>
-          <p:nvPr/>
-        </p:nvSpPr>
-        <p:spPr>
-          <a:xfrm>
-            <a:off x="640080" y="3520440"/>
-            <a:ext cx="457200" cy="457200"/>
-          </a:xfrm>
-          <a:prstGeom prst="rect">
-            <a:avLst/>
-          </a:prstGeom>
-          <a:noFill/>
-          <a:ln/>
-        </p:spPr>
-        <p:txBody>
-          <a:bodyPr wrap="square" rtlCol="0" anchor="ctr"/>
-          <a:lstStyle/>
-          <a:p>
-            <a:pPr algn="ctr" indent="0" marL="0">
-              <a:buNone/>
-            </a:pPr>
-            <a:r>
-              <a:rPr lang="en-US" sz="2000" b="1" dirty="0">
-                <a:solidFill>
-                  <a:srgbClr val="FFFFFF"/>
-                </a:solidFill>
-                <a:latin typeface="Cambria" pitchFamily="34" charset="0"/>
-                <a:ea typeface="Cambria" pitchFamily="34" charset="-122"/>
-                <a:cs typeface="Cambria" pitchFamily="34" charset="-120"/>
-              </a:rPr>
-              <a:t>2</a:t>
-            </a:r>
-            <a:endParaRPr lang="en-US" sz="2000" dirty="0"/>
-          </a:p>
-        </p:txBody>
-      </p:sp>
-      <p:sp>
-        <p:nvSpPr>
-          <p:cNvPr id="10" name="Text 8"/>
-          <p:cNvSpPr/>
-          <p:nvPr/>
-        </p:nvSpPr>
-        <p:spPr>
-          <a:xfrm>
-            <a:off x="1371600" y="3483864"/>
-            <a:ext cx="10332720" cy="411480"/>
-          </a:xfrm>
-          <a:prstGeom prst="rect">
-            <a:avLst/>
-          </a:prstGeom>
-          <a:noFill/>
-          <a:ln/>
-        </p:spPr>
-        <p:txBody>
-          <a:bodyPr wrap="square" rtlCol="0" anchor="ctr"/>
-          <a:lstStyle/>
-          <a:p>
-            <a:pPr indent="0" marL="0">
-              <a:buNone/>
-            </a:pPr>
-            <a:r>
-              <a:rPr lang="en-US" sz="1900" b="1" dirty="0">
-                <a:solidFill>
-                  <a:srgbClr val="3F6F5F"/>
-                </a:solidFill>
-                <a:latin typeface="Cambria" pitchFamily="34" charset="0"/>
-                <a:ea typeface="Cambria" pitchFamily="34" charset="-122"/>
-                <a:cs typeface="Cambria" pitchFamily="34" charset="-120"/>
-              </a:rPr>
-              <a:t>No single right way</a:t>
-            </a:r>
-            <a:endParaRPr lang="en-US" sz="1900" dirty="0"/>
-          </a:p>
-        </p:txBody>
-      </p:sp>
-      <p:sp>
-        <p:nvSpPr>
-          <p:cNvPr id="11" name="Text 9"/>
-          <p:cNvSpPr/>
-          <p:nvPr/>
-        </p:nvSpPr>
-        <p:spPr>
-          <a:xfrm>
-            <a:off x="1371600" y="3904488"/>
-            <a:ext cx="10332720" cy="914400"/>
-          </a:xfrm>
-          <a:prstGeom prst="rect">
-            <a:avLst/>
-          </a:prstGeom>
-          <a:noFill/>
-          <a:ln/>
-        </p:spPr>
-        <p:txBody>
-          <a:bodyPr wrap="square" rtlCol="0" anchor="t">
-            <a:spAutoFit/>
-          </a:bodyPr>
-          <a:lstStyle/>
-          <a:p>
-            <a:pPr indent="0" marL="0">
-              <a:lnSpc>
-                <a:spcPct val="112000"/>
-              </a:lnSpc>
-              <a:buNone/>
-            </a:pPr>
-            <a:r>
-              <a:rPr lang="en-US" sz="1450" dirty="0">
-                <a:solidFill>
-                  <a:srgbClr val="1A1A1A"/>
-                </a:solidFill>
-                <a:latin typeface="Calibri" pitchFamily="34" charset="0"/>
-                <a:ea typeface="Calibri" pitchFamily="34" charset="-122"/>
-                <a:cs typeface="Calibri" pitchFamily="34" charset="-120"/>
-              </a:rPr>
-              <a:t>Three published essays, three defensible sets of choices.</a:t>
-            </a:r>
-            <a:endParaRPr lang="en-US" sz="1450" dirty="0"/>
-          </a:p>
-        </p:txBody>
-      </p:sp>
-      <p:sp>
-        <p:nvSpPr>
-          <p:cNvPr id="12" name="Shape 10"/>
-          <p:cNvSpPr/>
-          <p:nvPr/>
-        </p:nvSpPr>
-        <p:spPr>
-          <a:xfrm>
-            <a:off x="640080" y="4983480"/>
-            <a:ext cx="457200" cy="457200"/>
-          </a:xfrm>
-          <a:prstGeom prst="roundRect">
-            <a:avLst>
-              <a:gd name="adj" fmla="val 16000"/>
-            </a:avLst>
-          </a:prstGeom>
-          <a:solidFill>
-            <a:srgbClr val="B9852F"/>
-          </a:solidFill>
-          <a:ln/>
-        </p:spPr>
-      </p:sp>
-      <p:sp>
-        <p:nvSpPr>
-          <p:cNvPr id="13" name="Text 11"/>
-          <p:cNvSpPr/>
-          <p:nvPr/>
-        </p:nvSpPr>
-        <p:spPr>
-          <a:xfrm>
-            <a:off x="640080" y="4983480"/>
-            <a:ext cx="457200" cy="457200"/>
-          </a:xfrm>
-          <a:prstGeom prst="rect">
-            <a:avLst/>
-          </a:prstGeom>
-          <a:noFill/>
-          <a:ln/>
-        </p:spPr>
-        <p:txBody>
-          <a:bodyPr wrap="square" rtlCol="0" anchor="ctr"/>
-          <a:lstStyle/>
-          <a:p>
-            <a:pPr algn="ctr" indent="0" marL="0">
-              <a:buNone/>
-            </a:pPr>
-            <a:r>
-              <a:rPr lang="en-US" sz="2000" b="1" dirty="0">
-                <a:solidFill>
-                  <a:srgbClr val="FFFFFF"/>
-                </a:solidFill>
-                <a:latin typeface="Cambria" pitchFamily="34" charset="0"/>
-                <a:ea typeface="Cambria" pitchFamily="34" charset="-122"/>
-                <a:cs typeface="Cambria" pitchFamily="34" charset="-120"/>
-              </a:rPr>
-              <a:t>3</a:t>
-            </a:r>
-            <a:endParaRPr lang="en-US" sz="2000" dirty="0"/>
-          </a:p>
-        </p:txBody>
-      </p:sp>
-      <p:sp>
-        <p:nvSpPr>
-          <p:cNvPr id="14" name="Text 12"/>
-          <p:cNvSpPr/>
-          <p:nvPr/>
-        </p:nvSpPr>
-        <p:spPr>
-          <a:xfrm>
-            <a:off x="1371600" y="4946904"/>
-            <a:ext cx="10332720" cy="411480"/>
-          </a:xfrm>
-          <a:prstGeom prst="rect">
-            <a:avLst/>
-          </a:prstGeom>
-          <a:noFill/>
-          <a:ln/>
-        </p:spPr>
-        <p:txBody>
-          <a:bodyPr wrap="square" rtlCol="0" anchor="ctr"/>
-          <a:lstStyle/>
-          <a:p>
-            <a:pPr indent="0" marL="0">
-              <a:buNone/>
-            </a:pPr>
-            <a:r>
-              <a:rPr lang="en-US" sz="1900" b="1" dirty="0">
-                <a:solidFill>
-                  <a:srgbClr val="B9852F"/>
-                </a:solidFill>
-                <a:latin typeface="Cambria" pitchFamily="34" charset="0"/>
-                <a:ea typeface="Cambria" pitchFamily="34" charset="-122"/>
-                <a:cs typeface="Cambria" pitchFamily="34" charset="-120"/>
-              </a:rPr>
-              <a:t>Make something real</a:t>
-            </a:r>
-            <a:endParaRPr lang="en-US" sz="1900" dirty="0"/>
-          </a:p>
-        </p:txBody>
-      </p:sp>
-      <p:sp>
-        <p:nvSpPr>
-          <p:cNvPr id="15" name="Text 13"/>
-          <p:cNvSpPr/>
-          <p:nvPr/>
-        </p:nvSpPr>
-        <p:spPr>
-          <a:xfrm>
-            <a:off x="1371600" y="5367528"/>
-            <a:ext cx="10332720" cy="914400"/>
-          </a:xfrm>
-          <a:prstGeom prst="rect">
-            <a:avLst/>
-          </a:prstGeom>
-          <a:noFill/>
-          <a:ln/>
-        </p:spPr>
-        <p:txBody>
-          <a:bodyPr wrap="square" rtlCol="0" anchor="t">
-            <a:spAutoFit/>
-          </a:bodyPr>
-          <a:lstStyle/>
-          <a:p>
-            <a:pPr indent="0" marL="0">
-              <a:lnSpc>
-                <a:spcPct val="112000"/>
-              </a:lnSpc>
-              <a:buNone/>
-            </a:pPr>
-            <a:r>
-              <a:rPr lang="en-US" sz="1450" dirty="0">
-                <a:solidFill>
-                  <a:srgbClr val="1A1A1A"/>
-                </a:solidFill>
-                <a:latin typeface="Calibri" pitchFamily="34" charset="0"/>
-                <a:ea typeface="Calibri" pitchFamily="34" charset="-122"/>
-                <a:cs typeface="Calibri" pitchFamily="34" charset="-120"/>
-              </a:rPr>
-              <a:t>You leave with a deployed URL.</a:t>
-            </a:r>
-            <a:endParaRPr lang="en-US" sz="1450" dirty="0"/>
+              <a:t>Interrogate the study, debate it, or critique each other's work.</a:t>
+            </a:r>
+            <a:endParaRPr lang="en-US" sz="1500" dirty="0"/>
           </a:p>
         </p:txBody>
       </p:sp>
@@ -4622,7 +5205,7 @@
     <p:bg>
       <p:bgPr>
         <a:solidFill>
-          <a:srgbClr val="4E261D"/>
+          <a:srgbClr val="FFFFFF"/>
         </a:solidFill>
       </p:bgPr>
     </p:bg>
@@ -4648,8 +5231,8 @@
         </p:nvSpPr>
         <p:spPr>
           <a:xfrm>
-            <a:off x="640080" y="1005840"/>
-            <a:ext cx="8229600" cy="320040"/>
+            <a:off x="640080" y="640080"/>
+            <a:ext cx="10058400" cy="731520"/>
           </a:xfrm>
           <a:prstGeom prst="rect">
             <a:avLst/>
@@ -4665,30 +5248,772 @@
               <a:buNone/>
             </a:pPr>
             <a:r>
-              <a:rPr lang="en-US" sz="1300" b="1" spc="300" kern="0" dirty="0">
-                <a:solidFill>
-                  <a:srgbClr val="B9852F"/>
+              <a:rPr lang="en-US" sz="3000" b="1" dirty="0">
+                <a:solidFill>
+                  <a:srgbClr val="1A1A1A"/>
+                </a:solidFill>
+                <a:latin typeface="Cambria" pitchFamily="34" charset="0"/>
+                <a:ea typeface="Cambria" pitchFamily="34" charset="-122"/>
+                <a:cs typeface="Cambria" pitchFamily="34" charset="-120"/>
+              </a:rPr>
+              <a:t>The session</a:t>
+            </a:r>
+            <a:endParaRPr lang="en-US" sz="3000" dirty="0"/>
+          </a:p>
+        </p:txBody>
+      </p:sp>
+      <p:sp>
+        <p:nvSpPr>
+          <p:cNvPr id="3" name="Shape 1"/>
+          <p:cNvSpPr/>
+          <p:nvPr/>
+        </p:nvSpPr>
+        <p:spPr>
+          <a:xfrm>
+            <a:off x="640080" y="1572768"/>
+            <a:ext cx="868680" cy="457200"/>
+          </a:xfrm>
+          <a:prstGeom prst="roundRect">
+            <a:avLst>
+              <a:gd name="adj" fmla="val 12000"/>
+            </a:avLst>
+          </a:prstGeom>
+          <a:solidFill>
+            <a:srgbClr val="7A3B2E"/>
+          </a:solidFill>
+          <a:ln/>
+        </p:spPr>
+      </p:sp>
+      <p:sp>
+        <p:nvSpPr>
+          <p:cNvPr id="4" name="Text 2"/>
+          <p:cNvSpPr/>
+          <p:nvPr/>
+        </p:nvSpPr>
+        <p:spPr>
+          <a:xfrm>
+            <a:off x="640080" y="1572768"/>
+            <a:ext cx="868680" cy="457200"/>
+          </a:xfrm>
+          <a:prstGeom prst="rect">
+            <a:avLst/>
+          </a:prstGeom>
+          <a:noFill/>
+          <a:ln/>
+        </p:spPr>
+        <p:txBody>
+          <a:bodyPr wrap="square" rtlCol="0" anchor="ctr"/>
+          <a:lstStyle/>
+          <a:p>
+            <a:pPr algn="ctr" indent="0" marL="0">
+              <a:buNone/>
+            </a:pPr>
+            <a:r>
+              <a:rPr lang="en-US" sz="1100" b="1" dirty="0">
+                <a:solidFill>
+                  <a:srgbClr val="FFFFFF"/>
                 </a:solidFill>
                 <a:latin typeface="Calibri" pitchFamily="34" charset="0"/>
                 <a:ea typeface="Calibri" pitchFamily="34" charset="-122"/>
                 <a:cs typeface="Calibri" pitchFamily="34" charset="-120"/>
               </a:rPr>
-              <a:t>THE CHECK, AI CLOSED</a:t>
-            </a:r>
-            <a:endParaRPr lang="en-US" sz="1300" dirty="0"/>
-          </a:p>
-        </p:txBody>
-      </p:sp>
-      <p:sp>
-        <p:nvSpPr>
-          <p:cNvPr id="3" name="Text 1"/>
-          <p:cNvSpPr/>
-          <p:nvPr/>
-        </p:nvSpPr>
-        <p:spPr>
-          <a:xfrm>
-            <a:off x="640080" y="1645920"/>
-            <a:ext cx="8686800" cy="3108960"/>
+              <a:t>0:00</a:t>
+            </a:r>
+            <a:endParaRPr lang="en-US" sz="1100" dirty="0"/>
+          </a:p>
+        </p:txBody>
+      </p:sp>
+      <p:sp>
+        <p:nvSpPr>
+          <p:cNvPr id="5" name="Text 3"/>
+          <p:cNvSpPr/>
+          <p:nvPr/>
+        </p:nvSpPr>
+        <p:spPr>
+          <a:xfrm>
+            <a:off x="1691640" y="1554480"/>
+            <a:ext cx="9646920" cy="566928"/>
+          </a:xfrm>
+          <a:prstGeom prst="rect">
+            <a:avLst/>
+          </a:prstGeom>
+          <a:noFill/>
+          <a:ln/>
+        </p:spPr>
+        <p:txBody>
+          <a:bodyPr wrap="square" rtlCol="0" anchor="ctr">
+            <a:spAutoFit/>
+          </a:bodyPr>
+          <a:lstStyle/>
+          <a:p>
+            <a:pPr indent="0" marL="0">
+              <a:buNone/>
+            </a:pPr>
+            <a:r>
+              <a:rPr lang="en-US" sz="1250" dirty="0">
+                <a:solidFill>
+                  <a:srgbClr val="1A1A1A"/>
+                </a:solidFill>
+                <a:latin typeface="Calibri" pitchFamily="34" charset="0"/>
+                <a:ea typeface="Calibri" pitchFamily="34" charset="-122"/>
+                <a:cs typeface="Calibri" pitchFamily="34" charset="-120"/>
+              </a:rPr>
+              <a:t>Look at This: the three essays, common structure, divergent choices.</a:t>
+            </a:r>
+            <a:endParaRPr lang="en-US" sz="1250" dirty="0"/>
+          </a:p>
+        </p:txBody>
+      </p:sp>
+      <p:sp>
+        <p:nvSpPr>
+          <p:cNvPr id="6" name="Shape 4"/>
+          <p:cNvSpPr/>
+          <p:nvPr/>
+        </p:nvSpPr>
+        <p:spPr>
+          <a:xfrm>
+            <a:off x="640080" y="2139696"/>
+            <a:ext cx="868680" cy="457200"/>
+          </a:xfrm>
+          <a:prstGeom prst="roundRect">
+            <a:avLst>
+              <a:gd name="adj" fmla="val 12000"/>
+            </a:avLst>
+          </a:prstGeom>
+          <a:solidFill>
+            <a:srgbClr val="7A3B2E"/>
+          </a:solidFill>
+          <a:ln/>
+        </p:spPr>
+      </p:sp>
+      <p:sp>
+        <p:nvSpPr>
+          <p:cNvPr id="7" name="Text 5"/>
+          <p:cNvSpPr/>
+          <p:nvPr/>
+        </p:nvSpPr>
+        <p:spPr>
+          <a:xfrm>
+            <a:off x="640080" y="2139696"/>
+            <a:ext cx="868680" cy="457200"/>
+          </a:xfrm>
+          <a:prstGeom prst="rect">
+            <a:avLst/>
+          </a:prstGeom>
+          <a:noFill/>
+          <a:ln/>
+        </p:spPr>
+        <p:txBody>
+          <a:bodyPr wrap="square" rtlCol="0" anchor="ctr"/>
+          <a:lstStyle/>
+          <a:p>
+            <a:pPr algn="ctr" indent="0" marL="0">
+              <a:buNone/>
+            </a:pPr>
+            <a:r>
+              <a:rPr lang="en-US" sz="1100" b="1" dirty="0">
+                <a:solidFill>
+                  <a:srgbClr val="FFFFFF"/>
+                </a:solidFill>
+                <a:latin typeface="Calibri" pitchFamily="34" charset="0"/>
+                <a:ea typeface="Calibri" pitchFamily="34" charset="-122"/>
+                <a:cs typeface="Calibri" pitchFamily="34" charset="-120"/>
+              </a:rPr>
+              <a:t>0:15</a:t>
+            </a:r>
+            <a:endParaRPr lang="en-US" sz="1100" dirty="0"/>
+          </a:p>
+        </p:txBody>
+      </p:sp>
+      <p:sp>
+        <p:nvSpPr>
+          <p:cNvPr id="8" name="Text 6"/>
+          <p:cNvSpPr/>
+          <p:nvPr/>
+        </p:nvSpPr>
+        <p:spPr>
+          <a:xfrm>
+            <a:off x="1691640" y="2121408"/>
+            <a:ext cx="9646920" cy="566928"/>
+          </a:xfrm>
+          <a:prstGeom prst="rect">
+            <a:avLst/>
+          </a:prstGeom>
+          <a:noFill/>
+          <a:ln/>
+        </p:spPr>
+        <p:txBody>
+          <a:bodyPr wrap="square" rtlCol="0" anchor="ctr">
+            <a:spAutoFit/>
+          </a:bodyPr>
+          <a:lstStyle/>
+          <a:p>
+            <a:pPr indent="0" marL="0">
+              <a:buNone/>
+            </a:pPr>
+            <a:r>
+              <a:rPr lang="en-US" sz="1250" dirty="0">
+                <a:solidFill>
+                  <a:srgbClr val="1A1A1A"/>
+                </a:solidFill>
+                <a:latin typeface="Calibri" pitchFamily="34" charset="0"/>
+                <a:ea typeface="Calibri" pitchFamily="34" charset="-122"/>
+                <a:cs typeface="Calibri" pitchFamily="34" charset="-120"/>
+              </a:rPr>
+              <a:t>Structured critique (Critical Response Process) in trios: statements of meaning, maker's questions, neutral questions, permissioned opinions.</a:t>
+            </a:r>
+            <a:endParaRPr lang="en-US" sz="1250" dirty="0"/>
+          </a:p>
+        </p:txBody>
+      </p:sp>
+      <p:sp>
+        <p:nvSpPr>
+          <p:cNvPr id="9" name="Shape 7"/>
+          <p:cNvSpPr/>
+          <p:nvPr/>
+        </p:nvSpPr>
+        <p:spPr>
+          <a:xfrm>
+            <a:off x="640080" y="2706624"/>
+            <a:ext cx="868680" cy="457200"/>
+          </a:xfrm>
+          <a:prstGeom prst="roundRect">
+            <a:avLst>
+              <a:gd name="adj" fmla="val 12000"/>
+            </a:avLst>
+          </a:prstGeom>
+          <a:solidFill>
+            <a:srgbClr val="7A3B2E"/>
+          </a:solidFill>
+          <a:ln/>
+        </p:spPr>
+      </p:sp>
+      <p:sp>
+        <p:nvSpPr>
+          <p:cNvPr id="10" name="Text 8"/>
+          <p:cNvSpPr/>
+          <p:nvPr/>
+        </p:nvSpPr>
+        <p:spPr>
+          <a:xfrm>
+            <a:off x="640080" y="2706624"/>
+            <a:ext cx="868680" cy="457200"/>
+          </a:xfrm>
+          <a:prstGeom prst="rect">
+            <a:avLst/>
+          </a:prstGeom>
+          <a:noFill/>
+          <a:ln/>
+        </p:spPr>
+        <p:txBody>
+          <a:bodyPr wrap="square" rtlCol="0" anchor="ctr"/>
+          <a:lstStyle/>
+          <a:p>
+            <a:pPr algn="ctr" indent="0" marL="0">
+              <a:buNone/>
+            </a:pPr>
+            <a:r>
+              <a:rPr lang="en-US" sz="1100" b="1" dirty="0">
+                <a:solidFill>
+                  <a:srgbClr val="FFFFFF"/>
+                </a:solidFill>
+                <a:latin typeface="Calibri" pitchFamily="34" charset="0"/>
+                <a:ea typeface="Calibri" pitchFamily="34" charset="-122"/>
+                <a:cs typeface="Calibri" pitchFamily="34" charset="-120"/>
+              </a:rPr>
+              <a:t>0:50</a:t>
+            </a:r>
+            <a:endParaRPr lang="en-US" sz="1100" dirty="0"/>
+          </a:p>
+        </p:txBody>
+      </p:sp>
+      <p:sp>
+        <p:nvSpPr>
+          <p:cNvPr id="11" name="Text 9"/>
+          <p:cNvSpPr/>
+          <p:nvPr/>
+        </p:nvSpPr>
+        <p:spPr>
+          <a:xfrm>
+            <a:off x="1691640" y="2688336"/>
+            <a:ext cx="9646920" cy="566928"/>
+          </a:xfrm>
+          <a:prstGeom prst="rect">
+            <a:avLst/>
+          </a:prstGeom>
+          <a:noFill/>
+          <a:ln/>
+        </p:spPr>
+        <p:txBody>
+          <a:bodyPr wrap="square" rtlCol="0" anchor="ctr">
+            <a:spAutoFit/>
+          </a:bodyPr>
+          <a:lstStyle/>
+          <a:p>
+            <a:pPr indent="0" marL="0">
+              <a:buNone/>
+            </a:pPr>
+            <a:r>
+              <a:rPr lang="en-US" sz="1250" dirty="0">
+                <a:solidFill>
+                  <a:srgbClr val="1A1A1A"/>
+                </a:solidFill>
+                <a:latin typeface="Calibri" pitchFamily="34" charset="0"/>
+                <a:ea typeface="Calibri" pitchFamily="34" charset="-122"/>
+                <a:cs typeface="Calibri" pitchFamily="34" charset="-120"/>
+              </a:rPr>
+              <a:t>Break</a:t>
+            </a:r>
+            <a:endParaRPr lang="en-US" sz="1250" dirty="0"/>
+          </a:p>
+        </p:txBody>
+      </p:sp>
+      <p:sp>
+        <p:nvSpPr>
+          <p:cNvPr id="12" name="Shape 10"/>
+          <p:cNvSpPr/>
+          <p:nvPr/>
+        </p:nvSpPr>
+        <p:spPr>
+          <a:xfrm>
+            <a:off x="640080" y="3273552"/>
+            <a:ext cx="868680" cy="457200"/>
+          </a:xfrm>
+          <a:prstGeom prst="roundRect">
+            <a:avLst>
+              <a:gd name="adj" fmla="val 12000"/>
+            </a:avLst>
+          </a:prstGeom>
+          <a:solidFill>
+            <a:srgbClr val="7A3B2E"/>
+          </a:solidFill>
+          <a:ln/>
+        </p:spPr>
+      </p:sp>
+      <p:sp>
+        <p:nvSpPr>
+          <p:cNvPr id="13" name="Text 11"/>
+          <p:cNvSpPr/>
+          <p:nvPr/>
+        </p:nvSpPr>
+        <p:spPr>
+          <a:xfrm>
+            <a:off x="640080" y="3273552"/>
+            <a:ext cx="868680" cy="457200"/>
+          </a:xfrm>
+          <a:prstGeom prst="rect">
+            <a:avLst/>
+          </a:prstGeom>
+          <a:noFill/>
+          <a:ln/>
+        </p:spPr>
+        <p:txBody>
+          <a:bodyPr wrap="square" rtlCol="0" anchor="ctr"/>
+          <a:lstStyle/>
+          <a:p>
+            <a:pPr algn="ctr" indent="0" marL="0">
+              <a:buNone/>
+            </a:pPr>
+            <a:r>
+              <a:rPr lang="en-US" sz="1100" b="1" dirty="0">
+                <a:solidFill>
+                  <a:srgbClr val="FFFFFF"/>
+                </a:solidFill>
+                <a:latin typeface="Calibri" pitchFamily="34" charset="0"/>
+                <a:ea typeface="Calibri" pitchFamily="34" charset="-122"/>
+                <a:cs typeface="Calibri" pitchFamily="34" charset="-120"/>
+              </a:rPr>
+              <a:t>1:00</a:t>
+            </a:r>
+            <a:endParaRPr lang="en-US" sz="1100" dirty="0"/>
+          </a:p>
+        </p:txBody>
+      </p:sp>
+      <p:sp>
+        <p:nvSpPr>
+          <p:cNvPr id="14" name="Text 12"/>
+          <p:cNvSpPr/>
+          <p:nvPr/>
+        </p:nvSpPr>
+        <p:spPr>
+          <a:xfrm>
+            <a:off x="1691640" y="3255264"/>
+            <a:ext cx="9646920" cy="566928"/>
+          </a:xfrm>
+          <a:prstGeom prst="rect">
+            <a:avLst/>
+          </a:prstGeom>
+          <a:noFill/>
+          <a:ln/>
+        </p:spPr>
+        <p:txBody>
+          <a:bodyPr wrap="square" rtlCol="0" anchor="ctr">
+            <a:spAutoFit/>
+          </a:bodyPr>
+          <a:lstStyle/>
+          <a:p>
+            <a:pPr indent="0" marL="0">
+              <a:buNone/>
+            </a:pPr>
+            <a:r>
+              <a:rPr lang="en-US" sz="1250" dirty="0">
+                <a:solidFill>
+                  <a:srgbClr val="1A1A1A"/>
+                </a:solidFill>
+                <a:latin typeface="Calibri" pitchFamily="34" charset="0"/>
+                <a:ea typeface="Calibri" pitchFamily="34" charset="-122"/>
+                <a:cs typeface="Calibri" pitchFamily="34" charset="-120"/>
+              </a:rPr>
+              <a:t>Interrogate your own chart, the making-side mirror of Week 6's hand-labeling. Does the y-axis start at zero? Is the eye pulled toward a pattern the data won't support? Fix one thing.</a:t>
+            </a:r>
+            <a:endParaRPr lang="en-US" sz="1250" dirty="0"/>
+          </a:p>
+        </p:txBody>
+      </p:sp>
+      <p:sp>
+        <p:nvSpPr>
+          <p:cNvPr id="15" name="Shape 13"/>
+          <p:cNvSpPr/>
+          <p:nvPr/>
+        </p:nvSpPr>
+        <p:spPr>
+          <a:xfrm>
+            <a:off x="640080" y="3840480"/>
+            <a:ext cx="868680" cy="457200"/>
+          </a:xfrm>
+          <a:prstGeom prst="roundRect">
+            <a:avLst>
+              <a:gd name="adj" fmla="val 12000"/>
+            </a:avLst>
+          </a:prstGeom>
+          <a:solidFill>
+            <a:srgbClr val="7A3B2E"/>
+          </a:solidFill>
+          <a:ln/>
+        </p:spPr>
+      </p:sp>
+      <p:sp>
+        <p:nvSpPr>
+          <p:cNvPr id="16" name="Text 14"/>
+          <p:cNvSpPr/>
+          <p:nvPr/>
+        </p:nvSpPr>
+        <p:spPr>
+          <a:xfrm>
+            <a:off x="640080" y="3840480"/>
+            <a:ext cx="868680" cy="457200"/>
+          </a:xfrm>
+          <a:prstGeom prst="rect">
+            <a:avLst/>
+          </a:prstGeom>
+          <a:noFill/>
+          <a:ln/>
+        </p:spPr>
+        <p:txBody>
+          <a:bodyPr wrap="square" rtlCol="0" anchor="ctr"/>
+          <a:lstStyle/>
+          <a:p>
+            <a:pPr algn="ctr" indent="0" marL="0">
+              <a:buNone/>
+            </a:pPr>
+            <a:r>
+              <a:rPr lang="en-US" sz="1100" b="1" dirty="0">
+                <a:solidFill>
+                  <a:srgbClr val="FFFFFF"/>
+                </a:solidFill>
+                <a:latin typeface="Calibri" pitchFamily="34" charset="0"/>
+                <a:ea typeface="Calibri" pitchFamily="34" charset="-122"/>
+                <a:cs typeface="Calibri" pitchFamily="34" charset="-120"/>
+              </a:rPr>
+              <a:t>1:15</a:t>
+            </a:r>
+            <a:endParaRPr lang="en-US" sz="1100" dirty="0"/>
+          </a:p>
+        </p:txBody>
+      </p:sp>
+      <p:sp>
+        <p:nvSpPr>
+          <p:cNvPr id="17" name="Text 15"/>
+          <p:cNvSpPr/>
+          <p:nvPr/>
+        </p:nvSpPr>
+        <p:spPr>
+          <a:xfrm>
+            <a:off x="1691640" y="3822192"/>
+            <a:ext cx="9646920" cy="566928"/>
+          </a:xfrm>
+          <a:prstGeom prst="rect">
+            <a:avLst/>
+          </a:prstGeom>
+          <a:noFill/>
+          <a:ln/>
+        </p:spPr>
+        <p:txBody>
+          <a:bodyPr wrap="square" rtlCol="0" anchor="ctr">
+            <a:spAutoFit/>
+          </a:bodyPr>
+          <a:lstStyle/>
+          <a:p>
+            <a:pPr indent="0" marL="0">
+              <a:buNone/>
+            </a:pPr>
+            <a:r>
+              <a:rPr lang="en-US" sz="1250" dirty="0">
+                <a:solidFill>
+                  <a:srgbClr val="1A1A1A"/>
+                </a:solidFill>
+                <a:latin typeface="Calibri" pitchFamily="34" charset="0"/>
+                <a:ea typeface="Calibri" pitchFamily="34" charset="-122"/>
+                <a:cs typeface="Calibri" pitchFamily="34" charset="-120"/>
+              </a:rPr>
+              <a:t>Build lab: open the template you forked in Week 4; paste outline, charts, code; render; deploy. Static by default; JS opt-ins hit the code-review checkpoint.</a:t>
+            </a:r>
+            <a:endParaRPr lang="en-US" sz="1250" dirty="0"/>
+          </a:p>
+        </p:txBody>
+      </p:sp>
+      <p:sp>
+        <p:nvSpPr>
+          <p:cNvPr id="18" name="Shape 16"/>
+          <p:cNvSpPr/>
+          <p:nvPr/>
+        </p:nvSpPr>
+        <p:spPr>
+          <a:xfrm>
+            <a:off x="640080" y="4407408"/>
+            <a:ext cx="868680" cy="457200"/>
+          </a:xfrm>
+          <a:prstGeom prst="roundRect">
+            <a:avLst>
+              <a:gd name="adj" fmla="val 12000"/>
+            </a:avLst>
+          </a:prstGeom>
+          <a:solidFill>
+            <a:srgbClr val="7A3B2E"/>
+          </a:solidFill>
+          <a:ln/>
+        </p:spPr>
+      </p:sp>
+      <p:sp>
+        <p:nvSpPr>
+          <p:cNvPr id="19" name="Text 17"/>
+          <p:cNvSpPr/>
+          <p:nvPr/>
+        </p:nvSpPr>
+        <p:spPr>
+          <a:xfrm>
+            <a:off x="640080" y="4407408"/>
+            <a:ext cx="868680" cy="457200"/>
+          </a:xfrm>
+          <a:prstGeom prst="rect">
+            <a:avLst/>
+          </a:prstGeom>
+          <a:noFill/>
+          <a:ln/>
+        </p:spPr>
+        <p:txBody>
+          <a:bodyPr wrap="square" rtlCol="0" anchor="ctr"/>
+          <a:lstStyle/>
+          <a:p>
+            <a:pPr algn="ctr" indent="0" marL="0">
+              <a:buNone/>
+            </a:pPr>
+            <a:r>
+              <a:rPr lang="en-US" sz="1100" b="1" dirty="0">
+                <a:solidFill>
+                  <a:srgbClr val="FFFFFF"/>
+                </a:solidFill>
+                <a:latin typeface="Calibri" pitchFamily="34" charset="0"/>
+                <a:ea typeface="Calibri" pitchFamily="34" charset="-122"/>
+                <a:cs typeface="Calibri" pitchFamily="34" charset="-120"/>
+              </a:rPr>
+              <a:t>1:50</a:t>
+            </a:r>
+            <a:endParaRPr lang="en-US" sz="1100" dirty="0"/>
+          </a:p>
+        </p:txBody>
+      </p:sp>
+      <p:sp>
+        <p:nvSpPr>
+          <p:cNvPr id="20" name="Text 18"/>
+          <p:cNvSpPr/>
+          <p:nvPr/>
+        </p:nvSpPr>
+        <p:spPr>
+          <a:xfrm>
+            <a:off x="1691640" y="4389120"/>
+            <a:ext cx="9646920" cy="566928"/>
+          </a:xfrm>
+          <a:prstGeom prst="rect">
+            <a:avLst/>
+          </a:prstGeom>
+          <a:noFill/>
+          <a:ln/>
+        </p:spPr>
+        <p:txBody>
+          <a:bodyPr wrap="square" rtlCol="0" anchor="ctr">
+            <a:spAutoFit/>
+          </a:bodyPr>
+          <a:lstStyle/>
+          <a:p>
+            <a:pPr indent="0" marL="0">
+              <a:buNone/>
+            </a:pPr>
+            <a:r>
+              <a:rPr lang="en-US" sz="1250" dirty="0">
+                <a:solidFill>
+                  <a:srgbClr val="1A1A1A"/>
+                </a:solidFill>
+                <a:latin typeface="Calibri" pitchFamily="34" charset="0"/>
+                <a:ea typeface="Calibri" pitchFamily="34" charset="-122"/>
+                <a:cs typeface="Calibri" pitchFamily="34" charset="-120"/>
+              </a:rPr>
+              <a:t>Phone test in pairs. Check-out.</a:t>
+            </a:r>
+            <a:endParaRPr lang="en-US" sz="1250" dirty="0"/>
+          </a:p>
+        </p:txBody>
+      </p:sp>
+    </p:spTree>
+  </p:cSld>
+  <p:clrMapOvr>
+    <a:masterClrMapping/>
+  </p:clrMapOvr>
+</p:sld>
+</file>
+
+<file path=ppt/slides/slide9.xml><?xml version="1.0" encoding="utf-8"?>
+<p:sld xmlns:a="http://schemas.openxmlformats.org/drawingml/2006/main" xmlns:r="http://schemas.openxmlformats.org/officeDocument/2006/relationships" xmlns:p="http://schemas.openxmlformats.org/presentationml/2006/main">
+  <p:cSld name="Slide 9">
+    <p:bg>
+      <p:bgPr>
+        <a:solidFill>
+          <a:srgbClr val="FFFFFF"/>
+        </a:solidFill>
+      </p:bgPr>
+    </p:bg>
+    <p:spTree>
+      <p:nvGrpSpPr>
+        <p:cNvPr id="1" name=""/>
+        <p:cNvGrpSpPr/>
+        <p:nvPr/>
+      </p:nvGrpSpPr>
+      <p:grpSpPr>
+        <a:xfrm>
+          <a:off x="0" y="0"/>
+          <a:ext cx="0" cy="0"/>
+          <a:chOff x="0" y="0"/>
+          <a:chExt cx="0" cy="0"/>
+        </a:xfrm>
+      </p:grpSpPr>
+      <p:sp>
+        <p:nvSpPr>
+          <p:cNvPr id="2" name="Text 0"/>
+          <p:cNvSpPr/>
+          <p:nvPr/>
+        </p:nvSpPr>
+        <p:spPr>
+          <a:xfrm>
+            <a:off x="640080" y="640080"/>
+            <a:ext cx="10058400" cy="731520"/>
+          </a:xfrm>
+          <a:prstGeom prst="rect">
+            <a:avLst/>
+          </a:prstGeom>
+          <a:noFill/>
+          <a:ln/>
+        </p:spPr>
+        <p:txBody>
+          <a:bodyPr wrap="square" rtlCol="0" anchor="ctr"/>
+          <a:lstStyle/>
+          <a:p>
+            <a:pPr indent="0" marL="0">
+              <a:buNone/>
+            </a:pPr>
+            <a:r>
+              <a:rPr lang="en-US" sz="3000" b="1" dirty="0">
+                <a:solidFill>
+                  <a:srgbClr val="1A1A1A"/>
+                </a:solidFill>
+                <a:latin typeface="Cambria" pitchFamily="34" charset="0"/>
+                <a:ea typeface="Cambria" pitchFamily="34" charset="-122"/>
+                <a:cs typeface="Cambria" pitchFamily="34" charset="-120"/>
+              </a:rPr>
+              <a:t>Reading &amp; homework</a:t>
+            </a:r>
+            <a:endParaRPr lang="en-US" sz="3000" dirty="0"/>
+          </a:p>
+        </p:txBody>
+      </p:sp>
+      <p:sp>
+        <p:nvSpPr>
+          <p:cNvPr id="3" name="Shape 1"/>
+          <p:cNvSpPr/>
+          <p:nvPr/>
+        </p:nvSpPr>
+        <p:spPr>
+          <a:xfrm>
+            <a:off x="640080" y="1810512"/>
+            <a:ext cx="219456" cy="219456"/>
+          </a:xfrm>
+          <a:prstGeom prst="ellipse">
+            <a:avLst/>
+          </a:prstGeom>
+          <a:solidFill>
+            <a:srgbClr val="7A3B2E"/>
+          </a:solidFill>
+          <a:ln/>
+        </p:spPr>
+      </p:sp>
+      <p:sp>
+        <p:nvSpPr>
+          <p:cNvPr id="4" name="Text 2"/>
+          <p:cNvSpPr/>
+          <p:nvPr/>
+        </p:nvSpPr>
+        <p:spPr>
+          <a:xfrm>
+            <a:off x="1051560" y="1737360"/>
+            <a:ext cx="10424160" cy="365760"/>
+          </a:xfrm>
+          <a:prstGeom prst="rect">
+            <a:avLst/>
+          </a:prstGeom>
+          <a:noFill/>
+          <a:ln/>
+        </p:spPr>
+        <p:txBody>
+          <a:bodyPr wrap="square" rtlCol="0" anchor="ctr"/>
+          <a:lstStyle/>
+          <a:p>
+            <a:pPr indent="0" marL="0">
+              <a:buNone/>
+            </a:pPr>
+            <a:r>
+              <a:rPr lang="en-US" sz="1500" b="1" dirty="0">
+                <a:solidFill>
+                  <a:srgbClr val="7A3B2E"/>
+                </a:solidFill>
+                <a:latin typeface="Calibri" pitchFamily="34" charset="0"/>
+                <a:ea typeface="Calibri" pitchFamily="34" charset="-122"/>
+                <a:cs typeface="Calibri" pitchFamily="34" charset="-120"/>
+              </a:rPr>
+              <a:t>Reading</a:t>
+            </a:r>
+            <a:endParaRPr lang="en-US" sz="1500" dirty="0"/>
+          </a:p>
+        </p:txBody>
+      </p:sp>
+      <p:sp>
+        <p:nvSpPr>
+          <p:cNvPr id="5" name="Text 3"/>
+          <p:cNvSpPr/>
+          <p:nvPr/>
+        </p:nvSpPr>
+        <p:spPr>
+          <a:xfrm>
+            <a:off x="1051560" y="2121408"/>
+            <a:ext cx="10424160" cy="731520"/>
           </a:xfrm>
           <a:prstGeom prst="rect">
             <a:avLst/>
@@ -4703,80 +6028,238 @@
           <a:lstStyle/>
           <a:p>
             <a:pPr indent="0" marL="0">
-              <a:lnSpc>
-                <a:spcPct val="115000"/>
-              </a:lnSpc>
-              <a:buNone/>
-            </a:pPr>
-            <a:r>
-              <a:rPr lang="en-US" sz="2600" dirty="0">
-                <a:solidFill>
-                  <a:srgbClr val="FFFFFF"/>
-                </a:solidFill>
-                <a:latin typeface="Cambria" pitchFamily="34" charset="0"/>
-                <a:ea typeface="Cambria" pitchFamily="34" charset="-122"/>
-                <a:cs typeface="Cambria" pitchFamily="34" charset="-120"/>
-              </a:rPr>
-              <a:t>Fix it: a planted bug in publishing/layout code (or in opted-in JS). (Competencies 1, 7.)</a:t>
-            </a:r>
-            <a:endParaRPr lang="en-US" sz="2600" dirty="0"/>
-          </a:p>
-        </p:txBody>
-      </p:sp>
-      <p:sp>
-        <p:nvSpPr>
-          <p:cNvPr id="4" name="Text 2"/>
-          <p:cNvSpPr/>
-          <p:nvPr/>
-        </p:nvSpPr>
-        <p:spPr>
-          <a:xfrm>
-            <a:off x="640080" y="6126480"/>
-            <a:ext cx="7315200" cy="365760"/>
-          </a:xfrm>
-          <a:prstGeom prst="rect">
-            <a:avLst/>
-          </a:prstGeom>
-          <a:noFill/>
-          <a:ln/>
-        </p:spPr>
-        <p:txBody>
-          <a:bodyPr wrap="square" rtlCol="0" anchor="ctr"/>
-          <a:lstStyle/>
-          <a:p>
-            <a:pPr indent="0" marL="0">
-              <a:buNone/>
-            </a:pPr>
-            <a:r>
-              <a:rPr lang="en-US" sz="1200" dirty="0">
-                <a:solidFill>
-                  <a:srgbClr val="E8DCD6"/>
+              <a:buNone/>
+            </a:pPr>
+            <a:r>
+              <a:rPr lang="en-US" sz="1400" dirty="0">
+                <a:solidFill>
+                  <a:srgbClr val="1A1A1A"/>
                 </a:solidFill>
                 <a:latin typeface="Calibri" pitchFamily="34" charset="0"/>
                 <a:ea typeface="Calibri" pitchFamily="34" charset="-122"/>
                 <a:cs typeface="Calibri" pitchFamily="34" charset="-120"/>
               </a:rPr>
-              <a:t>Culture as Data  ·  Week 9</a:t>
-            </a:r>
-            <a:endParaRPr lang="en-US" sz="1200" dirty="0"/>
-          </a:p>
-        </p:txBody>
-      </p:sp>
-      <p:sp>
-        <p:nvSpPr>
-          <p:cNvPr id="5" name="Shape 3"/>
-          <p:cNvSpPr/>
-          <p:nvPr/>
-        </p:nvSpPr>
-        <p:spPr>
-          <a:xfrm>
-            <a:off x="10763226" y="5580873"/>
-            <a:ext cx="87686" cy="87686"/>
+              <a:t>None</a:t>
+            </a:r>
+            <a:endParaRPr lang="en-US" sz="1400" dirty="0"/>
+          </a:p>
+        </p:txBody>
+      </p:sp>
+      <p:sp>
+        <p:nvSpPr>
+          <p:cNvPr id="6" name="Shape 4"/>
+          <p:cNvSpPr/>
+          <p:nvPr/>
+        </p:nvSpPr>
+        <p:spPr>
+          <a:xfrm>
+            <a:off x="640080" y="2953512"/>
+            <a:ext cx="219456" cy="219456"/>
           </a:xfrm>
           <a:prstGeom prst="ellipse">
             <a:avLst/>
           </a:prstGeom>
           <a:solidFill>
+            <a:srgbClr val="3F6F5F"/>
+          </a:solidFill>
+          <a:ln/>
+        </p:spPr>
+      </p:sp>
+      <p:sp>
+        <p:nvSpPr>
+          <p:cNvPr id="7" name="Text 5"/>
+          <p:cNvSpPr/>
+          <p:nvPr/>
+        </p:nvSpPr>
+        <p:spPr>
+          <a:xfrm>
+            <a:off x="1051560" y="2880360"/>
+            <a:ext cx="10424160" cy="365760"/>
+          </a:xfrm>
+          <a:prstGeom prst="rect">
+            <a:avLst/>
+          </a:prstGeom>
+          <a:noFill/>
+          <a:ln/>
+        </p:spPr>
+        <p:txBody>
+          <a:bodyPr wrap="square" rtlCol="0" anchor="ctr"/>
+          <a:lstStyle/>
+          <a:p>
+            <a:pPr indent="0" marL="0">
+              <a:buNone/>
+            </a:pPr>
+            <a:r>
+              <a:rPr lang="en-US" sz="1500" b="1" dirty="0">
+                <a:solidFill>
+                  <a:srgbClr val="3F6F5F"/>
+                </a:solidFill>
+                <a:latin typeface="Calibri" pitchFamily="34" charset="0"/>
+                <a:ea typeface="Calibri" pitchFamily="34" charset="-122"/>
+                <a:cs typeface="Calibri" pitchFamily="34" charset="-120"/>
+              </a:rPr>
+              <a:t>Supplement</a:t>
+            </a:r>
+            <a:endParaRPr lang="en-US" sz="1500" dirty="0"/>
+          </a:p>
+        </p:txBody>
+      </p:sp>
+      <p:sp>
+        <p:nvSpPr>
+          <p:cNvPr id="8" name="Text 6"/>
+          <p:cNvSpPr/>
+          <p:nvPr/>
+        </p:nvSpPr>
+        <p:spPr>
+          <a:xfrm>
+            <a:off x="1051560" y="3264408"/>
+            <a:ext cx="10424160" cy="731520"/>
+          </a:xfrm>
+          <a:prstGeom prst="rect">
+            <a:avLst/>
+          </a:prstGeom>
+          <a:noFill/>
+          <a:ln/>
+        </p:spPr>
+        <p:txBody>
+          <a:bodyPr wrap="square" rtlCol="0" anchor="t">
+            <a:spAutoFit/>
+          </a:bodyPr>
+          <a:lstStyle/>
+          <a:p>
+            <a:pPr indent="0" marL="0">
+              <a:buNone/>
+            </a:pPr>
+            <a:r>
+              <a:rPr lang="en-US" sz="1400" dirty="0">
+                <a:solidFill>
+                  <a:srgbClr val="1A1A1A"/>
+                </a:solidFill>
+                <a:latin typeface="Calibri" pitchFamily="34" charset="0"/>
+                <a:ea typeface="Calibri" pitchFamily="34" charset="-122"/>
+                <a:cs typeface="Calibri" pitchFamily="34" charset="-120"/>
+              </a:rPr>
+              <a:t>A Pudding process post</a:t>
+            </a:r>
+            <a:endParaRPr lang="en-US" sz="1400" dirty="0"/>
+          </a:p>
+        </p:txBody>
+      </p:sp>
+      <p:sp>
+        <p:nvSpPr>
+          <p:cNvPr id="9" name="Shape 7"/>
+          <p:cNvSpPr/>
+          <p:nvPr/>
+        </p:nvSpPr>
+        <p:spPr>
+          <a:xfrm>
+            <a:off x="640080" y="4096512"/>
+            <a:ext cx="219456" cy="219456"/>
+          </a:xfrm>
+          <a:prstGeom prst="ellipse">
+            <a:avLst/>
+          </a:prstGeom>
+          <a:solidFill>
+            <a:srgbClr val="B9852F"/>
+          </a:solidFill>
+          <a:ln/>
+        </p:spPr>
+      </p:sp>
+      <p:sp>
+        <p:nvSpPr>
+          <p:cNvPr id="10" name="Text 8"/>
+          <p:cNvSpPr/>
+          <p:nvPr/>
+        </p:nvSpPr>
+        <p:spPr>
+          <a:xfrm>
+            <a:off x="1051560" y="4023360"/>
+            <a:ext cx="10424160" cy="365760"/>
+          </a:xfrm>
+          <a:prstGeom prst="rect">
+            <a:avLst/>
+          </a:prstGeom>
+          <a:noFill/>
+          <a:ln/>
+        </p:spPr>
+        <p:txBody>
+          <a:bodyPr wrap="square" rtlCol="0" anchor="ctr"/>
+          <a:lstStyle/>
+          <a:p>
+            <a:pPr indent="0" marL="0">
+              <a:buNone/>
+            </a:pPr>
+            <a:r>
+              <a:rPr lang="en-US" sz="1500" b="1" dirty="0">
+                <a:solidFill>
+                  <a:srgbClr val="B9852F"/>
+                </a:solidFill>
+                <a:latin typeface="Calibri" pitchFamily="34" charset="0"/>
+                <a:ea typeface="Calibri" pitchFamily="34" charset="-122"/>
+                <a:cs typeface="Calibri" pitchFamily="34" charset="-120"/>
+              </a:rPr>
+              <a:t>Sketch</a:t>
+            </a:r>
+            <a:endParaRPr lang="en-US" sz="1500" dirty="0"/>
+          </a:p>
+        </p:txBody>
+      </p:sp>
+      <p:sp>
+        <p:nvSpPr>
+          <p:cNvPr id="11" name="Text 9"/>
+          <p:cNvSpPr/>
+          <p:nvPr/>
+        </p:nvSpPr>
+        <p:spPr>
+          <a:xfrm>
+            <a:off x="1051560" y="4407408"/>
+            <a:ext cx="10424160" cy="731520"/>
+          </a:xfrm>
+          <a:prstGeom prst="rect">
+            <a:avLst/>
+          </a:prstGeom>
+          <a:noFill/>
+          <a:ln/>
+        </p:spPr>
+        <p:txBody>
+          <a:bodyPr wrap="square" rtlCol="0" anchor="t">
+            <a:spAutoFit/>
+          </a:bodyPr>
+          <a:lstStyle/>
+          <a:p>
+            <a:pPr indent="0" marL="0">
+              <a:buNone/>
+            </a:pPr>
+            <a:r>
+              <a:rPr lang="en-US" sz="1400" dirty="0">
+                <a:solidFill>
+                  <a:srgbClr val="1A1A1A"/>
+                </a:solidFill>
+                <a:latin typeface="Calibri" pitchFamily="34" charset="0"/>
+                <a:ea typeface="Calibri" pitchFamily="34" charset="-122"/>
+                <a:cs typeface="Calibri" pitchFamily="34" charset="-120"/>
+              </a:rPr>
+              <a:t>Title your essay; write the headline finding in one sentence.</a:t>
+            </a:r>
+            <a:endParaRPr lang="en-US" sz="1400" dirty="0"/>
+          </a:p>
+        </p:txBody>
+      </p:sp>
+      <p:sp>
+        <p:nvSpPr>
+          <p:cNvPr id="12" name="Shape 10"/>
+          <p:cNvSpPr/>
+          <p:nvPr/>
+        </p:nvSpPr>
+        <p:spPr>
+          <a:xfrm>
+            <a:off x="640080" y="5239512"/>
+            <a:ext cx="219456" cy="219456"/>
+          </a:xfrm>
+          <a:prstGeom prst="ellipse">
+            <a:avLst/>
+          </a:prstGeom>
+          <a:solidFill>
             <a:srgbClr val="7A3B2E"/>
           </a:solidFill>
           <a:ln/>
@@ -4784,263 +6267,83 @@
       </p:sp>
       <p:sp>
         <p:nvSpPr>
-          <p:cNvPr id="6" name="Shape 4"/>
-          <p:cNvSpPr/>
-          <p:nvPr/>
-        </p:nvSpPr>
-        <p:spPr>
-          <a:xfrm>
-            <a:off x="10770371" y="5503948"/>
-            <a:ext cx="97407" cy="97407"/>
-          </a:xfrm>
-          <a:prstGeom prst="ellipse">
-            <a:avLst/>
-          </a:prstGeom>
-          <a:solidFill>
-            <a:srgbClr val="3F6F5F"/>
-          </a:solidFill>
-          <a:ln/>
-        </p:spPr>
-      </p:sp>
-      <p:sp>
-        <p:nvSpPr>
-          <p:cNvPr id="7" name="Shape 5"/>
-          <p:cNvSpPr/>
-          <p:nvPr/>
-        </p:nvSpPr>
-        <p:spPr>
-          <a:xfrm>
-            <a:off x="10487110" y="5471260"/>
-            <a:ext cx="97856" cy="97856"/>
-          </a:xfrm>
-          <a:prstGeom prst="ellipse">
-            <a:avLst/>
-          </a:prstGeom>
-          <a:solidFill>
-            <a:srgbClr val="B9852F"/>
-          </a:solidFill>
-          <a:ln/>
-        </p:spPr>
-      </p:sp>
-      <p:sp>
-        <p:nvSpPr>
-          <p:cNvPr id="8" name="Shape 6"/>
-          <p:cNvSpPr/>
-          <p:nvPr/>
-        </p:nvSpPr>
-        <p:spPr>
-          <a:xfrm>
-            <a:off x="10980241" y="6206711"/>
-            <a:ext cx="57031" cy="57031"/>
-          </a:xfrm>
-          <a:prstGeom prst="ellipse">
-            <a:avLst/>
-          </a:prstGeom>
-          <a:solidFill>
-            <a:srgbClr val="7A3B2E"/>
-          </a:solidFill>
-          <a:ln/>
-        </p:spPr>
-      </p:sp>
-      <p:sp>
-        <p:nvSpPr>
-          <p:cNvPr id="9" name="Shape 7"/>
-          <p:cNvSpPr/>
-          <p:nvPr/>
-        </p:nvSpPr>
-        <p:spPr>
-          <a:xfrm>
-            <a:off x="10756246" y="4959481"/>
-            <a:ext cx="52654" cy="52654"/>
-          </a:xfrm>
-          <a:prstGeom prst="ellipse">
-            <a:avLst/>
-          </a:prstGeom>
-          <a:solidFill>
-            <a:srgbClr val="3F6F5F"/>
-          </a:solidFill>
-          <a:ln/>
-        </p:spPr>
-      </p:sp>
-      <p:sp>
-        <p:nvSpPr>
-          <p:cNvPr id="10" name="Shape 8"/>
-          <p:cNvSpPr/>
-          <p:nvPr/>
-        </p:nvSpPr>
-        <p:spPr>
-          <a:xfrm>
-            <a:off x="10881924" y="5928189"/>
-            <a:ext cx="52722" cy="52722"/>
-          </a:xfrm>
-          <a:prstGeom prst="ellipse">
-            <a:avLst/>
-          </a:prstGeom>
-          <a:solidFill>
-            <a:srgbClr val="B9852F"/>
-          </a:solidFill>
-          <a:ln/>
-        </p:spPr>
-      </p:sp>
-      <p:sp>
-        <p:nvSpPr>
-          <p:cNvPr id="11" name="Shape 9"/>
-          <p:cNvSpPr/>
-          <p:nvPr/>
-        </p:nvSpPr>
-        <p:spPr>
-          <a:xfrm>
-            <a:off x="9863756" y="4624655"/>
-            <a:ext cx="80096" cy="80096"/>
-          </a:xfrm>
-          <a:prstGeom prst="ellipse">
-            <a:avLst/>
-          </a:prstGeom>
-          <a:solidFill>
-            <a:srgbClr val="7A3B2E"/>
-          </a:solidFill>
-          <a:ln/>
-        </p:spPr>
-      </p:sp>
-      <p:sp>
-        <p:nvSpPr>
-          <p:cNvPr id="12" name="Shape 10"/>
-          <p:cNvSpPr/>
-          <p:nvPr/>
-        </p:nvSpPr>
-        <p:spPr>
-          <a:xfrm>
-            <a:off x="11328861" y="5247499"/>
-            <a:ext cx="47906" cy="47906"/>
-          </a:xfrm>
-          <a:prstGeom prst="ellipse">
-            <a:avLst/>
-          </a:prstGeom>
-          <a:solidFill>
-            <a:srgbClr val="3F6F5F"/>
-          </a:solidFill>
-          <a:ln/>
-        </p:spPr>
-      </p:sp>
-      <p:sp>
-        <p:nvSpPr>
-          <p:cNvPr id="13" name="Shape 11"/>
-          <p:cNvSpPr/>
-          <p:nvPr/>
-        </p:nvSpPr>
-        <p:spPr>
-          <a:xfrm>
-            <a:off x="11223399" y="5045902"/>
-            <a:ext cx="88742" cy="88742"/>
-          </a:xfrm>
-          <a:prstGeom prst="ellipse">
-            <a:avLst/>
-          </a:prstGeom>
-          <a:solidFill>
-            <a:srgbClr val="B9852F"/>
-          </a:solidFill>
-          <a:ln/>
-        </p:spPr>
-      </p:sp>
-      <p:sp>
-        <p:nvSpPr>
-          <p:cNvPr id="14" name="Shape 12"/>
-          <p:cNvSpPr/>
-          <p:nvPr/>
-        </p:nvSpPr>
-        <p:spPr>
-          <a:xfrm>
-            <a:off x="10614171" y="4743763"/>
-            <a:ext cx="60870" cy="60870"/>
-          </a:xfrm>
-          <a:prstGeom prst="ellipse">
-            <a:avLst/>
-          </a:prstGeom>
-          <a:solidFill>
-            <a:srgbClr val="7A3B2E"/>
-          </a:solidFill>
-          <a:ln/>
-        </p:spPr>
-      </p:sp>
-      <p:sp>
-        <p:nvSpPr>
-          <p:cNvPr id="15" name="Shape 13"/>
-          <p:cNvSpPr/>
-          <p:nvPr/>
-        </p:nvSpPr>
-        <p:spPr>
-          <a:xfrm>
-            <a:off x="10567976" y="5064983"/>
-            <a:ext cx="96880" cy="96880"/>
-          </a:xfrm>
-          <a:prstGeom prst="ellipse">
-            <a:avLst/>
-          </a:prstGeom>
-          <a:solidFill>
-            <a:srgbClr val="3F6F5F"/>
-          </a:solidFill>
-          <a:ln/>
-        </p:spPr>
-      </p:sp>
-      <p:sp>
-        <p:nvSpPr>
-          <p:cNvPr id="16" name="Shape 14"/>
-          <p:cNvSpPr/>
-          <p:nvPr/>
-        </p:nvSpPr>
-        <p:spPr>
-          <a:xfrm>
-            <a:off x="9591294" y="4996100"/>
-            <a:ext cx="55038" cy="55038"/>
-          </a:xfrm>
-          <a:prstGeom prst="ellipse">
-            <a:avLst/>
-          </a:prstGeom>
-          <a:solidFill>
-            <a:srgbClr val="B9852F"/>
-          </a:solidFill>
-          <a:ln/>
-        </p:spPr>
-      </p:sp>
-      <p:sp>
-        <p:nvSpPr>
-          <p:cNvPr id="17" name="Shape 15"/>
-          <p:cNvSpPr/>
-          <p:nvPr/>
-        </p:nvSpPr>
-        <p:spPr>
-          <a:xfrm>
-            <a:off x="11311246" y="5261017"/>
-            <a:ext cx="67933" cy="67933"/>
-          </a:xfrm>
-          <a:prstGeom prst="ellipse">
-            <a:avLst/>
-          </a:prstGeom>
-          <a:solidFill>
-            <a:srgbClr val="7A3B2E"/>
-          </a:solidFill>
-          <a:ln/>
-        </p:spPr>
-      </p:sp>
-      <p:sp>
-        <p:nvSpPr>
-          <p:cNvPr id="18" name="Shape 16"/>
-          <p:cNvSpPr/>
-          <p:nvPr/>
-        </p:nvSpPr>
-        <p:spPr>
-          <a:xfrm>
-            <a:off x="9113671" y="4846271"/>
-            <a:ext cx="48698" cy="48698"/>
-          </a:xfrm>
-          <a:prstGeom prst="ellipse">
-            <a:avLst/>
-          </a:prstGeom>
-          <a:solidFill>
-            <a:srgbClr val="3F6F5F"/>
-          </a:solidFill>
-          <a:ln/>
-        </p:spPr>
+          <p:cNvPr id="13" name="Text 11"/>
+          <p:cNvSpPr/>
+          <p:nvPr/>
+        </p:nvSpPr>
+        <p:spPr>
+          <a:xfrm>
+            <a:off x="1051560" y="5166360"/>
+            <a:ext cx="10424160" cy="365760"/>
+          </a:xfrm>
+          <a:prstGeom prst="rect">
+            <a:avLst/>
+          </a:prstGeom>
+          <a:noFill/>
+          <a:ln/>
+        </p:spPr>
+        <p:txBody>
+          <a:bodyPr wrap="square" rtlCol="0" anchor="ctr"/>
+          <a:lstStyle/>
+          <a:p>
+            <a:pPr indent="0" marL="0">
+              <a:buNone/>
+            </a:pPr>
+            <a:r>
+              <a:rPr lang="en-US" sz="1500" b="1" dirty="0">
+                <a:solidFill>
+                  <a:srgbClr val="7A3B2E"/>
+                </a:solidFill>
+                <a:latin typeface="Calibri" pitchFamily="34" charset="0"/>
+                <a:ea typeface="Calibri" pitchFamily="34" charset="-122"/>
+                <a:cs typeface="Calibri" pitchFamily="34" charset="-120"/>
+              </a:rPr>
+              <a:t>Check (AI closed)</a:t>
+            </a:r>
+            <a:endParaRPr lang="en-US" sz="1500" dirty="0"/>
+          </a:p>
+        </p:txBody>
+      </p:sp>
+      <p:sp>
+        <p:nvSpPr>
+          <p:cNvPr id="14" name="Text 12"/>
+          <p:cNvSpPr/>
+          <p:nvPr/>
+        </p:nvSpPr>
+        <p:spPr>
+          <a:xfrm>
+            <a:off x="1051560" y="5550408"/>
+            <a:ext cx="10424160" cy="731520"/>
+          </a:xfrm>
+          <a:prstGeom prst="rect">
+            <a:avLst/>
+          </a:prstGeom>
+          <a:noFill/>
+          <a:ln/>
+        </p:spPr>
+        <p:txBody>
+          <a:bodyPr wrap="square" rtlCol="0" anchor="t">
+            <a:spAutoFit/>
+          </a:bodyPr>
+          <a:lstStyle/>
+          <a:p>
+            <a:pPr indent="0" marL="0">
+              <a:buNone/>
+            </a:pPr>
+            <a:r>
+              <a:rPr lang="en-US" sz="1400" dirty="0">
+                <a:solidFill>
+                  <a:srgbClr val="1A1A1A"/>
+                </a:solidFill>
+                <a:latin typeface="Calibri" pitchFamily="34" charset="0"/>
+                <a:ea typeface="Calibri" pitchFamily="34" charset="-122"/>
+                <a:cs typeface="Calibri" pitchFamily="34" charset="-120"/>
+              </a:rPr>
+              <a:t>Fix it: a planted bug in publishing/layout code (or in opted-in JS). (Competencies 1, 7.)</a:t>
+            </a:r>
+            <a:endParaRPr lang="en-US" sz="1400" dirty="0"/>
+          </a:p>
+        </p:txBody>
       </p:sp>
     </p:spTree>
   </p:cSld>

--- a/slides/pptx/week-09.pptx
+++ b/slides/pptx/week-09.pptx
@@ -3755,7 +3755,7 @@
                 <a:ea typeface="Calibri" pitchFamily="34" charset="-122"/>
                 <a:cs typeface="Calibri" pitchFamily="34" charset="-120"/>
               </a:rPr>
-              <a:t>WEEK 9 · THE MATERIAL</a:t>
+              <a:t>WEEK 9 · KEY POINTS</a:t>
             </a:r>
             <a:endParaRPr lang="en-US" sz="1200" dirty="0"/>
           </a:p>
@@ -4143,7 +4143,7 @@
                 <a:ea typeface="Calibri" pitchFamily="34" charset="-122"/>
                 <a:cs typeface="Calibri" pitchFamily="34" charset="-120"/>
               </a:rPr>
-              <a:t>WEEK 9 · THE MATERIAL</a:t>
+              <a:t>WEEK 9 · KEY POINTS</a:t>
             </a:r>
             <a:endParaRPr lang="en-US" sz="1200" dirty="0"/>
           </a:p>
@@ -4467,7 +4467,7 @@
                 <a:ea typeface="Calibri" pitchFamily="34" charset="-122"/>
                 <a:cs typeface="Calibri" pitchFamily="34" charset="-120"/>
               </a:rPr>
-              <a:t>WEEK 9 · THE MATERIAL</a:t>
+              <a:t>WEEK 9 · KEY POINTS</a:t>
             </a:r>
             <a:endParaRPr lang="en-US" sz="1200" dirty="0"/>
           </a:p>

--- a/slides/pptx/week-09.pptx
+++ b/slides/pptx/week-09.pptx
@@ -4508,7 +4508,7 @@
                 <a:ea typeface="Cambria" pitchFamily="34" charset="-122"/>
                 <a:cs typeface="Cambria" pitchFamily="34" charset="-120"/>
               </a:rPr>
-              <a:t>Ship it</a:t>
+              <a:t>Publish</a:t>
             </a:r>
             <a:endParaRPr lang="en-US" sz="3000" dirty="0"/>
           </a:p>
@@ -4636,7 +4636,7 @@
                 <a:ea typeface="Calibri" pitchFamily="34" charset="-122"/>
                 <a:cs typeface="Calibri" pitchFamily="34" charset="-120"/>
               </a:rPr>
-              <a:t>A deployed URL leaves this room today.</a:t>
+              <a:t>Every student leaves this session with a deployed URL.</a:t>
             </a:r>
             <a:endParaRPr lang="en-US" sz="1650" dirty="0"/>
           </a:p>

--- a/slides/pptx/week-09.pptx
+++ b/slides/pptx/week-09.pptx
@@ -5953,7 +5953,7 @@
         </p:nvSpPr>
         <p:spPr>
           <a:xfrm>
-            <a:off x="640080" y="1810512"/>
+            <a:off x="640080" y="1673352"/>
             <a:ext cx="219456" cy="219456"/>
           </a:xfrm>
           <a:prstGeom prst="ellipse">
@@ -5973,7 +5973,7 @@
         </p:nvSpPr>
         <p:spPr>
           <a:xfrm>
-            <a:off x="1051560" y="1737360"/>
+            <a:off x="1051560" y="1600200"/>
             <a:ext cx="10424160" cy="365760"/>
           </a:xfrm>
           <a:prstGeom prst="rect">
@@ -6012,7 +6012,7 @@
         </p:nvSpPr>
         <p:spPr>
           <a:xfrm>
-            <a:off x="1051560" y="2121408"/>
+            <a:off x="1051560" y="1984248"/>
             <a:ext cx="10424160" cy="731520"/>
           </a:xfrm>
           <a:prstGeom prst="rect">
@@ -6053,7 +6053,7 @@
         </p:nvSpPr>
         <p:spPr>
           <a:xfrm>
-            <a:off x="640080" y="2953512"/>
+            <a:off x="640080" y="2633472"/>
             <a:ext cx="219456" cy="219456"/>
           </a:xfrm>
           <a:prstGeom prst="ellipse">
@@ -6073,7 +6073,7 @@
         </p:nvSpPr>
         <p:spPr>
           <a:xfrm>
-            <a:off x="1051560" y="2880360"/>
+            <a:off x="1051560" y="2560320"/>
             <a:ext cx="10424160" cy="365760"/>
           </a:xfrm>
           <a:prstGeom prst="rect">
@@ -6112,7 +6112,7 @@
         </p:nvSpPr>
         <p:spPr>
           <a:xfrm>
-            <a:off x="1051560" y="3264408"/>
+            <a:off x="1051560" y="2944368"/>
             <a:ext cx="10424160" cy="731520"/>
           </a:xfrm>
           <a:prstGeom prst="rect">
@@ -6153,7 +6153,7 @@
         </p:nvSpPr>
         <p:spPr>
           <a:xfrm>
-            <a:off x="640080" y="4096512"/>
+            <a:off x="640080" y="3593592"/>
             <a:ext cx="219456" cy="219456"/>
           </a:xfrm>
           <a:prstGeom prst="ellipse">
@@ -6173,7 +6173,7 @@
         </p:nvSpPr>
         <p:spPr>
           <a:xfrm>
-            <a:off x="1051560" y="4023360"/>
+            <a:off x="1051560" y="3520440"/>
             <a:ext cx="10424160" cy="365760"/>
           </a:xfrm>
           <a:prstGeom prst="rect">
@@ -6198,7 +6198,7 @@
                 <a:ea typeface="Calibri" pitchFamily="34" charset="-122"/>
                 <a:cs typeface="Calibri" pitchFamily="34" charset="-120"/>
               </a:rPr>
-              <a:t>Sketch</a:t>
+              <a:t>Deeper (optional)</a:t>
             </a:r>
             <a:endParaRPr lang="en-US" sz="1500" dirty="0"/>
           </a:p>
@@ -6212,7 +6212,7 @@
         </p:nvSpPr>
         <p:spPr>
           <a:xfrm>
-            <a:off x="1051560" y="4407408"/>
+            <a:off x="1051560" y="3904488"/>
             <a:ext cx="10424160" cy="731520"/>
           </a:xfrm>
           <a:prstGeom prst="rect">
@@ -6239,7 +6239,7 @@
                 <a:ea typeface="Calibri" pitchFamily="34" charset="-122"/>
                 <a:cs typeface="Calibri" pitchFamily="34" charset="-120"/>
               </a:rPr>
-              <a:t>Title your essay; write the headline finding in one sentence.</a:t>
+              <a:t>the Critical Inquiry online forum: Underwood and others answer Da, a discipline arguing about itself in public</a:t>
             </a:r>
             <a:endParaRPr lang="en-US" sz="1400" dirty="0"/>
           </a:p>
@@ -6253,14 +6253,14 @@
         </p:nvSpPr>
         <p:spPr>
           <a:xfrm>
-            <a:off x="640080" y="5239512"/>
+            <a:off x="640080" y="4553712"/>
             <a:ext cx="219456" cy="219456"/>
           </a:xfrm>
           <a:prstGeom prst="ellipse">
             <a:avLst/>
           </a:prstGeom>
           <a:solidFill>
-            <a:srgbClr val="7A3B2E"/>
+            <a:srgbClr val="3F6F5F"/>
           </a:solidFill>
           <a:ln/>
         </p:spPr>
@@ -6273,7 +6273,7 @@
         </p:nvSpPr>
         <p:spPr>
           <a:xfrm>
-            <a:off x="1051560" y="5166360"/>
+            <a:off x="1051560" y="4480560"/>
             <a:ext cx="10424160" cy="365760"/>
           </a:xfrm>
           <a:prstGeom prst="rect">
@@ -6292,12 +6292,112 @@
             <a:r>
               <a:rPr lang="en-US" sz="1500" b="1" dirty="0">
                 <a:solidFill>
-                  <a:srgbClr val="7A3B2E"/>
+                  <a:srgbClr val="3F6F5F"/>
                 </a:solidFill>
                 <a:latin typeface="Calibri" pitchFamily="34" charset="0"/>
                 <a:ea typeface="Calibri" pitchFamily="34" charset="-122"/>
                 <a:cs typeface="Calibri" pitchFamily="34" charset="-120"/>
               </a:rPr>
+              <a:t>Sketch</a:t>
+            </a:r>
+            <a:endParaRPr lang="en-US" sz="1500" dirty="0"/>
+          </a:p>
+        </p:txBody>
+      </p:sp>
+      <p:sp>
+        <p:nvSpPr>
+          <p:cNvPr id="14" name="Text 12"/>
+          <p:cNvSpPr/>
+          <p:nvPr/>
+        </p:nvSpPr>
+        <p:spPr>
+          <a:xfrm>
+            <a:off x="1051560" y="4864608"/>
+            <a:ext cx="10424160" cy="731520"/>
+          </a:xfrm>
+          <a:prstGeom prst="rect">
+            <a:avLst/>
+          </a:prstGeom>
+          <a:noFill/>
+          <a:ln/>
+        </p:spPr>
+        <p:txBody>
+          <a:bodyPr wrap="square" rtlCol="0" anchor="t">
+            <a:spAutoFit/>
+          </a:bodyPr>
+          <a:lstStyle/>
+          <a:p>
+            <a:pPr indent="0" marL="0">
+              <a:buNone/>
+            </a:pPr>
+            <a:r>
+              <a:rPr lang="en-US" sz="1400" dirty="0">
+                <a:solidFill>
+                  <a:srgbClr val="1A1A1A"/>
+                </a:solidFill>
+                <a:latin typeface="Calibri" pitchFamily="34" charset="0"/>
+                <a:ea typeface="Calibri" pitchFamily="34" charset="-122"/>
+                <a:cs typeface="Calibri" pitchFamily="34" charset="-120"/>
+              </a:rPr>
+              <a:t>Title your essay; write the headline finding in one sentence.</a:t>
+            </a:r>
+            <a:endParaRPr lang="en-US" sz="1400" dirty="0"/>
+          </a:p>
+        </p:txBody>
+      </p:sp>
+      <p:sp>
+        <p:nvSpPr>
+          <p:cNvPr id="15" name="Shape 13"/>
+          <p:cNvSpPr/>
+          <p:nvPr/>
+        </p:nvSpPr>
+        <p:spPr>
+          <a:xfrm>
+            <a:off x="640080" y="5513832"/>
+            <a:ext cx="219456" cy="219456"/>
+          </a:xfrm>
+          <a:prstGeom prst="ellipse">
+            <a:avLst/>
+          </a:prstGeom>
+          <a:solidFill>
+            <a:srgbClr val="7A3B2E"/>
+          </a:solidFill>
+          <a:ln/>
+        </p:spPr>
+      </p:sp>
+      <p:sp>
+        <p:nvSpPr>
+          <p:cNvPr id="16" name="Text 14"/>
+          <p:cNvSpPr/>
+          <p:nvPr/>
+        </p:nvSpPr>
+        <p:spPr>
+          <a:xfrm>
+            <a:off x="1051560" y="5440680"/>
+            <a:ext cx="10424160" cy="365760"/>
+          </a:xfrm>
+          <a:prstGeom prst="rect">
+            <a:avLst/>
+          </a:prstGeom>
+          <a:noFill/>
+          <a:ln/>
+        </p:spPr>
+        <p:txBody>
+          <a:bodyPr wrap="square" rtlCol="0" anchor="ctr"/>
+          <a:lstStyle/>
+          <a:p>
+            <a:pPr indent="0" marL="0">
+              <a:buNone/>
+            </a:pPr>
+            <a:r>
+              <a:rPr lang="en-US" sz="1500" b="1" dirty="0">
+                <a:solidFill>
+                  <a:srgbClr val="7A3B2E"/>
+                </a:solidFill>
+                <a:latin typeface="Calibri" pitchFamily="34" charset="0"/>
+                <a:ea typeface="Calibri" pitchFamily="34" charset="-122"/>
+                <a:cs typeface="Calibri" pitchFamily="34" charset="-120"/>
+              </a:rPr>
               <a:t>Check (AI closed)</a:t>
             </a:r>
             <a:endParaRPr lang="en-US" sz="1500" dirty="0"/>
@@ -6306,13 +6406,13 @@
       </p:sp>
       <p:sp>
         <p:nvSpPr>
-          <p:cNvPr id="14" name="Text 12"/>
-          <p:cNvSpPr/>
-          <p:nvPr/>
-        </p:nvSpPr>
-        <p:spPr>
-          <a:xfrm>
-            <a:off x="1051560" y="5550408"/>
+          <p:cNvPr id="17" name="Text 15"/>
+          <p:cNvSpPr/>
+          <p:nvPr/>
+        </p:nvSpPr>
+        <p:spPr>
+          <a:xfrm>
+            <a:off x="1051560" y="5824728"/>
             <a:ext cx="10424160" cy="731520"/>
           </a:xfrm>
           <a:prstGeom prst="rect">

--- a/slides/pptx/week-09.pptx
+++ b/slides/pptx/week-09.pptx
@@ -15,10 +15,9 @@
     <p:sldId id="263" r:id="rId9"/>
     <p:sldId id="264" r:id="rId10"/>
     <p:sldId id="265" r:id="rId11"/>
-    <p:sldId id="266" r:id="rId12"/>
   </p:sldIdLst>
   <p:notesMasterIdLst>
-    <p:notesMasterId r:id="rId13"/>
+    <p:notesMasterId r:id="rId12"/>
   </p:notesMasterIdLst>
   <p:sldSz cx="12191695" cy="6858000"/>
   <p:notesSz cx="6858000" cy="12191695"/>
@@ -642,94 +641,6 @@
 </p:notes>
 </file>
 
-<file path=ppt/notesSlides/notesSlide11.xml><?xml version="1.0" encoding="utf-8"?>
-<p:notes xmlns:a="http://schemas.openxmlformats.org/drawingml/2006/main" xmlns:r="http://schemas.openxmlformats.org/officeDocument/2006/relationships" xmlns:p="http://schemas.openxmlformats.org/presentationml/2006/main">
-  <p:cSld>
-    <p:spTree>
-      <p:nvGrpSpPr>
-        <p:cNvPr id="1" name=""/>
-        <p:cNvGrpSpPr/>
-        <p:nvPr/>
-      </p:nvGrpSpPr>
-      <p:grpSpPr>
-        <a:xfrm>
-          <a:off x="0" y="0"/>
-          <a:ext cx="0" cy="0"/>
-          <a:chOff x="0" y="0"/>
-          <a:chExt cx="0" cy="0"/>
-        </a:xfrm>
-      </p:grpSpPr>
-      <p:sp>
-        <p:nvSpPr>
-          <p:cNvPr id="2" name="Slide Image Placeholder 1"/>
-          <p:cNvSpPr>
-            <a:spLocks noGrp="1" noRot="1" noChangeAspect="1"/>
-          </p:cNvSpPr>
-          <p:nvPr>
-            <p:ph type="sldImg"/>
-          </p:nvPr>
-        </p:nvSpPr>
-        <p:spPr/>
-      </p:sp>
-      <p:sp>
-        <p:nvSpPr>
-          <p:cNvPr id="3" name="Notes Placeholder 2"/>
-          <p:cNvSpPr>
-            <a:spLocks noGrp="1"/>
-          </p:cNvSpPr>
-          <p:nvPr>
-            <p:ph type="body" idx="1"/>
-          </p:nvPr>
-        </p:nvSpPr>
-        <p:spPr/>
-        <p:txBody>
-          <a:bodyPr/>
-          <a:lstStyle/>
-          <a:p>
-            <a:r>
-              <a:rPr lang="en-US" dirty="0"/>
-              <a:t/>
-            </a:r>
-            <a:endParaRPr lang="en-US" dirty="0"/>
-          </a:p>
-        </p:txBody>
-      </p:sp>
-      <p:sp>
-        <p:nvSpPr>
-          <p:cNvPr id="4" name="Slide Number Placeholder 3"/>
-          <p:cNvSpPr>
-            <a:spLocks noGrp="1"/>
-          </p:cNvSpPr>
-          <p:nvPr>
-            <p:ph type="sldNum" sz="quarter" idx="10"/>
-          </p:nvPr>
-        </p:nvSpPr>
-        <p:spPr/>
-        <p:txBody>
-          <a:bodyPr/>
-          <a:lstStyle/>
-          <a:p>
-            <a:fld id="{F7021451-1387-4CA6-816F-3879F97B5CBC}" type="slidenum">
-              <a:rPr lang="en-US"/>
-              <a:t>11</a:t>
-            </a:fld>
-            <a:endParaRPr lang="en-US"/>
-          </a:p>
-        </p:txBody>
-      </p:sp>
-    </p:spTree>
-    <p:extLst>
-      <p:ext uri="{BB962C8B-B14F-4D97-AF65-F5344CB8AC3E}">
-        <p14:creationId xmlns:p14="http://schemas.microsoft.com/office/powerpoint/2010/main" val="1024086991"/>
-      </p:ext>
-    </p:extLst>
-  </p:cSld>
-  <p:clrMapOvr>
-    <a:masterClrMapping/>
-  </p:clrMapOvr>
-</p:notes>
-</file>
-
 <file path=ppt/notesSlides/notesSlide2.xml><?xml version="1.0" encoding="utf-8"?>
 <p:notes xmlns:a="http://schemas.openxmlformats.org/drawingml/2006/main" xmlns:r="http://schemas.openxmlformats.org/officeDocument/2006/relationships" xmlns:p="http://schemas.openxmlformats.org/presentationml/2006/main">
   <p:cSld>
@@ -2298,548 +2209,6 @@
     <p:bg>
       <p:bgPr>
         <a:solidFill>
-          <a:srgbClr val="FFFFFF"/>
-        </a:solidFill>
-      </p:bgPr>
-    </p:bg>
-    <p:spTree>
-      <p:nvGrpSpPr>
-        <p:cNvPr id="1" name=""/>
-        <p:cNvGrpSpPr/>
-        <p:nvPr/>
-      </p:nvGrpSpPr>
-      <p:grpSpPr>
-        <a:xfrm>
-          <a:off x="0" y="0"/>
-          <a:ext cx="0" cy="0"/>
-          <a:chOff x="0" y="0"/>
-          <a:chExt cx="0" cy="0"/>
-        </a:xfrm>
-      </p:grpSpPr>
-      <p:sp>
-        <p:nvSpPr>
-          <p:cNvPr id="2" name="Text 0"/>
-          <p:cNvSpPr/>
-          <p:nvPr/>
-        </p:nvSpPr>
-        <p:spPr>
-          <a:xfrm>
-            <a:off x="640080" y="640080"/>
-            <a:ext cx="10058400" cy="320040"/>
-          </a:xfrm>
-          <a:prstGeom prst="rect">
-            <a:avLst/>
-          </a:prstGeom>
-          <a:noFill/>
-          <a:ln/>
-        </p:spPr>
-        <p:txBody>
-          <a:bodyPr wrap="square" rtlCol="0" anchor="ctr"/>
-          <a:lstStyle/>
-          <a:p>
-            <a:pPr indent="0" marL="0">
-              <a:buNone/>
-            </a:pPr>
-            <a:r>
-              <a:rPr lang="en-US" sz="1300" b="1" spc="300" kern="0" dirty="0">
-                <a:solidFill>
-                  <a:srgbClr val="7A3B2E"/>
-                </a:solidFill>
-                <a:latin typeface="Calibri" pitchFamily="34" charset="0"/>
-                <a:ea typeface="Calibri" pitchFamily="34" charset="-122"/>
-                <a:cs typeface="Calibri" pitchFamily="34" charset="-120"/>
-              </a:rPr>
-              <a:t>HOW THIS WEEK CONNECTS</a:t>
-            </a:r>
-            <a:endParaRPr lang="en-US" sz="1300" dirty="0"/>
-          </a:p>
-        </p:txBody>
-      </p:sp>
-      <p:sp>
-        <p:nvSpPr>
-          <p:cNvPr id="3" name="Text 1"/>
-          <p:cNvSpPr/>
-          <p:nvPr/>
-        </p:nvSpPr>
-        <p:spPr>
-          <a:xfrm>
-            <a:off x="640080" y="987552"/>
-            <a:ext cx="10058400" cy="640080"/>
-          </a:xfrm>
-          <a:prstGeom prst="rect">
-            <a:avLst/>
-          </a:prstGeom>
-          <a:noFill/>
-          <a:ln/>
-        </p:spPr>
-        <p:txBody>
-          <a:bodyPr wrap="square" rtlCol="0" anchor="ctr"/>
-          <a:lstStyle/>
-          <a:p>
-            <a:pPr indent="0" marL="0">
-              <a:buNone/>
-            </a:pPr>
-            <a:r>
-              <a:rPr lang="en-US" sz="2800" b="1" dirty="0">
-                <a:solidFill>
-                  <a:srgbClr val="1A1A1A"/>
-                </a:solidFill>
-                <a:latin typeface="Cambria" pitchFamily="34" charset="0"/>
-                <a:ea typeface="Cambria" pitchFamily="34" charset="-122"/>
-                <a:cs typeface="Cambria" pitchFamily="34" charset="-120"/>
-              </a:rPr>
-              <a:t>The course's through-lines</a:t>
-            </a:r>
-            <a:endParaRPr lang="en-US" sz="2800" dirty="0"/>
-          </a:p>
-        </p:txBody>
-      </p:sp>
-      <p:sp>
-        <p:nvSpPr>
-          <p:cNvPr id="4" name="Shape 2"/>
-          <p:cNvSpPr/>
-          <p:nvPr/>
-        </p:nvSpPr>
-        <p:spPr>
-          <a:xfrm>
-            <a:off x="640080" y="2057400"/>
-            <a:ext cx="457200" cy="457200"/>
-          </a:xfrm>
-          <a:prstGeom prst="roundRect">
-            <a:avLst>
-              <a:gd name="adj" fmla="val 16000"/>
-            </a:avLst>
-          </a:prstGeom>
-          <a:solidFill>
-            <a:srgbClr val="7A3B2E"/>
-          </a:solidFill>
-          <a:ln/>
-        </p:spPr>
-      </p:sp>
-      <p:sp>
-        <p:nvSpPr>
-          <p:cNvPr id="5" name="Text 3"/>
-          <p:cNvSpPr/>
-          <p:nvPr/>
-        </p:nvSpPr>
-        <p:spPr>
-          <a:xfrm>
-            <a:off x="640080" y="2057400"/>
-            <a:ext cx="457200" cy="457200"/>
-          </a:xfrm>
-          <a:prstGeom prst="rect">
-            <a:avLst/>
-          </a:prstGeom>
-          <a:noFill/>
-          <a:ln/>
-        </p:spPr>
-        <p:txBody>
-          <a:bodyPr wrap="square" rtlCol="0" anchor="ctr"/>
-          <a:lstStyle/>
-          <a:p>
-            <a:pPr algn="ctr" indent="0" marL="0">
-              <a:buNone/>
-            </a:pPr>
-            <a:r>
-              <a:rPr lang="en-US" sz="2000" b="1" dirty="0">
-                <a:solidFill>
-                  <a:srgbClr val="FFFFFF"/>
-                </a:solidFill>
-                <a:latin typeface="Cambria" pitchFamily="34" charset="0"/>
-                <a:ea typeface="Cambria" pitchFamily="34" charset="-122"/>
-                <a:cs typeface="Cambria" pitchFamily="34" charset="-120"/>
-              </a:rPr>
-              <a:t>1</a:t>
-            </a:r>
-            <a:endParaRPr lang="en-US" sz="2000" dirty="0"/>
-          </a:p>
-        </p:txBody>
-      </p:sp>
-      <p:sp>
-        <p:nvSpPr>
-          <p:cNvPr id="6" name="Text 4"/>
-          <p:cNvSpPr/>
-          <p:nvPr/>
-        </p:nvSpPr>
-        <p:spPr>
-          <a:xfrm>
-            <a:off x="1371600" y="2020824"/>
-            <a:ext cx="10332720" cy="411480"/>
-          </a:xfrm>
-          <a:prstGeom prst="rect">
-            <a:avLst/>
-          </a:prstGeom>
-          <a:noFill/>
-          <a:ln/>
-        </p:spPr>
-        <p:txBody>
-          <a:bodyPr wrap="square" rtlCol="0" anchor="ctr"/>
-          <a:lstStyle/>
-          <a:p>
-            <a:pPr indent="0" marL="0">
-              <a:buNone/>
-            </a:pPr>
-            <a:r>
-              <a:rPr lang="en-US" sz="1900" b="1" dirty="0">
-                <a:solidFill>
-                  <a:srgbClr val="7A3B2E"/>
-                </a:solidFill>
-                <a:latin typeface="Cambria" pitchFamily="34" charset="0"/>
-                <a:ea typeface="Cambria" pitchFamily="34" charset="-122"/>
-                <a:cs typeface="Cambria" pitchFamily="34" charset="-120"/>
-              </a:rPr>
-              <a:t>Interrogate your own chart</a:t>
-            </a:r>
-            <a:endParaRPr lang="en-US" sz="1900" dirty="0"/>
-          </a:p>
-        </p:txBody>
-      </p:sp>
-      <p:sp>
-        <p:nvSpPr>
-          <p:cNvPr id="7" name="Text 5"/>
-          <p:cNvSpPr/>
-          <p:nvPr/>
-        </p:nvSpPr>
-        <p:spPr>
-          <a:xfrm>
-            <a:off x="1371600" y="2441448"/>
-            <a:ext cx="10332720" cy="914400"/>
-          </a:xfrm>
-          <a:prstGeom prst="rect">
-            <a:avLst/>
-          </a:prstGeom>
-          <a:noFill/>
-          <a:ln/>
-        </p:spPr>
-        <p:txBody>
-          <a:bodyPr wrap="square" rtlCol="0" anchor="t">
-            <a:spAutoFit/>
-          </a:bodyPr>
-          <a:lstStyle/>
-          <a:p>
-            <a:pPr indent="0" marL="0">
-              <a:lnSpc>
-                <a:spcPct val="112000"/>
-              </a:lnSpc>
-              <a:buNone/>
-            </a:pPr>
-            <a:r>
-              <a:rPr lang="en-US" sz="1450" dirty="0">
-                <a:solidFill>
-                  <a:srgbClr val="1A1A1A"/>
-                </a:solidFill>
-                <a:latin typeface="Calibri" pitchFamily="34" charset="0"/>
-                <a:ea typeface="Calibri" pitchFamily="34" charset="-122"/>
-                <a:cs typeface="Calibri" pitchFamily="34" charset="-120"/>
-              </a:rPr>
-              <a:t>Ten weeks on other people's charts; now the ten minutes on yours.</a:t>
-            </a:r>
-            <a:endParaRPr lang="en-US" sz="1450" dirty="0"/>
-          </a:p>
-        </p:txBody>
-      </p:sp>
-      <p:sp>
-        <p:nvSpPr>
-          <p:cNvPr id="8" name="Shape 6"/>
-          <p:cNvSpPr/>
-          <p:nvPr/>
-        </p:nvSpPr>
-        <p:spPr>
-          <a:xfrm>
-            <a:off x="640080" y="3520440"/>
-            <a:ext cx="457200" cy="457200"/>
-          </a:xfrm>
-          <a:prstGeom prst="roundRect">
-            <a:avLst>
-              <a:gd name="adj" fmla="val 16000"/>
-            </a:avLst>
-          </a:prstGeom>
-          <a:solidFill>
-            <a:srgbClr val="3F6F5F"/>
-          </a:solidFill>
-          <a:ln/>
-        </p:spPr>
-      </p:sp>
-      <p:sp>
-        <p:nvSpPr>
-          <p:cNvPr id="9" name="Text 7"/>
-          <p:cNvSpPr/>
-          <p:nvPr/>
-        </p:nvSpPr>
-        <p:spPr>
-          <a:xfrm>
-            <a:off x="640080" y="3520440"/>
-            <a:ext cx="457200" cy="457200"/>
-          </a:xfrm>
-          <a:prstGeom prst="rect">
-            <a:avLst/>
-          </a:prstGeom>
-          <a:noFill/>
-          <a:ln/>
-        </p:spPr>
-        <p:txBody>
-          <a:bodyPr wrap="square" rtlCol="0" anchor="ctr"/>
-          <a:lstStyle/>
-          <a:p>
-            <a:pPr algn="ctr" indent="0" marL="0">
-              <a:buNone/>
-            </a:pPr>
-            <a:r>
-              <a:rPr lang="en-US" sz="2000" b="1" dirty="0">
-                <a:solidFill>
-                  <a:srgbClr val="FFFFFF"/>
-                </a:solidFill>
-                <a:latin typeface="Cambria" pitchFamily="34" charset="0"/>
-                <a:ea typeface="Cambria" pitchFamily="34" charset="-122"/>
-                <a:cs typeface="Cambria" pitchFamily="34" charset="-120"/>
-              </a:rPr>
-              <a:t>2</a:t>
-            </a:r>
-            <a:endParaRPr lang="en-US" sz="2000" dirty="0"/>
-          </a:p>
-        </p:txBody>
-      </p:sp>
-      <p:sp>
-        <p:nvSpPr>
-          <p:cNvPr id="10" name="Text 8"/>
-          <p:cNvSpPr/>
-          <p:nvPr/>
-        </p:nvSpPr>
-        <p:spPr>
-          <a:xfrm>
-            <a:off x="1371600" y="3483864"/>
-            <a:ext cx="10332720" cy="411480"/>
-          </a:xfrm>
-          <a:prstGeom prst="rect">
-            <a:avLst/>
-          </a:prstGeom>
-          <a:noFill/>
-          <a:ln/>
-        </p:spPr>
-        <p:txBody>
-          <a:bodyPr wrap="square" rtlCol="0" anchor="ctr"/>
-          <a:lstStyle/>
-          <a:p>
-            <a:pPr indent="0" marL="0">
-              <a:buNone/>
-            </a:pPr>
-            <a:r>
-              <a:rPr lang="en-US" sz="1900" b="1" dirty="0">
-                <a:solidFill>
-                  <a:srgbClr val="3F6F5F"/>
-                </a:solidFill>
-                <a:latin typeface="Cambria" pitchFamily="34" charset="0"/>
-                <a:ea typeface="Cambria" pitchFamily="34" charset="-122"/>
-                <a:cs typeface="Cambria" pitchFamily="34" charset="-120"/>
-              </a:rPr>
-              <a:t>No single right way</a:t>
-            </a:r>
-            <a:endParaRPr lang="en-US" sz="1900" dirty="0"/>
-          </a:p>
-        </p:txBody>
-      </p:sp>
-      <p:sp>
-        <p:nvSpPr>
-          <p:cNvPr id="11" name="Text 9"/>
-          <p:cNvSpPr/>
-          <p:nvPr/>
-        </p:nvSpPr>
-        <p:spPr>
-          <a:xfrm>
-            <a:off x="1371600" y="3904488"/>
-            <a:ext cx="10332720" cy="914400"/>
-          </a:xfrm>
-          <a:prstGeom prst="rect">
-            <a:avLst/>
-          </a:prstGeom>
-          <a:noFill/>
-          <a:ln/>
-        </p:spPr>
-        <p:txBody>
-          <a:bodyPr wrap="square" rtlCol="0" anchor="t">
-            <a:spAutoFit/>
-          </a:bodyPr>
-          <a:lstStyle/>
-          <a:p>
-            <a:pPr indent="0" marL="0">
-              <a:lnSpc>
-                <a:spcPct val="112000"/>
-              </a:lnSpc>
-              <a:buNone/>
-            </a:pPr>
-            <a:r>
-              <a:rPr lang="en-US" sz="1450" dirty="0">
-                <a:solidFill>
-                  <a:srgbClr val="1A1A1A"/>
-                </a:solidFill>
-                <a:latin typeface="Calibri" pitchFamily="34" charset="0"/>
-                <a:ea typeface="Calibri" pitchFamily="34" charset="-122"/>
-                <a:cs typeface="Calibri" pitchFamily="34" charset="-120"/>
-              </a:rPr>
-              <a:t>Three published essays, three defensible sets of choices.</a:t>
-            </a:r>
-            <a:endParaRPr lang="en-US" sz="1450" dirty="0"/>
-          </a:p>
-        </p:txBody>
-      </p:sp>
-      <p:sp>
-        <p:nvSpPr>
-          <p:cNvPr id="12" name="Shape 10"/>
-          <p:cNvSpPr/>
-          <p:nvPr/>
-        </p:nvSpPr>
-        <p:spPr>
-          <a:xfrm>
-            <a:off x="640080" y="4983480"/>
-            <a:ext cx="457200" cy="457200"/>
-          </a:xfrm>
-          <a:prstGeom prst="roundRect">
-            <a:avLst>
-              <a:gd name="adj" fmla="val 16000"/>
-            </a:avLst>
-          </a:prstGeom>
-          <a:solidFill>
-            <a:srgbClr val="B9852F"/>
-          </a:solidFill>
-          <a:ln/>
-        </p:spPr>
-      </p:sp>
-      <p:sp>
-        <p:nvSpPr>
-          <p:cNvPr id="13" name="Text 11"/>
-          <p:cNvSpPr/>
-          <p:nvPr/>
-        </p:nvSpPr>
-        <p:spPr>
-          <a:xfrm>
-            <a:off x="640080" y="4983480"/>
-            <a:ext cx="457200" cy="457200"/>
-          </a:xfrm>
-          <a:prstGeom prst="rect">
-            <a:avLst/>
-          </a:prstGeom>
-          <a:noFill/>
-          <a:ln/>
-        </p:spPr>
-        <p:txBody>
-          <a:bodyPr wrap="square" rtlCol="0" anchor="ctr"/>
-          <a:lstStyle/>
-          <a:p>
-            <a:pPr algn="ctr" indent="0" marL="0">
-              <a:buNone/>
-            </a:pPr>
-            <a:r>
-              <a:rPr lang="en-US" sz="2000" b="1" dirty="0">
-                <a:solidFill>
-                  <a:srgbClr val="FFFFFF"/>
-                </a:solidFill>
-                <a:latin typeface="Cambria" pitchFamily="34" charset="0"/>
-                <a:ea typeface="Cambria" pitchFamily="34" charset="-122"/>
-                <a:cs typeface="Cambria" pitchFamily="34" charset="-120"/>
-              </a:rPr>
-              <a:t>3</a:t>
-            </a:r>
-            <a:endParaRPr lang="en-US" sz="2000" dirty="0"/>
-          </a:p>
-        </p:txBody>
-      </p:sp>
-      <p:sp>
-        <p:nvSpPr>
-          <p:cNvPr id="14" name="Text 12"/>
-          <p:cNvSpPr/>
-          <p:nvPr/>
-        </p:nvSpPr>
-        <p:spPr>
-          <a:xfrm>
-            <a:off x="1371600" y="4946904"/>
-            <a:ext cx="10332720" cy="411480"/>
-          </a:xfrm>
-          <a:prstGeom prst="rect">
-            <a:avLst/>
-          </a:prstGeom>
-          <a:noFill/>
-          <a:ln/>
-        </p:spPr>
-        <p:txBody>
-          <a:bodyPr wrap="square" rtlCol="0" anchor="ctr"/>
-          <a:lstStyle/>
-          <a:p>
-            <a:pPr indent="0" marL="0">
-              <a:buNone/>
-            </a:pPr>
-            <a:r>
-              <a:rPr lang="en-US" sz="1900" b="1" dirty="0">
-                <a:solidFill>
-                  <a:srgbClr val="B9852F"/>
-                </a:solidFill>
-                <a:latin typeface="Cambria" pitchFamily="34" charset="0"/>
-                <a:ea typeface="Cambria" pitchFamily="34" charset="-122"/>
-                <a:cs typeface="Cambria" pitchFamily="34" charset="-120"/>
-              </a:rPr>
-              <a:t>Make something real</a:t>
-            </a:r>
-            <a:endParaRPr lang="en-US" sz="1900" dirty="0"/>
-          </a:p>
-        </p:txBody>
-      </p:sp>
-      <p:sp>
-        <p:nvSpPr>
-          <p:cNvPr id="15" name="Text 13"/>
-          <p:cNvSpPr/>
-          <p:nvPr/>
-        </p:nvSpPr>
-        <p:spPr>
-          <a:xfrm>
-            <a:off x="1371600" y="5367528"/>
-            <a:ext cx="10332720" cy="914400"/>
-          </a:xfrm>
-          <a:prstGeom prst="rect">
-            <a:avLst/>
-          </a:prstGeom>
-          <a:noFill/>
-          <a:ln/>
-        </p:spPr>
-        <p:txBody>
-          <a:bodyPr wrap="square" rtlCol="0" anchor="t">
-            <a:spAutoFit/>
-          </a:bodyPr>
-          <a:lstStyle/>
-          <a:p>
-            <a:pPr indent="0" marL="0">
-              <a:lnSpc>
-                <a:spcPct val="112000"/>
-              </a:lnSpc>
-              <a:buNone/>
-            </a:pPr>
-            <a:r>
-              <a:rPr lang="en-US" sz="1450" dirty="0">
-                <a:solidFill>
-                  <a:srgbClr val="1A1A1A"/>
-                </a:solidFill>
-                <a:latin typeface="Calibri" pitchFamily="34" charset="0"/>
-                <a:ea typeface="Calibri" pitchFamily="34" charset="-122"/>
-                <a:cs typeface="Calibri" pitchFamily="34" charset="-120"/>
-              </a:rPr>
-              <a:t>You leave with a deployed URL.</a:t>
-            </a:r>
-            <a:endParaRPr lang="en-US" sz="1450" dirty="0"/>
-          </a:p>
-        </p:txBody>
-      </p:sp>
-    </p:spTree>
-  </p:cSld>
-  <p:clrMapOvr>
-    <a:masterClrMapping/>
-  </p:clrMapOvr>
-</p:sld>
-</file>
-
-<file path=ppt/slides/slide11.xml><?xml version="1.0" encoding="utf-8"?>
-<p:sld xmlns:a="http://schemas.openxmlformats.org/drawingml/2006/main" xmlns:r="http://schemas.openxmlformats.org/officeDocument/2006/relationships" xmlns:p="http://schemas.openxmlformats.org/presentationml/2006/main">
-  <p:cSld name="Slide 11">
-    <p:bg>
-      <p:bgPr>
-        <a:solidFill>
           <a:srgbClr val="4E261D"/>
         </a:solidFill>
       </p:bgPr>
@@ -3796,7 +3165,7 @@
                 <a:ea typeface="Cambria" pitchFamily="34" charset="-122"/>
                 <a:cs typeface="Cambria" pitchFamily="34" charset="-120"/>
               </a:rPr>
-              <a:t>Interrogate your own chart</a:t>
+              <a:t>No single right way</a:t>
             </a:r>
             <a:endParaRPr lang="en-US" sz="3000" dirty="0"/>
           </a:p>
@@ -3831,7 +3200,7 @@
         <p:spPr>
           <a:xfrm>
             <a:off x="1097280" y="2240280"/>
-            <a:ext cx="10607040" cy="1017270"/>
+            <a:ext cx="10607040" cy="1051560"/>
           </a:xfrm>
           <a:prstGeom prst="rect">
             <a:avLst/>
@@ -3860,7 +3229,7 @@
                 <a:ea typeface="Calibri" pitchFamily="34" charset="-122"/>
                 <a:cs typeface="Calibri" pitchFamily="34" charset="-120"/>
               </a:rPr>
-              <a:t>Does the y-axis start at zero, or is the plotting default manufacturing your trend?</a:t>
+              <a:t>Three published essays, same goal, three defensible sets of choices: a Pudding piece, an Observable notebook, a Quarto site.</a:t>
             </a:r>
             <a:endParaRPr lang="en-US" sz="1650" dirty="0"/>
           </a:p>
@@ -3874,7 +3243,7 @@
         </p:nvSpPr>
         <p:spPr>
           <a:xfrm>
-            <a:off x="640080" y="3348990"/>
+            <a:off x="640080" y="3383280"/>
             <a:ext cx="201168" cy="201168"/>
           </a:xfrm>
           <a:prstGeom prst="ellipse">
@@ -3894,8 +3263,8 @@
         </p:nvSpPr>
         <p:spPr>
           <a:xfrm>
-            <a:off x="1097280" y="3257550"/>
-            <a:ext cx="10607040" cy="1017270"/>
+            <a:off x="1097280" y="3291840"/>
+            <a:ext cx="10607040" cy="1051560"/>
           </a:xfrm>
           <a:prstGeom prst="rect">
             <a:avLst/>
@@ -3924,7 +3293,7 @@
                 <a:ea typeface="Calibri" pitchFamily="34" charset="-122"/>
                 <a:cs typeface="Calibri" pitchFamily="34" charset="-120"/>
               </a:rPr>
-              <a:t>Is the eye pulled toward a pattern the data won't support?</a:t>
+              <a:t>A structure that works: hook, corpus note, finding, how-it-could-be-wrong, appendix.</a:t>
             </a:r>
             <a:endParaRPr lang="en-US" sz="1650" dirty="0"/>
           </a:p>
@@ -3938,7 +3307,7 @@
         </p:nvSpPr>
         <p:spPr>
           <a:xfrm>
-            <a:off x="640080" y="4366260"/>
+            <a:off x="640080" y="4434840"/>
             <a:ext cx="201168" cy="201168"/>
           </a:xfrm>
           <a:prstGeom prst="ellipse">
@@ -3958,8 +3327,8 @@
         </p:nvSpPr>
         <p:spPr>
           <a:xfrm>
-            <a:off x="1097280" y="4274820"/>
-            <a:ext cx="10607040" cy="1017270"/>
+            <a:off x="1097280" y="4343400"/>
+            <a:ext cx="10607040" cy="1051560"/>
           </a:xfrm>
           <a:prstGeom prst="rect">
             <a:avLst/>
@@ -3988,71 +3357,7 @@
                 <a:ea typeface="Calibri" pitchFamily="34" charset="-122"/>
                 <a:cs typeface="Calibri" pitchFamily="34" charset="-120"/>
               </a:rPr>
-              <a:t>What does this chart hide that a different one would show?</a:t>
-            </a:r>
-            <a:endParaRPr lang="en-US" sz="1650" dirty="0"/>
-          </a:p>
-        </p:txBody>
-      </p:sp>
-      <p:sp>
-        <p:nvSpPr>
-          <p:cNvPr id="11" name="Shape 9"/>
-          <p:cNvSpPr/>
-          <p:nvPr/>
-        </p:nvSpPr>
-        <p:spPr>
-          <a:xfrm>
-            <a:off x="640080" y="5383530"/>
-            <a:ext cx="201168" cy="201168"/>
-          </a:xfrm>
-          <a:prstGeom prst="ellipse">
-            <a:avLst/>
-          </a:prstGeom>
-          <a:solidFill>
-            <a:srgbClr val="7A3B2E"/>
-          </a:solidFill>
-          <a:ln/>
-        </p:spPr>
-      </p:sp>
-      <p:sp>
-        <p:nvSpPr>
-          <p:cNvPr id="12" name="Text 10"/>
-          <p:cNvSpPr/>
-          <p:nvPr/>
-        </p:nvSpPr>
-        <p:spPr>
-          <a:xfrm>
-            <a:off x="1097280" y="5292090"/>
-            <a:ext cx="10607040" cy="1017270"/>
-          </a:xfrm>
-          <a:prstGeom prst="rect">
-            <a:avLst/>
-          </a:prstGeom>
-          <a:noFill/>
-          <a:ln/>
-        </p:spPr>
-        <p:txBody>
-          <a:bodyPr wrap="square" rtlCol="0" anchor="t">
-            <a:spAutoFit/>
-          </a:bodyPr>
-          <a:lstStyle/>
-          <a:p>
-            <a:pPr indent="0" marL="0">
-              <a:lnSpc>
-                <a:spcPct val="112000"/>
-              </a:lnSpc>
-              <a:buNone/>
-            </a:pPr>
-            <a:r>
-              <a:rPr lang="en-US" sz="1650" dirty="0">
-                <a:solidFill>
-                  <a:srgbClr val="1A1A1A"/>
-                </a:solidFill>
-                <a:latin typeface="Calibri" pitchFamily="34" charset="0"/>
-                <a:ea typeface="Calibri" pitchFamily="34" charset="-122"/>
-                <a:cs typeface="Calibri" pitchFamily="34" charset="-120"/>
-              </a:rPr>
-              <a:t>Ten weeks interrogating other people's charts. These ten minutes are for yours. Fix one thing.</a:t>
+              <a:t>Write the headline finding in one sentence before you write anything else. If you can't, the essay isn't ready.</a:t>
             </a:r>
             <a:endParaRPr lang="en-US" sz="1650" dirty="0"/>
           </a:p>
@@ -4184,7 +3489,7 @@
                 <a:ea typeface="Cambria" pitchFamily="34" charset="-122"/>
                 <a:cs typeface="Cambria" pitchFamily="34" charset="-120"/>
               </a:rPr>
-              <a:t>No single right way</a:t>
+              <a:t>Publish</a:t>
             </a:r>
             <a:endParaRPr lang="en-US" sz="3000" dirty="0"/>
           </a:p>
@@ -4248,7 +3553,7 @@
                 <a:ea typeface="Calibri" pitchFamily="34" charset="-122"/>
                 <a:cs typeface="Calibri" pitchFamily="34" charset="-120"/>
               </a:rPr>
-              <a:t>Three published essays, same goal, three defensible sets of choices: a Pudding piece, an Observable notebook, a Quarto site.</a:t>
+              <a:t>Mullen's test, the course standard: "I must be able to run it." The notebook works for someone who is not you.</a:t>
             </a:r>
             <a:endParaRPr lang="en-US" sz="1650" dirty="0"/>
           </a:p>
@@ -4312,7 +3617,7 @@
                 <a:ea typeface="Calibri" pitchFamily="34" charset="-122"/>
                 <a:cs typeface="Calibri" pitchFamily="34" charset="-120"/>
               </a:rPr>
-              <a:t>A structure that works: hook, corpus note, finding, how-it-could-be-wrong, appendix.</a:t>
+              <a:t>Every student leaves this session with a deployed URL.</a:t>
             </a:r>
             <a:endParaRPr lang="en-US" sz="1650" dirty="0"/>
           </a:p>
@@ -4376,7 +3681,7 @@
                 <a:ea typeface="Calibri" pitchFamily="34" charset="-122"/>
                 <a:cs typeface="Calibri" pitchFamily="34" charset="-120"/>
               </a:rPr>
-              <a:t>Write the headline finding in one sentence before you write anything else. If you can't, the essay isn't ready.</a:t>
+              <a:t>The essay shows the thinking. The notebook proves it happened.</a:t>
             </a:r>
             <a:endParaRPr lang="en-US" sz="1650" dirty="0"/>
           </a:p>
@@ -4416,23 +3721,42 @@
       </p:grpSpPr>
       <p:sp>
         <p:nvSpPr>
-          <p:cNvPr id="2" name="Shape 0"/>
-          <p:cNvSpPr/>
-          <p:nvPr/>
-        </p:nvSpPr>
-        <p:spPr>
-          <a:xfrm>
-            <a:off x="0" y="0"/>
-            <a:ext cx="164592" cy="6858000"/>
-          </a:xfrm>
-          <a:prstGeom prst="rect">
-            <a:avLst/>
-          </a:prstGeom>
-          <a:solidFill>
-            <a:srgbClr val="B9852F"/>
-          </a:solidFill>
-          <a:ln/>
-        </p:spPr>
+          <p:cNvPr id="2" name="Text 0"/>
+          <p:cNvSpPr/>
+          <p:nvPr/>
+        </p:nvSpPr>
+        <p:spPr>
+          <a:xfrm>
+            <a:off x="640080" y="731520"/>
+            <a:ext cx="10058400" cy="731520"/>
+          </a:xfrm>
+          <a:prstGeom prst="rect">
+            <a:avLst/>
+          </a:prstGeom>
+          <a:noFill/>
+          <a:ln/>
+        </p:spPr>
+        <p:txBody>
+          <a:bodyPr wrap="square" rtlCol="0" anchor="ctr"/>
+          <a:lstStyle/>
+          <a:p>
+            <a:pPr indent="0" marL="0">
+              <a:buNone/>
+            </a:pPr>
+            <a:r>
+              <a:rPr lang="en-US" sz="3000" b="1" dirty="0">
+                <a:solidFill>
+                  <a:srgbClr val="1A1A1A"/>
+                </a:solidFill>
+                <a:latin typeface="Cambria" pitchFamily="34" charset="0"/>
+                <a:ea typeface="Cambria" pitchFamily="34" charset="-122"/>
+                <a:cs typeface="Cambria" pitchFamily="34" charset="-120"/>
+              </a:rPr>
+              <a:t>Three modes today</a:t>
+            </a:r>
+            <a:endParaRPr lang="en-US" sz="3000" dirty="0"/>
+          </a:p>
+        </p:txBody>
       </p:sp>
       <p:sp>
         <p:nvSpPr>
@@ -4442,8 +3766,8 @@
         </p:nvSpPr>
         <p:spPr>
           <a:xfrm>
-            <a:off x="640080" y="640080"/>
-            <a:ext cx="10058400" cy="320040"/>
+            <a:off x="640080" y="1417320"/>
+            <a:ext cx="10058400" cy="365760"/>
           </a:xfrm>
           <a:prstGeom prst="rect">
             <a:avLst/>
@@ -4459,30 +3783,111 @@
               <a:buNone/>
             </a:pPr>
             <a:r>
-              <a:rPr lang="en-US" sz="1200" b="1" spc="300" kern="0" dirty="0">
-                <a:solidFill>
-                  <a:srgbClr val="B9852F"/>
+              <a:rPr lang="en-US" sz="1400" i="1" dirty="0">
+                <a:solidFill>
+                  <a:srgbClr val="6B6B63"/>
                 </a:solidFill>
                 <a:latin typeface="Calibri" pitchFamily="34" charset="0"/>
                 <a:ea typeface="Calibri" pitchFamily="34" charset="-122"/>
                 <a:cs typeface="Calibri" pitchFamily="34" charset="-120"/>
               </a:rPr>
-              <a:t>WEEK 9 · KEY POINTS</a:t>
-            </a:r>
-            <a:endParaRPr lang="en-US" sz="1200" dirty="0"/>
-          </a:p>
-        </p:txBody>
-      </p:sp>
-      <p:sp>
-        <p:nvSpPr>
-          <p:cNvPr id="4" name="Text 2"/>
-          <p:cNvSpPr/>
-          <p:nvPr/>
-        </p:nvSpPr>
-        <p:spPr>
-          <a:xfrm>
-            <a:off x="640080" y="1005840"/>
-            <a:ext cx="10881360" cy="914400"/>
+              <a:t>about a third of the session each</a:t>
+            </a:r>
+            <a:endParaRPr lang="en-US" sz="1400" dirty="0"/>
+          </a:p>
+        </p:txBody>
+      </p:sp>
+      <p:sp>
+        <p:nvSpPr>
+          <p:cNvPr id="4" name="Shape 2"/>
+          <p:cNvSpPr/>
+          <p:nvPr/>
+        </p:nvSpPr>
+        <p:spPr>
+          <a:xfrm>
+            <a:off x="640080" y="2194560"/>
+            <a:ext cx="3383280" cy="3291840"/>
+          </a:xfrm>
+          <a:prstGeom prst="roundRect">
+            <a:avLst>
+              <a:gd name="adj" fmla="val 3333"/>
+            </a:avLst>
+          </a:prstGeom>
+          <a:solidFill>
+            <a:srgbClr val="F4EEE8"/>
+          </a:solidFill>
+          <a:ln/>
+        </p:spPr>
+      </p:sp>
+      <p:sp>
+        <p:nvSpPr>
+          <p:cNvPr id="5" name="Shape 3"/>
+          <p:cNvSpPr/>
+          <p:nvPr/>
+        </p:nvSpPr>
+        <p:spPr>
+          <a:xfrm>
+            <a:off x="1051560" y="2606040"/>
+            <a:ext cx="548640" cy="548640"/>
+          </a:xfrm>
+          <a:prstGeom prst="ellipse">
+            <a:avLst/>
+          </a:prstGeom>
+          <a:solidFill>
+            <a:srgbClr val="7A3B2E"/>
+          </a:solidFill>
+          <a:ln/>
+        </p:spPr>
+      </p:sp>
+      <p:sp>
+        <p:nvSpPr>
+          <p:cNvPr id="6" name="Text 4"/>
+          <p:cNvSpPr/>
+          <p:nvPr/>
+        </p:nvSpPr>
+        <p:spPr>
+          <a:xfrm>
+            <a:off x="1005840" y="3383280"/>
+            <a:ext cx="2651760" cy="548640"/>
+          </a:xfrm>
+          <a:prstGeom prst="rect">
+            <a:avLst/>
+          </a:prstGeom>
+          <a:noFill/>
+          <a:ln/>
+        </p:spPr>
+        <p:txBody>
+          <a:bodyPr wrap="square" rtlCol="0" anchor="ctr"/>
+          <a:lstStyle/>
+          <a:p>
+            <a:pPr indent="0" marL="0">
+              <a:buNone/>
+            </a:pPr>
+            <a:r>
+              <a:rPr lang="en-US" sz="2100" b="1" dirty="0">
+                <a:solidFill>
+                  <a:srgbClr val="1A1A1A"/>
+                </a:solidFill>
+                <a:latin typeface="Cambria" pitchFamily="34" charset="0"/>
+                <a:ea typeface="Cambria" pitchFamily="34" charset="-122"/>
+                <a:cs typeface="Cambria" pitchFamily="34" charset="-120"/>
+              </a:rPr>
+              <a:t>Lecture / demo</a:t>
+            </a:r>
+            <a:endParaRPr lang="en-US" sz="2100" dirty="0"/>
+          </a:p>
+        </p:txBody>
+      </p:sp>
+      <p:sp>
+        <p:nvSpPr>
+          <p:cNvPr id="7" name="Text 5"/>
+          <p:cNvSpPr/>
+          <p:nvPr/>
+        </p:nvSpPr>
+        <p:spPr>
+          <a:xfrm>
+            <a:off x="1005840" y="3977640"/>
+            <a:ext cx="2651760" cy="1371600"/>
           </a:xfrm>
           <a:prstGeom prst="rect">
             <a:avLst/>
@@ -4497,10 +3902,94 @@
           <a:lstStyle/>
           <a:p>
             <a:pPr indent="0" marL="0">
-              <a:buNone/>
-            </a:pPr>
-            <a:r>
-              <a:rPr lang="en-US" sz="3000" b="1" dirty="0">
+              <a:lnSpc>
+                <a:spcPct val="115000"/>
+              </a:lnSpc>
+              <a:buNone/>
+            </a:pPr>
+            <a:r>
+              <a:rPr lang="en-US" sz="1500" dirty="0">
+                <a:solidFill>
+                  <a:srgbClr val="1A1A1A"/>
+                </a:solidFill>
+                <a:latin typeface="Calibri" pitchFamily="34" charset="0"/>
+                <a:ea typeface="Calibri" pitchFamily="34" charset="-122"/>
+                <a:cs typeface="Calibri" pitchFamily="34" charset="-120"/>
+              </a:rPr>
+              <a:t>Publishing, Quarto to GitHub Pages, static by default</a:t>
+            </a:r>
+            <a:endParaRPr lang="en-US" sz="1500" dirty="0"/>
+          </a:p>
+        </p:txBody>
+      </p:sp>
+      <p:sp>
+        <p:nvSpPr>
+          <p:cNvPr id="8" name="Shape 6"/>
+          <p:cNvSpPr/>
+          <p:nvPr/>
+        </p:nvSpPr>
+        <p:spPr>
+          <a:xfrm>
+            <a:off x="4526280" y="2194560"/>
+            <a:ext cx="3383280" cy="3291840"/>
+          </a:xfrm>
+          <a:prstGeom prst="roundRect">
+            <a:avLst>
+              <a:gd name="adj" fmla="val 3333"/>
+            </a:avLst>
+          </a:prstGeom>
+          <a:solidFill>
+            <a:srgbClr val="F4EEE8"/>
+          </a:solidFill>
+          <a:ln/>
+        </p:spPr>
+      </p:sp>
+      <p:sp>
+        <p:nvSpPr>
+          <p:cNvPr id="9" name="Shape 7"/>
+          <p:cNvSpPr/>
+          <p:nvPr/>
+        </p:nvSpPr>
+        <p:spPr>
+          <a:xfrm>
+            <a:off x="4937760" y="2606040"/>
+            <a:ext cx="548640" cy="548640"/>
+          </a:xfrm>
+          <a:prstGeom prst="ellipse">
+            <a:avLst/>
+          </a:prstGeom>
+          <a:solidFill>
+            <a:srgbClr val="3F6F5F"/>
+          </a:solidFill>
+          <a:ln/>
+        </p:spPr>
+      </p:sp>
+      <p:sp>
+        <p:nvSpPr>
+          <p:cNvPr id="10" name="Text 8"/>
+          <p:cNvSpPr/>
+          <p:nvPr/>
+        </p:nvSpPr>
+        <p:spPr>
+          <a:xfrm>
+            <a:off x="4892040" y="3383280"/>
+            <a:ext cx="2651760" cy="548640"/>
+          </a:xfrm>
+          <a:prstGeom prst="rect">
+            <a:avLst/>
+          </a:prstGeom>
+          <a:noFill/>
+          <a:ln/>
+        </p:spPr>
+        <p:txBody>
+          <a:bodyPr wrap="square" rtlCol="0" anchor="ctr"/>
+          <a:lstStyle/>
+          <a:p>
+            <a:pPr indent="0" marL="0">
+              <a:buNone/>
+            </a:pPr>
+            <a:r>
+              <a:rPr lang="en-US" sz="2100" b="1" dirty="0">
                 <a:solidFill>
                   <a:srgbClr val="1A1A1A"/>
                 </a:solidFill>
@@ -4508,42 +3997,22 @@
                 <a:ea typeface="Cambria" pitchFamily="34" charset="-122"/>
                 <a:cs typeface="Cambria" pitchFamily="34" charset="-120"/>
               </a:rPr>
-              <a:t>Publish</a:t>
-            </a:r>
-            <a:endParaRPr lang="en-US" sz="3000" dirty="0"/>
-          </a:p>
-        </p:txBody>
-      </p:sp>
-      <p:sp>
-        <p:nvSpPr>
-          <p:cNvPr id="5" name="Shape 3"/>
-          <p:cNvSpPr/>
-          <p:nvPr/>
-        </p:nvSpPr>
-        <p:spPr>
-          <a:xfrm>
-            <a:off x="640080" y="2331720"/>
-            <a:ext cx="201168" cy="201168"/>
-          </a:xfrm>
-          <a:prstGeom prst="ellipse">
-            <a:avLst/>
-          </a:prstGeom>
-          <a:solidFill>
-            <a:srgbClr val="7A3B2E"/>
-          </a:solidFill>
-          <a:ln/>
-        </p:spPr>
-      </p:sp>
-      <p:sp>
-        <p:nvSpPr>
-          <p:cNvPr id="6" name="Text 4"/>
-          <p:cNvSpPr/>
-          <p:nvPr/>
-        </p:nvSpPr>
-        <p:spPr>
-          <a:xfrm>
-            <a:off x="1097280" y="2240280"/>
-            <a:ext cx="10607040" cy="1051560"/>
+              <a:t>Workshop</a:t>
+            </a:r>
+            <a:endParaRPr lang="en-US" sz="2100" dirty="0"/>
+          </a:p>
+        </p:txBody>
+      </p:sp>
+      <p:sp>
+        <p:nvSpPr>
+          <p:cNvPr id="11" name="Text 9"/>
+          <p:cNvSpPr/>
+          <p:nvPr/>
+        </p:nvSpPr>
+        <p:spPr>
+          <a:xfrm>
+            <a:off x="4892040" y="3977640"/>
+            <a:ext cx="2651760" cy="1371600"/>
           </a:xfrm>
           <a:prstGeom prst="rect">
             <a:avLst/>
@@ -4559,12 +4028,12 @@
           <a:p>
             <a:pPr indent="0" marL="0">
               <a:lnSpc>
-                <a:spcPct val="112000"/>
+                <a:spcPct val="115000"/>
               </a:lnSpc>
               <a:buNone/>
             </a:pPr>
             <a:r>
-              <a:rPr lang="en-US" sz="1650" dirty="0">
+              <a:rPr lang="en-US" sz="1500" dirty="0">
                 <a:solidFill>
                   <a:srgbClr val="1A1A1A"/>
                 </a:solidFill>
@@ -4572,42 +4041,103 @@
                 <a:ea typeface="Calibri" pitchFamily="34" charset="-122"/>
                 <a:cs typeface="Calibri" pitchFamily="34" charset="-120"/>
               </a:rPr>
-              <a:t>Mullen's test, the course standard: "I must be able to run it." The notebook works for someone who is not you.</a:t>
-            </a:r>
-            <a:endParaRPr lang="en-US" sz="1650" dirty="0"/>
-          </a:p>
-        </p:txBody>
-      </p:sp>
-      <p:sp>
-        <p:nvSpPr>
-          <p:cNvPr id="7" name="Shape 5"/>
-          <p:cNvSpPr/>
-          <p:nvPr/>
-        </p:nvSpPr>
-        <p:spPr>
-          <a:xfrm>
-            <a:off x="640080" y="3383280"/>
-            <a:ext cx="201168" cy="201168"/>
+              <a:t>Build hands-on on your own data.</a:t>
+            </a:r>
+            <a:endParaRPr lang="en-US" sz="1500" dirty="0"/>
+          </a:p>
+        </p:txBody>
+      </p:sp>
+      <p:sp>
+        <p:nvSpPr>
+          <p:cNvPr id="12" name="Shape 10"/>
+          <p:cNvSpPr/>
+          <p:nvPr/>
+        </p:nvSpPr>
+        <p:spPr>
+          <a:xfrm>
+            <a:off x="8412480" y="2194560"/>
+            <a:ext cx="3383280" cy="3291840"/>
+          </a:xfrm>
+          <a:prstGeom prst="roundRect">
+            <a:avLst>
+              <a:gd name="adj" fmla="val 3333"/>
+            </a:avLst>
+          </a:prstGeom>
+          <a:solidFill>
+            <a:srgbClr val="F4EEE8"/>
+          </a:solidFill>
+          <a:ln/>
+        </p:spPr>
+      </p:sp>
+      <p:sp>
+        <p:nvSpPr>
+          <p:cNvPr id="13" name="Shape 11"/>
+          <p:cNvSpPr/>
+          <p:nvPr/>
+        </p:nvSpPr>
+        <p:spPr>
+          <a:xfrm>
+            <a:off x="8823960" y="2606040"/>
+            <a:ext cx="548640" cy="548640"/>
           </a:xfrm>
           <a:prstGeom prst="ellipse">
             <a:avLst/>
           </a:prstGeom>
           <a:solidFill>
-            <a:srgbClr val="3F6F5F"/>
-          </a:solidFill>
-          <a:ln/>
-        </p:spPr>
-      </p:sp>
-      <p:sp>
-        <p:nvSpPr>
-          <p:cNvPr id="8" name="Text 6"/>
-          <p:cNvSpPr/>
-          <p:nvPr/>
-        </p:nvSpPr>
-        <p:spPr>
-          <a:xfrm>
-            <a:off x="1097280" y="3291840"/>
-            <a:ext cx="10607040" cy="1051560"/>
+            <a:srgbClr val="B9852F"/>
+          </a:solidFill>
+          <a:ln/>
+        </p:spPr>
+      </p:sp>
+      <p:sp>
+        <p:nvSpPr>
+          <p:cNvPr id="14" name="Text 12"/>
+          <p:cNvSpPr/>
+          <p:nvPr/>
+        </p:nvSpPr>
+        <p:spPr>
+          <a:xfrm>
+            <a:off x="8778240" y="3383280"/>
+            <a:ext cx="2651760" cy="548640"/>
+          </a:xfrm>
+          <a:prstGeom prst="rect">
+            <a:avLst/>
+          </a:prstGeom>
+          <a:noFill/>
+          <a:ln/>
+        </p:spPr>
+        <p:txBody>
+          <a:bodyPr wrap="square" rtlCol="0" anchor="ctr"/>
+          <a:lstStyle/>
+          <a:p>
+            <a:pPr indent="0" marL="0">
+              <a:buNone/>
+            </a:pPr>
+            <a:r>
+              <a:rPr lang="en-US" sz="2100" b="1" dirty="0">
+                <a:solidFill>
+                  <a:srgbClr val="1A1A1A"/>
+                </a:solidFill>
+                <a:latin typeface="Cambria" pitchFamily="34" charset="0"/>
+                <a:ea typeface="Cambria" pitchFamily="34" charset="-122"/>
+                <a:cs typeface="Cambria" pitchFamily="34" charset="-120"/>
+              </a:rPr>
+              <a:t>Discussion</a:t>
+            </a:r>
+            <a:endParaRPr lang="en-US" sz="2100" dirty="0"/>
+          </a:p>
+        </p:txBody>
+      </p:sp>
+      <p:sp>
+        <p:nvSpPr>
+          <p:cNvPr id="15" name="Text 13"/>
+          <p:cNvSpPr/>
+          <p:nvPr/>
+        </p:nvSpPr>
+        <p:spPr>
+          <a:xfrm>
+            <a:off x="8778240" y="3977640"/>
+            <a:ext cx="2651760" cy="1371600"/>
           </a:xfrm>
           <a:prstGeom prst="rect">
             <a:avLst/>
@@ -4623,12 +4153,12 @@
           <a:p>
             <a:pPr indent="0" marL="0">
               <a:lnSpc>
-                <a:spcPct val="112000"/>
+                <a:spcPct val="115000"/>
               </a:lnSpc>
               <a:buNone/>
             </a:pPr>
             <a:r>
-              <a:rPr lang="en-US" sz="1650" dirty="0">
+              <a:rPr lang="en-US" sz="1500" dirty="0">
                 <a:solidFill>
                   <a:srgbClr val="1A1A1A"/>
                 </a:solidFill>
@@ -4636,73 +4166,9 @@
                 <a:ea typeface="Calibri" pitchFamily="34" charset="-122"/>
                 <a:cs typeface="Calibri" pitchFamily="34" charset="-120"/>
               </a:rPr>
-              <a:t>Every student leaves this session with a deployed URL.</a:t>
-            </a:r>
-            <a:endParaRPr lang="en-US" sz="1650" dirty="0"/>
-          </a:p>
-        </p:txBody>
-      </p:sp>
-      <p:sp>
-        <p:nvSpPr>
-          <p:cNvPr id="9" name="Shape 7"/>
-          <p:cNvSpPr/>
-          <p:nvPr/>
-        </p:nvSpPr>
-        <p:spPr>
-          <a:xfrm>
-            <a:off x="640080" y="4434840"/>
-            <a:ext cx="201168" cy="201168"/>
-          </a:xfrm>
-          <a:prstGeom prst="ellipse">
-            <a:avLst/>
-          </a:prstGeom>
-          <a:solidFill>
-            <a:srgbClr val="B9852F"/>
-          </a:solidFill>
-          <a:ln/>
-        </p:spPr>
-      </p:sp>
-      <p:sp>
-        <p:nvSpPr>
-          <p:cNvPr id="10" name="Text 8"/>
-          <p:cNvSpPr/>
-          <p:nvPr/>
-        </p:nvSpPr>
-        <p:spPr>
-          <a:xfrm>
-            <a:off x="1097280" y="4343400"/>
-            <a:ext cx="10607040" cy="1051560"/>
-          </a:xfrm>
-          <a:prstGeom prst="rect">
-            <a:avLst/>
-          </a:prstGeom>
-          <a:noFill/>
-          <a:ln/>
-        </p:spPr>
-        <p:txBody>
-          <a:bodyPr wrap="square" rtlCol="0" anchor="t">
-            <a:spAutoFit/>
-          </a:bodyPr>
-          <a:lstStyle/>
-          <a:p>
-            <a:pPr indent="0" marL="0">
-              <a:lnSpc>
-                <a:spcPct val="112000"/>
-              </a:lnSpc>
-              <a:buNone/>
-            </a:pPr>
-            <a:r>
-              <a:rPr lang="en-US" sz="1650" dirty="0">
-                <a:solidFill>
-                  <a:srgbClr val="1A1A1A"/>
-                </a:solidFill>
-                <a:latin typeface="Calibri" pitchFamily="34" charset="0"/>
-                <a:ea typeface="Calibri" pitchFamily="34" charset="-122"/>
-                <a:cs typeface="Calibri" pitchFamily="34" charset="-120"/>
-              </a:rPr>
-              <a:t>The essay shows the thinking. The notebook proves it happened.</a:t>
-            </a:r>
-            <a:endParaRPr lang="en-US" sz="1650" dirty="0"/>
+              <a:t>Interrogate the study, debate it, or critique each other's work.</a:t>
+            </a:r>
+            <a:endParaRPr lang="en-US" sz="1500" dirty="0"/>
           </a:p>
         </p:txBody>
       </p:sp>
@@ -4746,7 +4212,7 @@
         </p:nvSpPr>
         <p:spPr>
           <a:xfrm>
-            <a:off x="640080" y="731520"/>
+            <a:off x="640080" y="640080"/>
             <a:ext cx="10058400" cy="731520"/>
           </a:xfrm>
           <a:prstGeom prst="rect">
@@ -4771,7 +4237,7 @@
                 <a:ea typeface="Cambria" pitchFamily="34" charset="-122"/>
                 <a:cs typeface="Cambria" pitchFamily="34" charset="-120"/>
               </a:rPr>
-              <a:t>Three modes today</a:t>
+              <a:t>The session</a:t>
             </a:r>
             <a:endParaRPr lang="en-US" sz="3000" dirty="0"/>
           </a:p>
@@ -4779,14 +4245,36 @@
       </p:sp>
       <p:sp>
         <p:nvSpPr>
-          <p:cNvPr id="3" name="Text 1"/>
-          <p:cNvSpPr/>
-          <p:nvPr/>
-        </p:nvSpPr>
-        <p:spPr>
-          <a:xfrm>
-            <a:off x="640080" y="1417320"/>
-            <a:ext cx="10058400" cy="365760"/>
+          <p:cNvPr id="3" name="Shape 1"/>
+          <p:cNvSpPr/>
+          <p:nvPr/>
+        </p:nvSpPr>
+        <p:spPr>
+          <a:xfrm>
+            <a:off x="640080" y="1572768"/>
+            <a:ext cx="868680" cy="457200"/>
+          </a:xfrm>
+          <a:prstGeom prst="roundRect">
+            <a:avLst>
+              <a:gd name="adj" fmla="val 12000"/>
+            </a:avLst>
+          </a:prstGeom>
+          <a:solidFill>
+            <a:srgbClr val="7A3B2E"/>
+          </a:solidFill>
+          <a:ln/>
+        </p:spPr>
+      </p:sp>
+      <p:sp>
+        <p:nvSpPr>
+          <p:cNvPr id="4" name="Text 2"/>
+          <p:cNvSpPr/>
+          <p:nvPr/>
+        </p:nvSpPr>
+        <p:spPr>
+          <a:xfrm>
+            <a:off x="640080" y="1572768"/>
+            <a:ext cx="868680" cy="457200"/>
           </a:xfrm>
           <a:prstGeom prst="rect">
             <a:avLst/>
@@ -4798,136 +4286,52 @@
           <a:bodyPr wrap="square" rtlCol="0" anchor="ctr"/>
           <a:lstStyle/>
           <a:p>
-            <a:pPr indent="0" marL="0">
-              <a:buNone/>
-            </a:pPr>
-            <a:r>
-              <a:rPr lang="en-US" sz="1400" i="1" dirty="0">
-                <a:solidFill>
-                  <a:srgbClr val="6B6B63"/>
+            <a:pPr algn="ctr" indent="0" marL="0">
+              <a:buNone/>
+            </a:pPr>
+            <a:r>
+              <a:rPr lang="en-US" sz="1100" b="1" dirty="0">
+                <a:solidFill>
+                  <a:srgbClr val="FFFFFF"/>
                 </a:solidFill>
                 <a:latin typeface="Calibri" pitchFamily="34" charset="0"/>
                 <a:ea typeface="Calibri" pitchFamily="34" charset="-122"/>
                 <a:cs typeface="Calibri" pitchFamily="34" charset="-120"/>
               </a:rPr>
-              <a:t>about a third of the session each</a:t>
-            </a:r>
-            <a:endParaRPr lang="en-US" sz="1400" dirty="0"/>
-          </a:p>
-        </p:txBody>
-      </p:sp>
-      <p:sp>
-        <p:nvSpPr>
-          <p:cNvPr id="4" name="Shape 2"/>
-          <p:cNvSpPr/>
-          <p:nvPr/>
-        </p:nvSpPr>
-        <p:spPr>
-          <a:xfrm>
-            <a:off x="640080" y="2194560"/>
-            <a:ext cx="3383280" cy="3291840"/>
-          </a:xfrm>
-          <a:prstGeom prst="roundRect">
-            <a:avLst>
-              <a:gd name="adj" fmla="val 3333"/>
-            </a:avLst>
-          </a:prstGeom>
-          <a:solidFill>
-            <a:srgbClr val="F4EEE8"/>
-          </a:solidFill>
-          <a:ln/>
-        </p:spPr>
-      </p:sp>
-      <p:sp>
-        <p:nvSpPr>
-          <p:cNvPr id="5" name="Shape 3"/>
-          <p:cNvSpPr/>
-          <p:nvPr/>
-        </p:nvSpPr>
-        <p:spPr>
-          <a:xfrm>
-            <a:off x="1051560" y="2606040"/>
-            <a:ext cx="548640" cy="548640"/>
-          </a:xfrm>
-          <a:prstGeom prst="ellipse">
-            <a:avLst/>
-          </a:prstGeom>
-          <a:solidFill>
-            <a:srgbClr val="7A3B2E"/>
-          </a:solidFill>
-          <a:ln/>
-        </p:spPr>
-      </p:sp>
-      <p:sp>
-        <p:nvSpPr>
-          <p:cNvPr id="6" name="Text 4"/>
-          <p:cNvSpPr/>
-          <p:nvPr/>
-        </p:nvSpPr>
-        <p:spPr>
-          <a:xfrm>
-            <a:off x="1005840" y="3383280"/>
-            <a:ext cx="2651760" cy="548640"/>
-          </a:xfrm>
-          <a:prstGeom prst="rect">
-            <a:avLst/>
-          </a:prstGeom>
-          <a:noFill/>
-          <a:ln/>
-        </p:spPr>
-        <p:txBody>
-          <a:bodyPr wrap="square" rtlCol="0" anchor="ctr"/>
-          <a:lstStyle/>
-          <a:p>
-            <a:pPr indent="0" marL="0">
-              <a:buNone/>
-            </a:pPr>
-            <a:r>
-              <a:rPr lang="en-US" sz="2100" b="1" dirty="0">
-                <a:solidFill>
-                  <a:srgbClr val="1A1A1A"/>
-                </a:solidFill>
-                <a:latin typeface="Cambria" pitchFamily="34" charset="0"/>
-                <a:ea typeface="Cambria" pitchFamily="34" charset="-122"/>
-                <a:cs typeface="Cambria" pitchFamily="34" charset="-120"/>
-              </a:rPr>
-              <a:t>Lecture / demo</a:t>
-            </a:r>
-            <a:endParaRPr lang="en-US" sz="2100" dirty="0"/>
-          </a:p>
-        </p:txBody>
-      </p:sp>
-      <p:sp>
-        <p:nvSpPr>
-          <p:cNvPr id="7" name="Text 5"/>
-          <p:cNvSpPr/>
-          <p:nvPr/>
-        </p:nvSpPr>
-        <p:spPr>
-          <a:xfrm>
-            <a:off x="1005840" y="3977640"/>
-            <a:ext cx="2651760" cy="1371600"/>
-          </a:xfrm>
-          <a:prstGeom prst="rect">
-            <a:avLst/>
-          </a:prstGeom>
-          <a:noFill/>
-          <a:ln/>
-        </p:spPr>
-        <p:txBody>
-          <a:bodyPr wrap="square" rtlCol="0" anchor="t">
+              <a:t>0:00</a:t>
+            </a:r>
+            <a:endParaRPr lang="en-US" sz="1100" dirty="0"/>
+          </a:p>
+        </p:txBody>
+      </p:sp>
+      <p:sp>
+        <p:nvSpPr>
+          <p:cNvPr id="5" name="Text 3"/>
+          <p:cNvSpPr/>
+          <p:nvPr/>
+        </p:nvSpPr>
+        <p:spPr>
+          <a:xfrm>
+            <a:off x="1691640" y="1554480"/>
+            <a:ext cx="9646920" cy="566928"/>
+          </a:xfrm>
+          <a:prstGeom prst="rect">
+            <a:avLst/>
+          </a:prstGeom>
+          <a:noFill/>
+          <a:ln/>
+        </p:spPr>
+        <p:txBody>
+          <a:bodyPr wrap="square" rtlCol="0" anchor="ctr">
             <a:spAutoFit/>
           </a:bodyPr>
           <a:lstStyle/>
           <a:p>
             <a:pPr indent="0" marL="0">
-              <a:lnSpc>
-                <a:spcPct val="115000"/>
-              </a:lnSpc>
-              <a:buNone/>
-            </a:pPr>
-            <a:r>
-              <a:rPr lang="en-US" sz="1500" dirty="0">
+              <a:buNone/>
+            </a:pPr>
+            <a:r>
+              <a:rPr lang="en-US" sz="1250" dirty="0">
                 <a:solidFill>
                   <a:srgbClr val="1A1A1A"/>
                 </a:solidFill>
@@ -4935,64 +4339,44 @@
                 <a:ea typeface="Calibri" pitchFamily="34" charset="-122"/>
                 <a:cs typeface="Calibri" pitchFamily="34" charset="-120"/>
               </a:rPr>
-              <a:t>Publishing, Quarto to GitHub Pages, static by default</a:t>
-            </a:r>
-            <a:endParaRPr lang="en-US" sz="1500" dirty="0"/>
-          </a:p>
-        </p:txBody>
-      </p:sp>
-      <p:sp>
-        <p:nvSpPr>
-          <p:cNvPr id="8" name="Shape 6"/>
-          <p:cNvSpPr/>
-          <p:nvPr/>
-        </p:nvSpPr>
-        <p:spPr>
-          <a:xfrm>
-            <a:off x="4526280" y="2194560"/>
-            <a:ext cx="3383280" cy="3291840"/>
+              <a:t>Look at This: the three essays, common structure, divergent choices.</a:t>
+            </a:r>
+            <a:endParaRPr lang="en-US" sz="1250" dirty="0"/>
+          </a:p>
+        </p:txBody>
+      </p:sp>
+      <p:sp>
+        <p:nvSpPr>
+          <p:cNvPr id="6" name="Shape 4"/>
+          <p:cNvSpPr/>
+          <p:nvPr/>
+        </p:nvSpPr>
+        <p:spPr>
+          <a:xfrm>
+            <a:off x="640080" y="2139696"/>
+            <a:ext cx="868680" cy="457200"/>
           </a:xfrm>
           <a:prstGeom prst="roundRect">
             <a:avLst>
-              <a:gd name="adj" fmla="val 3333"/>
+              <a:gd name="adj" fmla="val 12000"/>
             </a:avLst>
           </a:prstGeom>
           <a:solidFill>
-            <a:srgbClr val="F4EEE8"/>
-          </a:solidFill>
-          <a:ln/>
-        </p:spPr>
-      </p:sp>
-      <p:sp>
-        <p:nvSpPr>
-          <p:cNvPr id="9" name="Shape 7"/>
-          <p:cNvSpPr/>
-          <p:nvPr/>
-        </p:nvSpPr>
-        <p:spPr>
-          <a:xfrm>
-            <a:off x="4937760" y="2606040"/>
-            <a:ext cx="548640" cy="548640"/>
-          </a:xfrm>
-          <a:prstGeom prst="ellipse">
-            <a:avLst/>
-          </a:prstGeom>
-          <a:solidFill>
-            <a:srgbClr val="3F6F5F"/>
-          </a:solidFill>
-          <a:ln/>
-        </p:spPr>
-      </p:sp>
-      <p:sp>
-        <p:nvSpPr>
-          <p:cNvPr id="10" name="Text 8"/>
-          <p:cNvSpPr/>
-          <p:nvPr/>
-        </p:nvSpPr>
-        <p:spPr>
-          <a:xfrm>
-            <a:off x="4892040" y="3383280"/>
-            <a:ext cx="2651760" cy="548640"/>
+            <a:srgbClr val="7A3B2E"/>
+          </a:solidFill>
+          <a:ln/>
+        </p:spPr>
+      </p:sp>
+      <p:sp>
+        <p:nvSpPr>
+          <p:cNvPr id="7" name="Text 5"/>
+          <p:cNvSpPr/>
+          <p:nvPr/>
+        </p:nvSpPr>
+        <p:spPr>
+          <a:xfrm>
+            <a:off x="640080" y="2139696"/>
+            <a:ext cx="868680" cy="457200"/>
           </a:xfrm>
           <a:prstGeom prst="rect">
             <a:avLst/>
@@ -5004,180 +4388,52 @@
           <a:bodyPr wrap="square" rtlCol="0" anchor="ctr"/>
           <a:lstStyle/>
           <a:p>
-            <a:pPr indent="0" marL="0">
-              <a:buNone/>
-            </a:pPr>
-            <a:r>
-              <a:rPr lang="en-US" sz="2100" b="1" dirty="0">
-                <a:solidFill>
-                  <a:srgbClr val="1A1A1A"/>
-                </a:solidFill>
-                <a:latin typeface="Cambria" pitchFamily="34" charset="0"/>
-                <a:ea typeface="Cambria" pitchFamily="34" charset="-122"/>
-                <a:cs typeface="Cambria" pitchFamily="34" charset="-120"/>
-              </a:rPr>
-              <a:t>Workshop</a:t>
-            </a:r>
-            <a:endParaRPr lang="en-US" sz="2100" dirty="0"/>
-          </a:p>
-        </p:txBody>
-      </p:sp>
-      <p:sp>
-        <p:nvSpPr>
-          <p:cNvPr id="11" name="Text 9"/>
-          <p:cNvSpPr/>
-          <p:nvPr/>
-        </p:nvSpPr>
-        <p:spPr>
-          <a:xfrm>
-            <a:off x="4892040" y="3977640"/>
-            <a:ext cx="2651760" cy="1371600"/>
-          </a:xfrm>
-          <a:prstGeom prst="rect">
-            <a:avLst/>
-          </a:prstGeom>
-          <a:noFill/>
-          <a:ln/>
-        </p:spPr>
-        <p:txBody>
-          <a:bodyPr wrap="square" rtlCol="0" anchor="t">
-            <a:spAutoFit/>
-          </a:bodyPr>
-          <a:lstStyle/>
-          <a:p>
-            <a:pPr indent="0" marL="0">
-              <a:lnSpc>
-                <a:spcPct val="115000"/>
-              </a:lnSpc>
-              <a:buNone/>
-            </a:pPr>
-            <a:r>
-              <a:rPr lang="en-US" sz="1500" dirty="0">
-                <a:solidFill>
-                  <a:srgbClr val="1A1A1A"/>
+            <a:pPr algn="ctr" indent="0" marL="0">
+              <a:buNone/>
+            </a:pPr>
+            <a:r>
+              <a:rPr lang="en-US" sz="1100" b="1" dirty="0">
+                <a:solidFill>
+                  <a:srgbClr val="FFFFFF"/>
                 </a:solidFill>
                 <a:latin typeface="Calibri" pitchFamily="34" charset="0"/>
                 <a:ea typeface="Calibri" pitchFamily="34" charset="-122"/>
                 <a:cs typeface="Calibri" pitchFamily="34" charset="-120"/>
               </a:rPr>
-              <a:t>Build hands-on on your own data.</a:t>
-            </a:r>
-            <a:endParaRPr lang="en-US" sz="1500" dirty="0"/>
-          </a:p>
-        </p:txBody>
-      </p:sp>
-      <p:sp>
-        <p:nvSpPr>
-          <p:cNvPr id="12" name="Shape 10"/>
-          <p:cNvSpPr/>
-          <p:nvPr/>
-        </p:nvSpPr>
-        <p:spPr>
-          <a:xfrm>
-            <a:off x="8412480" y="2194560"/>
-            <a:ext cx="3383280" cy="3291840"/>
-          </a:xfrm>
-          <a:prstGeom prst="roundRect">
-            <a:avLst>
-              <a:gd name="adj" fmla="val 3333"/>
-            </a:avLst>
-          </a:prstGeom>
-          <a:solidFill>
-            <a:srgbClr val="F4EEE8"/>
-          </a:solidFill>
-          <a:ln/>
-        </p:spPr>
-      </p:sp>
-      <p:sp>
-        <p:nvSpPr>
-          <p:cNvPr id="13" name="Shape 11"/>
-          <p:cNvSpPr/>
-          <p:nvPr/>
-        </p:nvSpPr>
-        <p:spPr>
-          <a:xfrm>
-            <a:off x="8823960" y="2606040"/>
-            <a:ext cx="548640" cy="548640"/>
-          </a:xfrm>
-          <a:prstGeom prst="ellipse">
-            <a:avLst/>
-          </a:prstGeom>
-          <a:solidFill>
-            <a:srgbClr val="B9852F"/>
-          </a:solidFill>
-          <a:ln/>
-        </p:spPr>
-      </p:sp>
-      <p:sp>
-        <p:nvSpPr>
-          <p:cNvPr id="14" name="Text 12"/>
-          <p:cNvSpPr/>
-          <p:nvPr/>
-        </p:nvSpPr>
-        <p:spPr>
-          <a:xfrm>
-            <a:off x="8778240" y="3383280"/>
-            <a:ext cx="2651760" cy="548640"/>
-          </a:xfrm>
-          <a:prstGeom prst="rect">
-            <a:avLst/>
-          </a:prstGeom>
-          <a:noFill/>
-          <a:ln/>
-        </p:spPr>
-        <p:txBody>
-          <a:bodyPr wrap="square" rtlCol="0" anchor="ctr"/>
-          <a:lstStyle/>
-          <a:p>
-            <a:pPr indent="0" marL="0">
-              <a:buNone/>
-            </a:pPr>
-            <a:r>
-              <a:rPr lang="en-US" sz="2100" b="1" dirty="0">
-                <a:solidFill>
-                  <a:srgbClr val="1A1A1A"/>
-                </a:solidFill>
-                <a:latin typeface="Cambria" pitchFamily="34" charset="0"/>
-                <a:ea typeface="Cambria" pitchFamily="34" charset="-122"/>
-                <a:cs typeface="Cambria" pitchFamily="34" charset="-120"/>
-              </a:rPr>
-              <a:t>Discussion</a:t>
-            </a:r>
-            <a:endParaRPr lang="en-US" sz="2100" dirty="0"/>
-          </a:p>
-        </p:txBody>
-      </p:sp>
-      <p:sp>
-        <p:nvSpPr>
-          <p:cNvPr id="15" name="Text 13"/>
-          <p:cNvSpPr/>
-          <p:nvPr/>
-        </p:nvSpPr>
-        <p:spPr>
-          <a:xfrm>
-            <a:off x="8778240" y="3977640"/>
-            <a:ext cx="2651760" cy="1371600"/>
-          </a:xfrm>
-          <a:prstGeom prst="rect">
-            <a:avLst/>
-          </a:prstGeom>
-          <a:noFill/>
-          <a:ln/>
-        </p:spPr>
-        <p:txBody>
-          <a:bodyPr wrap="square" rtlCol="0" anchor="t">
+              <a:t>0:15</a:t>
+            </a:r>
+            <a:endParaRPr lang="en-US" sz="1100" dirty="0"/>
+          </a:p>
+        </p:txBody>
+      </p:sp>
+      <p:sp>
+        <p:nvSpPr>
+          <p:cNvPr id="8" name="Text 6"/>
+          <p:cNvSpPr/>
+          <p:nvPr/>
+        </p:nvSpPr>
+        <p:spPr>
+          <a:xfrm>
+            <a:off x="1691640" y="2121408"/>
+            <a:ext cx="9646920" cy="566928"/>
+          </a:xfrm>
+          <a:prstGeom prst="rect">
+            <a:avLst/>
+          </a:prstGeom>
+          <a:noFill/>
+          <a:ln/>
+        </p:spPr>
+        <p:txBody>
+          <a:bodyPr wrap="square" rtlCol="0" anchor="ctr">
             <a:spAutoFit/>
           </a:bodyPr>
           <a:lstStyle/>
           <a:p>
             <a:pPr indent="0" marL="0">
-              <a:lnSpc>
-                <a:spcPct val="115000"/>
-              </a:lnSpc>
-              <a:buNone/>
-            </a:pPr>
-            <a:r>
-              <a:rPr lang="en-US" sz="1500" dirty="0">
+              <a:buNone/>
+            </a:pPr>
+            <a:r>
+              <a:rPr lang="en-US" sz="1250" dirty="0">
                 <a:solidFill>
                   <a:srgbClr val="1A1A1A"/>
                 </a:solidFill>
@@ -5185,9 +4441,315 @@
                 <a:ea typeface="Calibri" pitchFamily="34" charset="-122"/>
                 <a:cs typeface="Calibri" pitchFamily="34" charset="-120"/>
               </a:rPr>
-              <a:t>Interrogate the study, debate it, or critique each other's work.</a:t>
-            </a:r>
-            <a:endParaRPr lang="en-US" sz="1500" dirty="0"/>
+              <a:t>Structured critique (Critical Response Process) in trios: statements of meaning, maker's questions, neutral questions, permissioned opinions.</a:t>
+            </a:r>
+            <a:endParaRPr lang="en-US" sz="1250" dirty="0"/>
+          </a:p>
+        </p:txBody>
+      </p:sp>
+      <p:sp>
+        <p:nvSpPr>
+          <p:cNvPr id="9" name="Shape 7"/>
+          <p:cNvSpPr/>
+          <p:nvPr/>
+        </p:nvSpPr>
+        <p:spPr>
+          <a:xfrm>
+            <a:off x="640080" y="2706624"/>
+            <a:ext cx="868680" cy="457200"/>
+          </a:xfrm>
+          <a:prstGeom prst="roundRect">
+            <a:avLst>
+              <a:gd name="adj" fmla="val 12000"/>
+            </a:avLst>
+          </a:prstGeom>
+          <a:solidFill>
+            <a:srgbClr val="7A3B2E"/>
+          </a:solidFill>
+          <a:ln/>
+        </p:spPr>
+      </p:sp>
+      <p:sp>
+        <p:nvSpPr>
+          <p:cNvPr id="10" name="Text 8"/>
+          <p:cNvSpPr/>
+          <p:nvPr/>
+        </p:nvSpPr>
+        <p:spPr>
+          <a:xfrm>
+            <a:off x="640080" y="2706624"/>
+            <a:ext cx="868680" cy="457200"/>
+          </a:xfrm>
+          <a:prstGeom prst="rect">
+            <a:avLst/>
+          </a:prstGeom>
+          <a:noFill/>
+          <a:ln/>
+        </p:spPr>
+        <p:txBody>
+          <a:bodyPr wrap="square" rtlCol="0" anchor="ctr"/>
+          <a:lstStyle/>
+          <a:p>
+            <a:pPr algn="ctr" indent="0" marL="0">
+              <a:buNone/>
+            </a:pPr>
+            <a:r>
+              <a:rPr lang="en-US" sz="1100" b="1" dirty="0">
+                <a:solidFill>
+                  <a:srgbClr val="FFFFFF"/>
+                </a:solidFill>
+                <a:latin typeface="Calibri" pitchFamily="34" charset="0"/>
+                <a:ea typeface="Calibri" pitchFamily="34" charset="-122"/>
+                <a:cs typeface="Calibri" pitchFamily="34" charset="-120"/>
+              </a:rPr>
+              <a:t>0:50</a:t>
+            </a:r>
+            <a:endParaRPr lang="en-US" sz="1100" dirty="0"/>
+          </a:p>
+        </p:txBody>
+      </p:sp>
+      <p:sp>
+        <p:nvSpPr>
+          <p:cNvPr id="11" name="Text 9"/>
+          <p:cNvSpPr/>
+          <p:nvPr/>
+        </p:nvSpPr>
+        <p:spPr>
+          <a:xfrm>
+            <a:off x="1691640" y="2688336"/>
+            <a:ext cx="9646920" cy="566928"/>
+          </a:xfrm>
+          <a:prstGeom prst="rect">
+            <a:avLst/>
+          </a:prstGeom>
+          <a:noFill/>
+          <a:ln/>
+        </p:spPr>
+        <p:txBody>
+          <a:bodyPr wrap="square" rtlCol="0" anchor="ctr">
+            <a:spAutoFit/>
+          </a:bodyPr>
+          <a:lstStyle/>
+          <a:p>
+            <a:pPr indent="0" marL="0">
+              <a:buNone/>
+            </a:pPr>
+            <a:r>
+              <a:rPr lang="en-US" sz="1250" dirty="0">
+                <a:solidFill>
+                  <a:srgbClr val="1A1A1A"/>
+                </a:solidFill>
+                <a:latin typeface="Calibri" pitchFamily="34" charset="0"/>
+                <a:ea typeface="Calibri" pitchFamily="34" charset="-122"/>
+                <a:cs typeface="Calibri" pitchFamily="34" charset="-120"/>
+              </a:rPr>
+              <a:t>Break</a:t>
+            </a:r>
+            <a:endParaRPr lang="en-US" sz="1250" dirty="0"/>
+          </a:p>
+        </p:txBody>
+      </p:sp>
+      <p:sp>
+        <p:nvSpPr>
+          <p:cNvPr id="12" name="Shape 10"/>
+          <p:cNvSpPr/>
+          <p:nvPr/>
+        </p:nvSpPr>
+        <p:spPr>
+          <a:xfrm>
+            <a:off x="640080" y="3273552"/>
+            <a:ext cx="868680" cy="457200"/>
+          </a:xfrm>
+          <a:prstGeom prst="roundRect">
+            <a:avLst>
+              <a:gd name="adj" fmla="val 12000"/>
+            </a:avLst>
+          </a:prstGeom>
+          <a:solidFill>
+            <a:srgbClr val="7A3B2E"/>
+          </a:solidFill>
+          <a:ln/>
+        </p:spPr>
+      </p:sp>
+      <p:sp>
+        <p:nvSpPr>
+          <p:cNvPr id="13" name="Text 11"/>
+          <p:cNvSpPr/>
+          <p:nvPr/>
+        </p:nvSpPr>
+        <p:spPr>
+          <a:xfrm>
+            <a:off x="640080" y="3273552"/>
+            <a:ext cx="868680" cy="457200"/>
+          </a:xfrm>
+          <a:prstGeom prst="rect">
+            <a:avLst/>
+          </a:prstGeom>
+          <a:noFill/>
+          <a:ln/>
+        </p:spPr>
+        <p:txBody>
+          <a:bodyPr wrap="square" rtlCol="0" anchor="ctr"/>
+          <a:lstStyle/>
+          <a:p>
+            <a:pPr algn="ctr" indent="0" marL="0">
+              <a:buNone/>
+            </a:pPr>
+            <a:r>
+              <a:rPr lang="en-US" sz="1100" b="1" dirty="0">
+                <a:solidFill>
+                  <a:srgbClr val="FFFFFF"/>
+                </a:solidFill>
+                <a:latin typeface="Calibri" pitchFamily="34" charset="0"/>
+                <a:ea typeface="Calibri" pitchFamily="34" charset="-122"/>
+                <a:cs typeface="Calibri" pitchFamily="34" charset="-120"/>
+              </a:rPr>
+              <a:t>1:00</a:t>
+            </a:r>
+            <a:endParaRPr lang="en-US" sz="1100" dirty="0"/>
+          </a:p>
+        </p:txBody>
+      </p:sp>
+      <p:sp>
+        <p:nvSpPr>
+          <p:cNvPr id="14" name="Text 12"/>
+          <p:cNvSpPr/>
+          <p:nvPr/>
+        </p:nvSpPr>
+        <p:spPr>
+          <a:xfrm>
+            <a:off x="1691640" y="3255264"/>
+            <a:ext cx="9646920" cy="566928"/>
+          </a:xfrm>
+          <a:prstGeom prst="rect">
+            <a:avLst/>
+          </a:prstGeom>
+          <a:noFill/>
+          <a:ln/>
+        </p:spPr>
+        <p:txBody>
+          <a:bodyPr wrap="square" rtlCol="0" anchor="ctr">
+            <a:spAutoFit/>
+          </a:bodyPr>
+          <a:lstStyle/>
+          <a:p>
+            <a:pPr indent="0" marL="0">
+              <a:buNone/>
+            </a:pPr>
+            <a:r>
+              <a:rPr lang="en-US" sz="1250" dirty="0">
+                <a:solidFill>
+                  <a:srgbClr val="1A1A1A"/>
+                </a:solidFill>
+                <a:latin typeface="Calibri" pitchFamily="34" charset="0"/>
+                <a:ea typeface="Calibri" pitchFamily="34" charset="-122"/>
+                <a:cs typeface="Calibri" pitchFamily="34" charset="-120"/>
+              </a:rPr>
+              <a:t>Build lab, fifty minutes: open the template forked in Week 4, already live on Pages; paste outline, charts, code; render; push. Static by default; JS opt-ins hit the code-review checkpoint.</a:t>
+            </a:r>
+            <a:endParaRPr lang="en-US" sz="1250" dirty="0"/>
+          </a:p>
+        </p:txBody>
+      </p:sp>
+      <p:sp>
+        <p:nvSpPr>
+          <p:cNvPr id="15" name="Shape 13"/>
+          <p:cNvSpPr/>
+          <p:nvPr/>
+        </p:nvSpPr>
+        <p:spPr>
+          <a:xfrm>
+            <a:off x="640080" y="3840480"/>
+            <a:ext cx="868680" cy="457200"/>
+          </a:xfrm>
+          <a:prstGeom prst="roundRect">
+            <a:avLst>
+              <a:gd name="adj" fmla="val 12000"/>
+            </a:avLst>
+          </a:prstGeom>
+          <a:solidFill>
+            <a:srgbClr val="7A3B2E"/>
+          </a:solidFill>
+          <a:ln/>
+        </p:spPr>
+      </p:sp>
+      <p:sp>
+        <p:nvSpPr>
+          <p:cNvPr id="16" name="Text 14"/>
+          <p:cNvSpPr/>
+          <p:nvPr/>
+        </p:nvSpPr>
+        <p:spPr>
+          <a:xfrm>
+            <a:off x="640080" y="3840480"/>
+            <a:ext cx="868680" cy="457200"/>
+          </a:xfrm>
+          <a:prstGeom prst="rect">
+            <a:avLst/>
+          </a:prstGeom>
+          <a:noFill/>
+          <a:ln/>
+        </p:spPr>
+        <p:txBody>
+          <a:bodyPr wrap="square" rtlCol="0" anchor="ctr"/>
+          <a:lstStyle/>
+          <a:p>
+            <a:pPr algn="ctr" indent="0" marL="0">
+              <a:buNone/>
+            </a:pPr>
+            <a:r>
+              <a:rPr lang="en-US" sz="1100" b="1" dirty="0">
+                <a:solidFill>
+                  <a:srgbClr val="FFFFFF"/>
+                </a:solidFill>
+                <a:latin typeface="Calibri" pitchFamily="34" charset="0"/>
+                <a:ea typeface="Calibri" pitchFamily="34" charset="-122"/>
+                <a:cs typeface="Calibri" pitchFamily="34" charset="-120"/>
+              </a:rPr>
+              <a:t>1:50</a:t>
+            </a:r>
+            <a:endParaRPr lang="en-US" sz="1100" dirty="0"/>
+          </a:p>
+        </p:txBody>
+      </p:sp>
+      <p:sp>
+        <p:nvSpPr>
+          <p:cNvPr id="17" name="Text 15"/>
+          <p:cNvSpPr/>
+          <p:nvPr/>
+        </p:nvSpPr>
+        <p:spPr>
+          <a:xfrm>
+            <a:off x="1691640" y="3822192"/>
+            <a:ext cx="9646920" cy="566928"/>
+          </a:xfrm>
+          <a:prstGeom prst="rect">
+            <a:avLst/>
+          </a:prstGeom>
+          <a:noFill/>
+          <a:ln/>
+        </p:spPr>
+        <p:txBody>
+          <a:bodyPr wrap="square" rtlCol="0" anchor="ctr">
+            <a:spAutoFit/>
+          </a:bodyPr>
+          <a:lstStyle/>
+          <a:p>
+            <a:pPr indent="0" marL="0">
+              <a:buNone/>
+            </a:pPr>
+            <a:r>
+              <a:rPr lang="en-US" sz="1250" dirty="0">
+                <a:solidFill>
+                  <a:srgbClr val="1A1A1A"/>
+                </a:solidFill>
+                <a:latin typeface="Calibri" pitchFamily="34" charset="0"/>
+                <a:ea typeface="Calibri" pitchFamily="34" charset="-122"/>
+                <a:cs typeface="Calibri" pitchFamily="34" charset="-120"/>
+              </a:rPr>
+              <a:t>Phone test in pairs. Check-out.</a:t>
+            </a:r>
+            <a:endParaRPr lang="en-US" sz="1250" dirty="0"/>
           </a:p>
         </p:txBody>
       </p:sp>
@@ -5256,7 +4818,7 @@
                 <a:ea typeface="Cambria" pitchFamily="34" charset="-122"/>
                 <a:cs typeface="Cambria" pitchFamily="34" charset="-120"/>
               </a:rPr>
-              <a:t>The session</a:t>
+              <a:t>Reading &amp; homework</a:t>
             </a:r>
             <a:endParaRPr lang="en-US" sz="3000" dirty="0"/>
           </a:p>
@@ -5270,13 +4832,11 @@
         </p:nvSpPr>
         <p:spPr>
           <a:xfrm>
-            <a:off x="640080" y="1572768"/>
-            <a:ext cx="868680" cy="457200"/>
-          </a:xfrm>
-          <a:prstGeom prst="roundRect">
-            <a:avLst>
-              <a:gd name="adj" fmla="val 12000"/>
-            </a:avLst>
+            <a:off x="640080" y="1673352"/>
+            <a:ext cx="219456" cy="219456"/>
+          </a:xfrm>
+          <a:prstGeom prst="ellipse">
+            <a:avLst/>
           </a:prstGeom>
           <a:solidFill>
             <a:srgbClr val="7A3B2E"/>
@@ -5292,8 +4852,8 @@
         </p:nvSpPr>
         <p:spPr>
           <a:xfrm>
-            <a:off x="640080" y="1572768"/>
-            <a:ext cx="868680" cy="457200"/>
+            <a:off x="1051560" y="1600200"/>
+            <a:ext cx="10424160" cy="365760"/>
           </a:xfrm>
           <a:prstGeom prst="rect">
             <a:avLst/>
@@ -5305,21 +4865,21 @@
           <a:bodyPr wrap="square" rtlCol="0" anchor="ctr"/>
           <a:lstStyle/>
           <a:p>
-            <a:pPr algn="ctr" indent="0" marL="0">
-              <a:buNone/>
-            </a:pPr>
-            <a:r>
-              <a:rPr lang="en-US" sz="1100" b="1" dirty="0">
-                <a:solidFill>
-                  <a:srgbClr val="FFFFFF"/>
+            <a:pPr indent="0" marL="0">
+              <a:buNone/>
+            </a:pPr>
+            <a:r>
+              <a:rPr lang="en-US" sz="1500" b="1" dirty="0">
+                <a:solidFill>
+                  <a:srgbClr val="7A3B2E"/>
                 </a:solidFill>
                 <a:latin typeface="Calibri" pitchFamily="34" charset="0"/>
                 <a:ea typeface="Calibri" pitchFamily="34" charset="-122"/>
                 <a:cs typeface="Calibri" pitchFamily="34" charset="-120"/>
               </a:rPr>
-              <a:t>0:00</a:t>
-            </a:r>
-            <a:endParaRPr lang="en-US" sz="1100" dirty="0"/>
+              <a:t>Reading</a:t>
+            </a:r>
+            <a:endParaRPr lang="en-US" sz="1500" dirty="0"/>
           </a:p>
         </p:txBody>
       </p:sp>
@@ -5331,17 +4891,17 @@
         </p:nvSpPr>
         <p:spPr>
           <a:xfrm>
-            <a:off x="1691640" y="1554480"/>
-            <a:ext cx="9646920" cy="566928"/>
-          </a:xfrm>
-          <a:prstGeom prst="rect">
-            <a:avLst/>
-          </a:prstGeom>
-          <a:noFill/>
-          <a:ln/>
-        </p:spPr>
-        <p:txBody>
-          <a:bodyPr wrap="square" rtlCol="0" anchor="ctr">
+            <a:off x="1051560" y="1984248"/>
+            <a:ext cx="10424160" cy="731520"/>
+          </a:xfrm>
+          <a:prstGeom prst="rect">
+            <a:avLst/>
+          </a:prstGeom>
+          <a:noFill/>
+          <a:ln/>
+        </p:spPr>
+        <p:txBody>
+          <a:bodyPr wrap="square" rtlCol="0" anchor="t">
             <a:spAutoFit/>
           </a:bodyPr>
           <a:lstStyle/>
@@ -5350,7 +4910,7 @@
               <a:buNone/>
             </a:pPr>
             <a:r>
-              <a:rPr lang="en-US" sz="1250" dirty="0">
+              <a:rPr lang="en-US" sz="1400" dirty="0">
                 <a:solidFill>
                   <a:srgbClr val="1A1A1A"/>
                 </a:solidFill>
@@ -5358,9 +4918,9 @@
                 <a:ea typeface="Calibri" pitchFamily="34" charset="-122"/>
                 <a:cs typeface="Calibri" pitchFamily="34" charset="-120"/>
               </a:rPr>
-              <a:t>Look at This: the three essays, common structure, divergent choices.</a:t>
-            </a:r>
-            <a:endParaRPr lang="en-US" sz="1250" dirty="0"/>
+              <a:t>None</a:t>
+            </a:r>
+            <a:endParaRPr lang="en-US" sz="1400" dirty="0"/>
           </a:p>
         </p:txBody>
       </p:sp>
@@ -5372,16 +4932,14 @@
         </p:nvSpPr>
         <p:spPr>
           <a:xfrm>
-            <a:off x="640080" y="2139696"/>
-            <a:ext cx="868680" cy="457200"/>
-          </a:xfrm>
-          <a:prstGeom prst="roundRect">
-            <a:avLst>
-              <a:gd name="adj" fmla="val 12000"/>
-            </a:avLst>
-          </a:prstGeom>
-          <a:solidFill>
-            <a:srgbClr val="7A3B2E"/>
+            <a:off x="640080" y="2633472"/>
+            <a:ext cx="219456" cy="219456"/>
+          </a:xfrm>
+          <a:prstGeom prst="ellipse">
+            <a:avLst/>
+          </a:prstGeom>
+          <a:solidFill>
+            <a:srgbClr val="3F6F5F"/>
           </a:solidFill>
           <a:ln/>
         </p:spPr>
@@ -5394,8 +4952,8 @@
         </p:nvSpPr>
         <p:spPr>
           <a:xfrm>
-            <a:off x="640080" y="2139696"/>
-            <a:ext cx="868680" cy="457200"/>
+            <a:off x="1051560" y="2560320"/>
+            <a:ext cx="10424160" cy="365760"/>
           </a:xfrm>
           <a:prstGeom prst="rect">
             <a:avLst/>
@@ -5407,21 +4965,21 @@
           <a:bodyPr wrap="square" rtlCol="0" anchor="ctr"/>
           <a:lstStyle/>
           <a:p>
-            <a:pPr algn="ctr" indent="0" marL="0">
-              <a:buNone/>
-            </a:pPr>
-            <a:r>
-              <a:rPr lang="en-US" sz="1100" b="1" dirty="0">
-                <a:solidFill>
-                  <a:srgbClr val="FFFFFF"/>
+            <a:pPr indent="0" marL="0">
+              <a:buNone/>
+            </a:pPr>
+            <a:r>
+              <a:rPr lang="en-US" sz="1500" b="1" dirty="0">
+                <a:solidFill>
+                  <a:srgbClr val="3F6F5F"/>
                 </a:solidFill>
                 <a:latin typeface="Calibri" pitchFamily="34" charset="0"/>
                 <a:ea typeface="Calibri" pitchFamily="34" charset="-122"/>
                 <a:cs typeface="Calibri" pitchFamily="34" charset="-120"/>
               </a:rPr>
-              <a:t>0:15</a:t>
-            </a:r>
-            <a:endParaRPr lang="en-US" sz="1100" dirty="0"/>
+              <a:t>Supplement</a:t>
+            </a:r>
+            <a:endParaRPr lang="en-US" sz="1500" dirty="0"/>
           </a:p>
         </p:txBody>
       </p:sp>
@@ -5433,17 +4991,17 @@
         </p:nvSpPr>
         <p:spPr>
           <a:xfrm>
-            <a:off x="1691640" y="2121408"/>
-            <a:ext cx="9646920" cy="566928"/>
-          </a:xfrm>
-          <a:prstGeom prst="rect">
-            <a:avLst/>
-          </a:prstGeom>
-          <a:noFill/>
-          <a:ln/>
-        </p:spPr>
-        <p:txBody>
-          <a:bodyPr wrap="square" rtlCol="0" anchor="ctr">
+            <a:off x="1051560" y="2944368"/>
+            <a:ext cx="10424160" cy="731520"/>
+          </a:xfrm>
+          <a:prstGeom prst="rect">
+            <a:avLst/>
+          </a:prstGeom>
+          <a:noFill/>
+          <a:ln/>
+        </p:spPr>
+        <p:txBody>
+          <a:bodyPr wrap="square" rtlCol="0" anchor="t">
             <a:spAutoFit/>
           </a:bodyPr>
           <a:lstStyle/>
@@ -5452,7 +5010,7 @@
               <a:buNone/>
             </a:pPr>
             <a:r>
-              <a:rPr lang="en-US" sz="1250" dirty="0">
+              <a:rPr lang="en-US" sz="1400" dirty="0">
                 <a:solidFill>
                   <a:srgbClr val="1A1A1A"/>
                 </a:solidFill>
@@ -5460,9 +5018,9 @@
                 <a:ea typeface="Calibri" pitchFamily="34" charset="-122"/>
                 <a:cs typeface="Calibri" pitchFamily="34" charset="-120"/>
               </a:rPr>
-              <a:t>Structured critique (Critical Response Process) in trios: statements of meaning, maker's questions, neutral questions, permissioned opinions.</a:t>
-            </a:r>
-            <a:endParaRPr lang="en-US" sz="1250" dirty="0"/>
+              <a:t>A Pudding process post</a:t>
+            </a:r>
+            <a:endParaRPr lang="en-US" sz="1400" dirty="0"/>
           </a:p>
         </p:txBody>
       </p:sp>
@@ -5474,16 +5032,14 @@
         </p:nvSpPr>
         <p:spPr>
           <a:xfrm>
-            <a:off x="640080" y="2706624"/>
-            <a:ext cx="868680" cy="457200"/>
-          </a:xfrm>
-          <a:prstGeom prst="roundRect">
-            <a:avLst>
-              <a:gd name="adj" fmla="val 12000"/>
-            </a:avLst>
-          </a:prstGeom>
-          <a:solidFill>
-            <a:srgbClr val="7A3B2E"/>
+            <a:off x="640080" y="3593592"/>
+            <a:ext cx="219456" cy="219456"/>
+          </a:xfrm>
+          <a:prstGeom prst="ellipse">
+            <a:avLst/>
+          </a:prstGeom>
+          <a:solidFill>
+            <a:srgbClr val="B9852F"/>
           </a:solidFill>
           <a:ln/>
         </p:spPr>
@@ -5496,8 +5052,8 @@
         </p:nvSpPr>
         <p:spPr>
           <a:xfrm>
-            <a:off x="640080" y="2706624"/>
-            <a:ext cx="868680" cy="457200"/>
+            <a:off x="1051560" y="3520440"/>
+            <a:ext cx="10424160" cy="365760"/>
           </a:xfrm>
           <a:prstGeom prst="rect">
             <a:avLst/>
@@ -5509,21 +5065,21 @@
           <a:bodyPr wrap="square" rtlCol="0" anchor="ctr"/>
           <a:lstStyle/>
           <a:p>
-            <a:pPr algn="ctr" indent="0" marL="0">
-              <a:buNone/>
-            </a:pPr>
-            <a:r>
-              <a:rPr lang="en-US" sz="1100" b="1" dirty="0">
-                <a:solidFill>
-                  <a:srgbClr val="FFFFFF"/>
+            <a:pPr indent="0" marL="0">
+              <a:buNone/>
+            </a:pPr>
+            <a:r>
+              <a:rPr lang="en-US" sz="1500" b="1" dirty="0">
+                <a:solidFill>
+                  <a:srgbClr val="B9852F"/>
                 </a:solidFill>
                 <a:latin typeface="Calibri" pitchFamily="34" charset="0"/>
                 <a:ea typeface="Calibri" pitchFamily="34" charset="-122"/>
                 <a:cs typeface="Calibri" pitchFamily="34" charset="-120"/>
               </a:rPr>
-              <a:t>0:50</a:t>
-            </a:r>
-            <a:endParaRPr lang="en-US" sz="1100" dirty="0"/>
+              <a:t>Deeper (optional)</a:t>
+            </a:r>
+            <a:endParaRPr lang="en-US" sz="1500" dirty="0"/>
           </a:p>
         </p:txBody>
       </p:sp>
@@ -5535,17 +5091,17 @@
         </p:nvSpPr>
         <p:spPr>
           <a:xfrm>
-            <a:off x="1691640" y="2688336"/>
-            <a:ext cx="9646920" cy="566928"/>
-          </a:xfrm>
-          <a:prstGeom prst="rect">
-            <a:avLst/>
-          </a:prstGeom>
-          <a:noFill/>
-          <a:ln/>
-        </p:spPr>
-        <p:txBody>
-          <a:bodyPr wrap="square" rtlCol="0" anchor="ctr">
+            <a:off x="1051560" y="3904488"/>
+            <a:ext cx="10424160" cy="731520"/>
+          </a:xfrm>
+          <a:prstGeom prst="rect">
+            <a:avLst/>
+          </a:prstGeom>
+          <a:noFill/>
+          <a:ln/>
+        </p:spPr>
+        <p:txBody>
+          <a:bodyPr wrap="square" rtlCol="0" anchor="t">
             <a:spAutoFit/>
           </a:bodyPr>
           <a:lstStyle/>
@@ -5554,7 +5110,7 @@
               <a:buNone/>
             </a:pPr>
             <a:r>
-              <a:rPr lang="en-US" sz="1250" dirty="0">
+              <a:rPr lang="en-US" sz="1400" dirty="0">
                 <a:solidFill>
                   <a:srgbClr val="1A1A1A"/>
                 </a:solidFill>
@@ -5562,9 +5118,9 @@
                 <a:ea typeface="Calibri" pitchFamily="34" charset="-122"/>
                 <a:cs typeface="Calibri" pitchFamily="34" charset="-120"/>
               </a:rPr>
-              <a:t>Break</a:t>
-            </a:r>
-            <a:endParaRPr lang="en-US" sz="1250" dirty="0"/>
+              <a:t>the Critical Inquiry online forum: Underwood and others answer Da, a discipline arguing about itself in public</a:t>
+            </a:r>
+            <a:endParaRPr lang="en-US" sz="1400" dirty="0"/>
           </a:p>
         </p:txBody>
       </p:sp>
@@ -5576,16 +5132,14 @@
         </p:nvSpPr>
         <p:spPr>
           <a:xfrm>
-            <a:off x="640080" y="3273552"/>
-            <a:ext cx="868680" cy="457200"/>
-          </a:xfrm>
-          <a:prstGeom prst="roundRect">
-            <a:avLst>
-              <a:gd name="adj" fmla="val 12000"/>
-            </a:avLst>
-          </a:prstGeom>
-          <a:solidFill>
-            <a:srgbClr val="7A3B2E"/>
+            <a:off x="640080" y="4553712"/>
+            <a:ext cx="219456" cy="219456"/>
+          </a:xfrm>
+          <a:prstGeom prst="ellipse">
+            <a:avLst/>
+          </a:prstGeom>
+          <a:solidFill>
+            <a:srgbClr val="3F6F5F"/>
           </a:solidFill>
           <a:ln/>
         </p:spPr>
@@ -5598,8 +5152,8 @@
         </p:nvSpPr>
         <p:spPr>
           <a:xfrm>
-            <a:off x="640080" y="3273552"/>
-            <a:ext cx="868680" cy="457200"/>
+            <a:off x="1051560" y="4480560"/>
+            <a:ext cx="10424160" cy="365760"/>
           </a:xfrm>
           <a:prstGeom prst="rect">
             <a:avLst/>
@@ -5611,21 +5165,21 @@
           <a:bodyPr wrap="square" rtlCol="0" anchor="ctr"/>
           <a:lstStyle/>
           <a:p>
-            <a:pPr algn="ctr" indent="0" marL="0">
-              <a:buNone/>
-            </a:pPr>
-            <a:r>
-              <a:rPr lang="en-US" sz="1100" b="1" dirty="0">
-                <a:solidFill>
-                  <a:srgbClr val="FFFFFF"/>
+            <a:pPr indent="0" marL="0">
+              <a:buNone/>
+            </a:pPr>
+            <a:r>
+              <a:rPr lang="en-US" sz="1500" b="1" dirty="0">
+                <a:solidFill>
+                  <a:srgbClr val="3F6F5F"/>
                 </a:solidFill>
                 <a:latin typeface="Calibri" pitchFamily="34" charset="0"/>
                 <a:ea typeface="Calibri" pitchFamily="34" charset="-122"/>
                 <a:cs typeface="Calibri" pitchFamily="34" charset="-120"/>
               </a:rPr>
-              <a:t>1:00</a:t>
-            </a:r>
-            <a:endParaRPr lang="en-US" sz="1100" dirty="0"/>
+              <a:t>Sketch</a:t>
+            </a:r>
+            <a:endParaRPr lang="en-US" sz="1500" dirty="0"/>
           </a:p>
         </p:txBody>
       </p:sp>
@@ -5637,17 +5191,17 @@
         </p:nvSpPr>
         <p:spPr>
           <a:xfrm>
-            <a:off x="1691640" y="3255264"/>
-            <a:ext cx="9646920" cy="566928"/>
-          </a:xfrm>
-          <a:prstGeom prst="rect">
-            <a:avLst/>
-          </a:prstGeom>
-          <a:noFill/>
-          <a:ln/>
-        </p:spPr>
-        <p:txBody>
-          <a:bodyPr wrap="square" rtlCol="0" anchor="ctr">
+            <a:off x="1051560" y="4864608"/>
+            <a:ext cx="10424160" cy="731520"/>
+          </a:xfrm>
+          <a:prstGeom prst="rect">
+            <a:avLst/>
+          </a:prstGeom>
+          <a:noFill/>
+          <a:ln/>
+        </p:spPr>
+        <p:txBody>
+          <a:bodyPr wrap="square" rtlCol="0" anchor="t">
             <a:spAutoFit/>
           </a:bodyPr>
           <a:lstStyle/>
@@ -5656,7 +5210,7 @@
               <a:buNone/>
             </a:pPr>
             <a:r>
-              <a:rPr lang="en-US" sz="1250" dirty="0">
+              <a:rPr lang="en-US" sz="1400" dirty="0">
                 <a:solidFill>
                   <a:srgbClr val="1A1A1A"/>
                 </a:solidFill>
@@ -5664,9 +5218,9 @@
                 <a:ea typeface="Calibri" pitchFamily="34" charset="-122"/>
                 <a:cs typeface="Calibri" pitchFamily="34" charset="-120"/>
               </a:rPr>
-              <a:t>Interrogate your own chart, the making-side mirror of Week 6's hand-labeling. Does the y-axis start at zero? Is the eye pulled toward a pattern the data won't support? Fix one thing.</a:t>
-            </a:r>
-            <a:endParaRPr lang="en-US" sz="1250" dirty="0"/>
+              <a:t>Title your essay; write the headline finding in one sentence.</a:t>
+            </a:r>
+            <a:endParaRPr lang="en-US" sz="1400" dirty="0"/>
           </a:p>
         </p:txBody>
       </p:sp>
@@ -5678,13 +5232,11 @@
         </p:nvSpPr>
         <p:spPr>
           <a:xfrm>
-            <a:off x="640080" y="3840480"/>
-            <a:ext cx="868680" cy="457200"/>
-          </a:xfrm>
-          <a:prstGeom prst="roundRect">
-            <a:avLst>
-              <a:gd name="adj" fmla="val 12000"/>
-            </a:avLst>
+            <a:off x="640080" y="5513832"/>
+            <a:ext cx="219456" cy="219456"/>
+          </a:xfrm>
+          <a:prstGeom prst="ellipse">
+            <a:avLst/>
           </a:prstGeom>
           <a:solidFill>
             <a:srgbClr val="7A3B2E"/>
@@ -5700,8 +5252,8 @@
         </p:nvSpPr>
         <p:spPr>
           <a:xfrm>
-            <a:off x="640080" y="3840480"/>
-            <a:ext cx="868680" cy="457200"/>
+            <a:off x="1051560" y="5440680"/>
+            <a:ext cx="10424160" cy="365760"/>
           </a:xfrm>
           <a:prstGeom prst="rect">
             <a:avLst/>
@@ -5713,21 +5265,21 @@
           <a:bodyPr wrap="square" rtlCol="0" anchor="ctr"/>
           <a:lstStyle/>
           <a:p>
-            <a:pPr algn="ctr" indent="0" marL="0">
-              <a:buNone/>
-            </a:pPr>
-            <a:r>
-              <a:rPr lang="en-US" sz="1100" b="1" dirty="0">
-                <a:solidFill>
-                  <a:srgbClr val="FFFFFF"/>
+            <a:pPr indent="0" marL="0">
+              <a:buNone/>
+            </a:pPr>
+            <a:r>
+              <a:rPr lang="en-US" sz="1500" b="1" dirty="0">
+                <a:solidFill>
+                  <a:srgbClr val="7A3B2E"/>
                 </a:solidFill>
                 <a:latin typeface="Calibri" pitchFamily="34" charset="0"/>
                 <a:ea typeface="Calibri" pitchFamily="34" charset="-122"/>
                 <a:cs typeface="Calibri" pitchFamily="34" charset="-120"/>
               </a:rPr>
-              <a:t>1:15</a:t>
-            </a:r>
-            <a:endParaRPr lang="en-US" sz="1100" dirty="0"/>
+              <a:t>Check (AI closed)</a:t>
+            </a:r>
+            <a:endParaRPr lang="en-US" sz="1500" dirty="0"/>
           </a:p>
         </p:txBody>
       </p:sp>
@@ -5739,17 +5291,17 @@
         </p:nvSpPr>
         <p:spPr>
           <a:xfrm>
-            <a:off x="1691640" y="3822192"/>
-            <a:ext cx="9646920" cy="566928"/>
-          </a:xfrm>
-          <a:prstGeom prst="rect">
-            <a:avLst/>
-          </a:prstGeom>
-          <a:noFill/>
-          <a:ln/>
-        </p:spPr>
-        <p:txBody>
-          <a:bodyPr wrap="square" rtlCol="0" anchor="ctr">
+            <a:off x="1051560" y="5824728"/>
+            <a:ext cx="10424160" cy="731520"/>
+          </a:xfrm>
+          <a:prstGeom prst="rect">
+            <a:avLst/>
+          </a:prstGeom>
+          <a:noFill/>
+          <a:ln/>
+        </p:spPr>
+        <p:txBody>
+          <a:bodyPr wrap="square" rtlCol="0" anchor="t">
             <a:spAutoFit/>
           </a:bodyPr>
           <a:lstStyle/>
@@ -5758,7 +5310,7 @@
               <a:buNone/>
             </a:pPr>
             <a:r>
-              <a:rPr lang="en-US" sz="1250" dirty="0">
+              <a:rPr lang="en-US" sz="1400" dirty="0">
                 <a:solidFill>
                   <a:srgbClr val="1A1A1A"/>
                 </a:solidFill>
@@ -5766,111 +5318,9 @@
                 <a:ea typeface="Calibri" pitchFamily="34" charset="-122"/>
                 <a:cs typeface="Calibri" pitchFamily="34" charset="-120"/>
               </a:rPr>
-              <a:t>Build lab: open the template you forked in Week 4; paste outline, charts, code; render; deploy. Static by default; JS opt-ins hit the code-review checkpoint.</a:t>
-            </a:r>
-            <a:endParaRPr lang="en-US" sz="1250" dirty="0"/>
-          </a:p>
-        </p:txBody>
-      </p:sp>
-      <p:sp>
-        <p:nvSpPr>
-          <p:cNvPr id="18" name="Shape 16"/>
-          <p:cNvSpPr/>
-          <p:nvPr/>
-        </p:nvSpPr>
-        <p:spPr>
-          <a:xfrm>
-            <a:off x="640080" y="4407408"/>
-            <a:ext cx="868680" cy="457200"/>
-          </a:xfrm>
-          <a:prstGeom prst="roundRect">
-            <a:avLst>
-              <a:gd name="adj" fmla="val 12000"/>
-            </a:avLst>
-          </a:prstGeom>
-          <a:solidFill>
-            <a:srgbClr val="7A3B2E"/>
-          </a:solidFill>
-          <a:ln/>
-        </p:spPr>
-      </p:sp>
-      <p:sp>
-        <p:nvSpPr>
-          <p:cNvPr id="19" name="Text 17"/>
-          <p:cNvSpPr/>
-          <p:nvPr/>
-        </p:nvSpPr>
-        <p:spPr>
-          <a:xfrm>
-            <a:off x="640080" y="4407408"/>
-            <a:ext cx="868680" cy="457200"/>
-          </a:xfrm>
-          <a:prstGeom prst="rect">
-            <a:avLst/>
-          </a:prstGeom>
-          <a:noFill/>
-          <a:ln/>
-        </p:spPr>
-        <p:txBody>
-          <a:bodyPr wrap="square" rtlCol="0" anchor="ctr"/>
-          <a:lstStyle/>
-          <a:p>
-            <a:pPr algn="ctr" indent="0" marL="0">
-              <a:buNone/>
-            </a:pPr>
-            <a:r>
-              <a:rPr lang="en-US" sz="1100" b="1" dirty="0">
-                <a:solidFill>
-                  <a:srgbClr val="FFFFFF"/>
-                </a:solidFill>
-                <a:latin typeface="Calibri" pitchFamily="34" charset="0"/>
-                <a:ea typeface="Calibri" pitchFamily="34" charset="-122"/>
-                <a:cs typeface="Calibri" pitchFamily="34" charset="-120"/>
-              </a:rPr>
-              <a:t>1:50</a:t>
-            </a:r>
-            <a:endParaRPr lang="en-US" sz="1100" dirty="0"/>
-          </a:p>
-        </p:txBody>
-      </p:sp>
-      <p:sp>
-        <p:nvSpPr>
-          <p:cNvPr id="20" name="Text 18"/>
-          <p:cNvSpPr/>
-          <p:nvPr/>
-        </p:nvSpPr>
-        <p:spPr>
-          <a:xfrm>
-            <a:off x="1691640" y="4389120"/>
-            <a:ext cx="9646920" cy="566928"/>
-          </a:xfrm>
-          <a:prstGeom prst="rect">
-            <a:avLst/>
-          </a:prstGeom>
-          <a:noFill/>
-          <a:ln/>
-        </p:spPr>
-        <p:txBody>
-          <a:bodyPr wrap="square" rtlCol="0" anchor="ctr">
-            <a:spAutoFit/>
-          </a:bodyPr>
-          <a:lstStyle/>
-          <a:p>
-            <a:pPr indent="0" marL="0">
-              <a:buNone/>
-            </a:pPr>
-            <a:r>
-              <a:rPr lang="en-US" sz="1250" dirty="0">
-                <a:solidFill>
-                  <a:srgbClr val="1A1A1A"/>
-                </a:solidFill>
-                <a:latin typeface="Calibri" pitchFamily="34" charset="0"/>
-                <a:ea typeface="Calibri" pitchFamily="34" charset="-122"/>
-                <a:cs typeface="Calibri" pitchFamily="34" charset="-120"/>
-              </a:rPr>
-              <a:t>Phone test in pairs. Check-out.</a:t>
-            </a:r>
-            <a:endParaRPr lang="en-US" sz="1250" dirty="0"/>
+              <a:t>Fix it: a planted bug in publishing/layout code (or in opted-in JS). (Competencies 1, 7.)</a:t>
+            </a:r>
+            <a:endParaRPr lang="en-US" sz="1400" dirty="0"/>
           </a:p>
         </p:txBody>
       </p:sp>
@@ -5915,7 +5365,7 @@
         <p:spPr>
           <a:xfrm>
             <a:off x="640080" y="640080"/>
-            <a:ext cx="10058400" cy="731520"/>
+            <a:ext cx="10058400" cy="320040"/>
           </a:xfrm>
           <a:prstGeom prst="rect">
             <a:avLst/>
@@ -5931,7 +5381,46 @@
               <a:buNone/>
             </a:pPr>
             <a:r>
-              <a:rPr lang="en-US" sz="3000" b="1" dirty="0">
+              <a:rPr lang="en-US" sz="1300" b="1" spc="300" kern="0" dirty="0">
+                <a:solidFill>
+                  <a:srgbClr val="7A3B2E"/>
+                </a:solidFill>
+                <a:latin typeface="Calibri" pitchFamily="34" charset="0"/>
+                <a:ea typeface="Calibri" pitchFamily="34" charset="-122"/>
+                <a:cs typeface="Calibri" pitchFamily="34" charset="-120"/>
+              </a:rPr>
+              <a:t>HOW THIS WEEK CONNECTS</a:t>
+            </a:r>
+            <a:endParaRPr lang="en-US" sz="1300" dirty="0"/>
+          </a:p>
+        </p:txBody>
+      </p:sp>
+      <p:sp>
+        <p:nvSpPr>
+          <p:cNvPr id="3" name="Text 1"/>
+          <p:cNvSpPr/>
+          <p:nvPr/>
+        </p:nvSpPr>
+        <p:spPr>
+          <a:xfrm>
+            <a:off x="640080" y="987552"/>
+            <a:ext cx="10058400" cy="640080"/>
+          </a:xfrm>
+          <a:prstGeom prst="rect">
+            <a:avLst/>
+          </a:prstGeom>
+          <a:noFill/>
+          <a:ln/>
+        </p:spPr>
+        <p:txBody>
+          <a:bodyPr wrap="square" rtlCol="0" anchor="ctr"/>
+          <a:lstStyle/>
+          <a:p>
+            <a:pPr indent="0" marL="0">
+              <a:buNone/>
+            </a:pPr>
+            <a:r>
+              <a:rPr lang="en-US" sz="2800" b="1" dirty="0">
                 <a:solidFill>
                   <a:srgbClr val="1A1A1A"/>
                 </a:solidFill>
@@ -5939,25 +5428,27 @@
                 <a:ea typeface="Cambria" pitchFamily="34" charset="-122"/>
                 <a:cs typeface="Cambria" pitchFamily="34" charset="-120"/>
               </a:rPr>
-              <a:t>Reading &amp; homework</a:t>
-            </a:r>
-            <a:endParaRPr lang="en-US" sz="3000" dirty="0"/>
-          </a:p>
-        </p:txBody>
-      </p:sp>
-      <p:sp>
-        <p:nvSpPr>
-          <p:cNvPr id="3" name="Shape 1"/>
-          <p:cNvSpPr/>
-          <p:nvPr/>
-        </p:nvSpPr>
-        <p:spPr>
-          <a:xfrm>
-            <a:off x="640080" y="1673352"/>
-            <a:ext cx="219456" cy="219456"/>
-          </a:xfrm>
-          <a:prstGeom prst="ellipse">
-            <a:avLst/>
+              <a:t>The course's through-lines</a:t>
+            </a:r>
+            <a:endParaRPr lang="en-US" sz="2800" dirty="0"/>
+          </a:p>
+        </p:txBody>
+      </p:sp>
+      <p:sp>
+        <p:nvSpPr>
+          <p:cNvPr id="4" name="Shape 2"/>
+          <p:cNvSpPr/>
+          <p:nvPr/>
+        </p:nvSpPr>
+        <p:spPr>
+          <a:xfrm>
+            <a:off x="640080" y="2057400"/>
+            <a:ext cx="457200" cy="457200"/>
+          </a:xfrm>
+          <a:prstGeom prst="roundRect">
+            <a:avLst>
+              <a:gd name="adj" fmla="val 16000"/>
+            </a:avLst>
           </a:prstGeom>
           <a:solidFill>
             <a:srgbClr val="7A3B2E"/>
@@ -5967,14 +5458,14 @@
       </p:sp>
       <p:sp>
         <p:nvSpPr>
-          <p:cNvPr id="4" name="Text 2"/>
-          <p:cNvSpPr/>
-          <p:nvPr/>
-        </p:nvSpPr>
-        <p:spPr>
-          <a:xfrm>
-            <a:off x="1051560" y="1600200"/>
-            <a:ext cx="10424160" cy="365760"/>
+          <p:cNvPr id="5" name="Text 3"/>
+          <p:cNvSpPr/>
+          <p:nvPr/>
+        </p:nvSpPr>
+        <p:spPr>
+          <a:xfrm>
+            <a:off x="640080" y="2057400"/>
+            <a:ext cx="457200" cy="457200"/>
           </a:xfrm>
           <a:prstGeom prst="rect">
             <a:avLst/>
@@ -5986,34 +5477,217 @@
           <a:bodyPr wrap="square" rtlCol="0" anchor="ctr"/>
           <a:lstStyle/>
           <a:p>
+            <a:pPr algn="ctr" indent="0" marL="0">
+              <a:buNone/>
+            </a:pPr>
+            <a:r>
+              <a:rPr lang="en-US" sz="2000" b="1" dirty="0">
+                <a:solidFill>
+                  <a:srgbClr val="FFFFFF"/>
+                </a:solidFill>
+                <a:latin typeface="Cambria" pitchFamily="34" charset="0"/>
+                <a:ea typeface="Cambria" pitchFamily="34" charset="-122"/>
+                <a:cs typeface="Cambria" pitchFamily="34" charset="-120"/>
+              </a:rPr>
+              <a:t>1</a:t>
+            </a:r>
+            <a:endParaRPr lang="en-US" sz="2000" dirty="0"/>
+          </a:p>
+        </p:txBody>
+      </p:sp>
+      <p:sp>
+        <p:nvSpPr>
+          <p:cNvPr id="6" name="Text 4"/>
+          <p:cNvSpPr/>
+          <p:nvPr/>
+        </p:nvSpPr>
+        <p:spPr>
+          <a:xfrm>
+            <a:off x="1371600" y="2020824"/>
+            <a:ext cx="10332720" cy="411480"/>
+          </a:xfrm>
+          <a:prstGeom prst="rect">
+            <a:avLst/>
+          </a:prstGeom>
+          <a:noFill/>
+          <a:ln/>
+        </p:spPr>
+        <p:txBody>
+          <a:bodyPr wrap="square" rtlCol="0" anchor="ctr"/>
+          <a:lstStyle/>
+          <a:p>
             <a:pPr indent="0" marL="0">
               <a:buNone/>
             </a:pPr>
             <a:r>
-              <a:rPr lang="en-US" sz="1500" b="1" dirty="0">
+              <a:rPr lang="en-US" sz="1900" b="1" dirty="0">
                 <a:solidFill>
                   <a:srgbClr val="7A3B2E"/>
+                </a:solidFill>
+                <a:latin typeface="Cambria" pitchFamily="34" charset="0"/>
+                <a:ea typeface="Cambria" pitchFamily="34" charset="-122"/>
+                <a:cs typeface="Cambria" pitchFamily="34" charset="-120"/>
+              </a:rPr>
+              <a:t>Interrogate your own chart</a:t>
+            </a:r>
+            <a:endParaRPr lang="en-US" sz="1900" dirty="0"/>
+          </a:p>
+        </p:txBody>
+      </p:sp>
+      <p:sp>
+        <p:nvSpPr>
+          <p:cNvPr id="7" name="Text 5"/>
+          <p:cNvSpPr/>
+          <p:nvPr/>
+        </p:nvSpPr>
+        <p:spPr>
+          <a:xfrm>
+            <a:off x="1371600" y="2441448"/>
+            <a:ext cx="10332720" cy="914400"/>
+          </a:xfrm>
+          <a:prstGeom prst="rect">
+            <a:avLst/>
+          </a:prstGeom>
+          <a:noFill/>
+          <a:ln/>
+        </p:spPr>
+        <p:txBody>
+          <a:bodyPr wrap="square" rtlCol="0" anchor="t">
+            <a:spAutoFit/>
+          </a:bodyPr>
+          <a:lstStyle/>
+          <a:p>
+            <a:pPr indent="0" marL="0">
+              <a:lnSpc>
+                <a:spcPct val="112000"/>
+              </a:lnSpc>
+              <a:buNone/>
+            </a:pPr>
+            <a:r>
+              <a:rPr lang="en-US" sz="1450" dirty="0">
+                <a:solidFill>
+                  <a:srgbClr val="1A1A1A"/>
                 </a:solidFill>
                 <a:latin typeface="Calibri" pitchFamily="34" charset="0"/>
                 <a:ea typeface="Calibri" pitchFamily="34" charset="-122"/>
                 <a:cs typeface="Calibri" pitchFamily="34" charset="-120"/>
               </a:rPr>
-              <a:t>Reading</a:t>
-            </a:r>
-            <a:endParaRPr lang="en-US" sz="1500" dirty="0"/>
-          </a:p>
-        </p:txBody>
-      </p:sp>
-      <p:sp>
-        <p:nvSpPr>
-          <p:cNvPr id="5" name="Text 3"/>
-          <p:cNvSpPr/>
-          <p:nvPr/>
-        </p:nvSpPr>
-        <p:spPr>
-          <a:xfrm>
-            <a:off x="1051560" y="1984248"/>
-            <a:ext cx="10424160" cy="731520"/>
+              <a:t>Ten weeks on other people's charts; now the ten minutes on yours.</a:t>
+            </a:r>
+            <a:endParaRPr lang="en-US" sz="1450" dirty="0"/>
+          </a:p>
+        </p:txBody>
+      </p:sp>
+      <p:sp>
+        <p:nvSpPr>
+          <p:cNvPr id="8" name="Shape 6"/>
+          <p:cNvSpPr/>
+          <p:nvPr/>
+        </p:nvSpPr>
+        <p:spPr>
+          <a:xfrm>
+            <a:off x="640080" y="3520440"/>
+            <a:ext cx="457200" cy="457200"/>
+          </a:xfrm>
+          <a:prstGeom prst="roundRect">
+            <a:avLst>
+              <a:gd name="adj" fmla="val 16000"/>
+            </a:avLst>
+          </a:prstGeom>
+          <a:solidFill>
+            <a:srgbClr val="3F6F5F"/>
+          </a:solidFill>
+          <a:ln/>
+        </p:spPr>
+      </p:sp>
+      <p:sp>
+        <p:nvSpPr>
+          <p:cNvPr id="9" name="Text 7"/>
+          <p:cNvSpPr/>
+          <p:nvPr/>
+        </p:nvSpPr>
+        <p:spPr>
+          <a:xfrm>
+            <a:off x="640080" y="3520440"/>
+            <a:ext cx="457200" cy="457200"/>
+          </a:xfrm>
+          <a:prstGeom prst="rect">
+            <a:avLst/>
+          </a:prstGeom>
+          <a:noFill/>
+          <a:ln/>
+        </p:spPr>
+        <p:txBody>
+          <a:bodyPr wrap="square" rtlCol="0" anchor="ctr"/>
+          <a:lstStyle/>
+          <a:p>
+            <a:pPr algn="ctr" indent="0" marL="0">
+              <a:buNone/>
+            </a:pPr>
+            <a:r>
+              <a:rPr lang="en-US" sz="2000" b="1" dirty="0">
+                <a:solidFill>
+                  <a:srgbClr val="FFFFFF"/>
+                </a:solidFill>
+                <a:latin typeface="Cambria" pitchFamily="34" charset="0"/>
+                <a:ea typeface="Cambria" pitchFamily="34" charset="-122"/>
+                <a:cs typeface="Cambria" pitchFamily="34" charset="-120"/>
+              </a:rPr>
+              <a:t>2</a:t>
+            </a:r>
+            <a:endParaRPr lang="en-US" sz="2000" dirty="0"/>
+          </a:p>
+        </p:txBody>
+      </p:sp>
+      <p:sp>
+        <p:nvSpPr>
+          <p:cNvPr id="10" name="Text 8"/>
+          <p:cNvSpPr/>
+          <p:nvPr/>
+        </p:nvSpPr>
+        <p:spPr>
+          <a:xfrm>
+            <a:off x="1371600" y="3483864"/>
+            <a:ext cx="10332720" cy="411480"/>
+          </a:xfrm>
+          <a:prstGeom prst="rect">
+            <a:avLst/>
+          </a:prstGeom>
+          <a:noFill/>
+          <a:ln/>
+        </p:spPr>
+        <p:txBody>
+          <a:bodyPr wrap="square" rtlCol="0" anchor="ctr"/>
+          <a:lstStyle/>
+          <a:p>
+            <a:pPr indent="0" marL="0">
+              <a:buNone/>
+            </a:pPr>
+            <a:r>
+              <a:rPr lang="en-US" sz="1900" b="1" dirty="0">
+                <a:solidFill>
+                  <a:srgbClr val="3F6F5F"/>
+                </a:solidFill>
+                <a:latin typeface="Cambria" pitchFamily="34" charset="0"/>
+                <a:ea typeface="Cambria" pitchFamily="34" charset="-122"/>
+                <a:cs typeface="Cambria" pitchFamily="34" charset="-120"/>
+              </a:rPr>
+              <a:t>No single right way</a:t>
+            </a:r>
+            <a:endParaRPr lang="en-US" sz="1900" dirty="0"/>
+          </a:p>
+        </p:txBody>
+      </p:sp>
+      <p:sp>
+        <p:nvSpPr>
+          <p:cNvPr id="11" name="Text 9"/>
+          <p:cNvSpPr/>
+          <p:nvPr/>
+        </p:nvSpPr>
+        <p:spPr>
+          <a:xfrm>
+            <a:off x="1371600" y="3904488"/>
+            <a:ext cx="10332720" cy="914400"/>
           </a:xfrm>
           <a:prstGeom prst="rect">
             <a:avLst/>
@@ -6028,10 +5702,13 @@
           <a:lstStyle/>
           <a:p>
             <a:pPr indent="0" marL="0">
-              <a:buNone/>
-            </a:pPr>
-            <a:r>
-              <a:rPr lang="en-US" sz="1400" dirty="0">
+              <a:lnSpc>
+                <a:spcPct val="112000"/>
+              </a:lnSpc>
+              <a:buNone/>
+            </a:pPr>
+            <a:r>
+              <a:rPr lang="en-US" sz="1450" dirty="0">
                 <a:solidFill>
                   <a:srgbClr val="1A1A1A"/>
                 </a:solidFill>
@@ -6039,42 +5716,44 @@
                 <a:ea typeface="Calibri" pitchFamily="34" charset="-122"/>
                 <a:cs typeface="Calibri" pitchFamily="34" charset="-120"/>
               </a:rPr>
-              <a:t>None</a:t>
-            </a:r>
-            <a:endParaRPr lang="en-US" sz="1400" dirty="0"/>
-          </a:p>
-        </p:txBody>
-      </p:sp>
-      <p:sp>
-        <p:nvSpPr>
-          <p:cNvPr id="6" name="Shape 4"/>
-          <p:cNvSpPr/>
-          <p:nvPr/>
-        </p:nvSpPr>
-        <p:spPr>
-          <a:xfrm>
-            <a:off x="640080" y="2633472"/>
-            <a:ext cx="219456" cy="219456"/>
-          </a:xfrm>
-          <a:prstGeom prst="ellipse">
-            <a:avLst/>
-          </a:prstGeom>
-          <a:solidFill>
-            <a:srgbClr val="3F6F5F"/>
-          </a:solidFill>
-          <a:ln/>
-        </p:spPr>
-      </p:sp>
-      <p:sp>
-        <p:nvSpPr>
-          <p:cNvPr id="7" name="Text 5"/>
-          <p:cNvSpPr/>
-          <p:nvPr/>
-        </p:nvSpPr>
-        <p:spPr>
-          <a:xfrm>
-            <a:off x="1051560" y="2560320"/>
-            <a:ext cx="10424160" cy="365760"/>
+              <a:t>Three published essays, three defensible sets of choices.</a:t>
+            </a:r>
+            <a:endParaRPr lang="en-US" sz="1450" dirty="0"/>
+          </a:p>
+        </p:txBody>
+      </p:sp>
+      <p:sp>
+        <p:nvSpPr>
+          <p:cNvPr id="12" name="Shape 10"/>
+          <p:cNvSpPr/>
+          <p:nvPr/>
+        </p:nvSpPr>
+        <p:spPr>
+          <a:xfrm>
+            <a:off x="640080" y="4983480"/>
+            <a:ext cx="457200" cy="457200"/>
+          </a:xfrm>
+          <a:prstGeom prst="roundRect">
+            <a:avLst>
+              <a:gd name="adj" fmla="val 16000"/>
+            </a:avLst>
+          </a:prstGeom>
+          <a:solidFill>
+            <a:srgbClr val="B9852F"/>
+          </a:solidFill>
+          <a:ln/>
+        </p:spPr>
+      </p:sp>
+      <p:sp>
+        <p:nvSpPr>
+          <p:cNvPr id="13" name="Text 11"/>
+          <p:cNvSpPr/>
+          <p:nvPr/>
+        </p:nvSpPr>
+        <p:spPr>
+          <a:xfrm>
+            <a:off x="640080" y="4983480"/>
+            <a:ext cx="457200" cy="457200"/>
           </a:xfrm>
           <a:prstGeom prst="rect">
             <a:avLst/>
@@ -6086,362 +5765,104 @@
           <a:bodyPr wrap="square" rtlCol="0" anchor="ctr"/>
           <a:lstStyle/>
           <a:p>
+            <a:pPr algn="ctr" indent="0" marL="0">
+              <a:buNone/>
+            </a:pPr>
+            <a:r>
+              <a:rPr lang="en-US" sz="2000" b="1" dirty="0">
+                <a:solidFill>
+                  <a:srgbClr val="FFFFFF"/>
+                </a:solidFill>
+                <a:latin typeface="Cambria" pitchFamily="34" charset="0"/>
+                <a:ea typeface="Cambria" pitchFamily="34" charset="-122"/>
+                <a:cs typeface="Cambria" pitchFamily="34" charset="-120"/>
+              </a:rPr>
+              <a:t>3</a:t>
+            </a:r>
+            <a:endParaRPr lang="en-US" sz="2000" dirty="0"/>
+          </a:p>
+        </p:txBody>
+      </p:sp>
+      <p:sp>
+        <p:nvSpPr>
+          <p:cNvPr id="14" name="Text 12"/>
+          <p:cNvSpPr/>
+          <p:nvPr/>
+        </p:nvSpPr>
+        <p:spPr>
+          <a:xfrm>
+            <a:off x="1371600" y="4946904"/>
+            <a:ext cx="10332720" cy="411480"/>
+          </a:xfrm>
+          <a:prstGeom prst="rect">
+            <a:avLst/>
+          </a:prstGeom>
+          <a:noFill/>
+          <a:ln/>
+        </p:spPr>
+        <p:txBody>
+          <a:bodyPr wrap="square" rtlCol="0" anchor="ctr"/>
+          <a:lstStyle/>
+          <a:p>
             <a:pPr indent="0" marL="0">
               <a:buNone/>
             </a:pPr>
             <a:r>
-              <a:rPr lang="en-US" sz="1500" b="1" dirty="0">
-                <a:solidFill>
-                  <a:srgbClr val="3F6F5F"/>
+              <a:rPr lang="en-US" sz="1900" b="1" dirty="0">
+                <a:solidFill>
+                  <a:srgbClr val="B9852F"/>
+                </a:solidFill>
+                <a:latin typeface="Cambria" pitchFamily="34" charset="0"/>
+                <a:ea typeface="Cambria" pitchFamily="34" charset="-122"/>
+                <a:cs typeface="Cambria" pitchFamily="34" charset="-120"/>
+              </a:rPr>
+              <a:t>Make something real</a:t>
+            </a:r>
+            <a:endParaRPr lang="en-US" sz="1900" dirty="0"/>
+          </a:p>
+        </p:txBody>
+      </p:sp>
+      <p:sp>
+        <p:nvSpPr>
+          <p:cNvPr id="15" name="Text 13"/>
+          <p:cNvSpPr/>
+          <p:nvPr/>
+        </p:nvSpPr>
+        <p:spPr>
+          <a:xfrm>
+            <a:off x="1371600" y="5367528"/>
+            <a:ext cx="10332720" cy="914400"/>
+          </a:xfrm>
+          <a:prstGeom prst="rect">
+            <a:avLst/>
+          </a:prstGeom>
+          <a:noFill/>
+          <a:ln/>
+        </p:spPr>
+        <p:txBody>
+          <a:bodyPr wrap="square" rtlCol="0" anchor="t">
+            <a:spAutoFit/>
+          </a:bodyPr>
+          <a:lstStyle/>
+          <a:p>
+            <a:pPr indent="0" marL="0">
+              <a:lnSpc>
+                <a:spcPct val="112000"/>
+              </a:lnSpc>
+              <a:buNone/>
+            </a:pPr>
+            <a:r>
+              <a:rPr lang="en-US" sz="1450" dirty="0">
+                <a:solidFill>
+                  <a:srgbClr val="1A1A1A"/>
                 </a:solidFill>
                 <a:latin typeface="Calibri" pitchFamily="34" charset="0"/>
                 <a:ea typeface="Calibri" pitchFamily="34" charset="-122"/>
                 <a:cs typeface="Calibri" pitchFamily="34" charset="-120"/>
               </a:rPr>
-              <a:t>Supplement</a:t>
-            </a:r>
-            <a:endParaRPr lang="en-US" sz="1500" dirty="0"/>
-          </a:p>
-        </p:txBody>
-      </p:sp>
-      <p:sp>
-        <p:nvSpPr>
-          <p:cNvPr id="8" name="Text 6"/>
-          <p:cNvSpPr/>
-          <p:nvPr/>
-        </p:nvSpPr>
-        <p:spPr>
-          <a:xfrm>
-            <a:off x="1051560" y="2944368"/>
-            <a:ext cx="10424160" cy="731520"/>
-          </a:xfrm>
-          <a:prstGeom prst="rect">
-            <a:avLst/>
-          </a:prstGeom>
-          <a:noFill/>
-          <a:ln/>
-        </p:spPr>
-        <p:txBody>
-          <a:bodyPr wrap="square" rtlCol="0" anchor="t">
-            <a:spAutoFit/>
-          </a:bodyPr>
-          <a:lstStyle/>
-          <a:p>
-            <a:pPr indent="0" marL="0">
-              <a:buNone/>
-            </a:pPr>
-            <a:r>
-              <a:rPr lang="en-US" sz="1400" dirty="0">
-                <a:solidFill>
-                  <a:srgbClr val="1A1A1A"/>
-                </a:solidFill>
-                <a:latin typeface="Calibri" pitchFamily="34" charset="0"/>
-                <a:ea typeface="Calibri" pitchFamily="34" charset="-122"/>
-                <a:cs typeface="Calibri" pitchFamily="34" charset="-120"/>
-              </a:rPr>
-              <a:t>A Pudding process post</a:t>
-            </a:r>
-            <a:endParaRPr lang="en-US" sz="1400" dirty="0"/>
-          </a:p>
-        </p:txBody>
-      </p:sp>
-      <p:sp>
-        <p:nvSpPr>
-          <p:cNvPr id="9" name="Shape 7"/>
-          <p:cNvSpPr/>
-          <p:nvPr/>
-        </p:nvSpPr>
-        <p:spPr>
-          <a:xfrm>
-            <a:off x="640080" y="3593592"/>
-            <a:ext cx="219456" cy="219456"/>
-          </a:xfrm>
-          <a:prstGeom prst="ellipse">
-            <a:avLst/>
-          </a:prstGeom>
-          <a:solidFill>
-            <a:srgbClr val="B9852F"/>
-          </a:solidFill>
-          <a:ln/>
-        </p:spPr>
-      </p:sp>
-      <p:sp>
-        <p:nvSpPr>
-          <p:cNvPr id="10" name="Text 8"/>
-          <p:cNvSpPr/>
-          <p:nvPr/>
-        </p:nvSpPr>
-        <p:spPr>
-          <a:xfrm>
-            <a:off x="1051560" y="3520440"/>
-            <a:ext cx="10424160" cy="365760"/>
-          </a:xfrm>
-          <a:prstGeom prst="rect">
-            <a:avLst/>
-          </a:prstGeom>
-          <a:noFill/>
-          <a:ln/>
-        </p:spPr>
-        <p:txBody>
-          <a:bodyPr wrap="square" rtlCol="0" anchor="ctr"/>
-          <a:lstStyle/>
-          <a:p>
-            <a:pPr indent="0" marL="0">
-              <a:buNone/>
-            </a:pPr>
-            <a:r>
-              <a:rPr lang="en-US" sz="1500" b="1" dirty="0">
-                <a:solidFill>
-                  <a:srgbClr val="B9852F"/>
-                </a:solidFill>
-                <a:latin typeface="Calibri" pitchFamily="34" charset="0"/>
-                <a:ea typeface="Calibri" pitchFamily="34" charset="-122"/>
-                <a:cs typeface="Calibri" pitchFamily="34" charset="-120"/>
-              </a:rPr>
-              <a:t>Deeper (optional)</a:t>
-            </a:r>
-            <a:endParaRPr lang="en-US" sz="1500" dirty="0"/>
-          </a:p>
-        </p:txBody>
-      </p:sp>
-      <p:sp>
-        <p:nvSpPr>
-          <p:cNvPr id="11" name="Text 9"/>
-          <p:cNvSpPr/>
-          <p:nvPr/>
-        </p:nvSpPr>
-        <p:spPr>
-          <a:xfrm>
-            <a:off x="1051560" y="3904488"/>
-            <a:ext cx="10424160" cy="731520"/>
-          </a:xfrm>
-          <a:prstGeom prst="rect">
-            <a:avLst/>
-          </a:prstGeom>
-          <a:noFill/>
-          <a:ln/>
-        </p:spPr>
-        <p:txBody>
-          <a:bodyPr wrap="square" rtlCol="0" anchor="t">
-            <a:spAutoFit/>
-          </a:bodyPr>
-          <a:lstStyle/>
-          <a:p>
-            <a:pPr indent="0" marL="0">
-              <a:buNone/>
-            </a:pPr>
-            <a:r>
-              <a:rPr lang="en-US" sz="1400" dirty="0">
-                <a:solidFill>
-                  <a:srgbClr val="1A1A1A"/>
-                </a:solidFill>
-                <a:latin typeface="Calibri" pitchFamily="34" charset="0"/>
-                <a:ea typeface="Calibri" pitchFamily="34" charset="-122"/>
-                <a:cs typeface="Calibri" pitchFamily="34" charset="-120"/>
-              </a:rPr>
-              <a:t>the Critical Inquiry online forum: Underwood and others answer Da, a discipline arguing about itself in public</a:t>
-            </a:r>
-            <a:endParaRPr lang="en-US" sz="1400" dirty="0"/>
-          </a:p>
-        </p:txBody>
-      </p:sp>
-      <p:sp>
-        <p:nvSpPr>
-          <p:cNvPr id="12" name="Shape 10"/>
-          <p:cNvSpPr/>
-          <p:nvPr/>
-        </p:nvSpPr>
-        <p:spPr>
-          <a:xfrm>
-            <a:off x="640080" y="4553712"/>
-            <a:ext cx="219456" cy="219456"/>
-          </a:xfrm>
-          <a:prstGeom prst="ellipse">
-            <a:avLst/>
-          </a:prstGeom>
-          <a:solidFill>
-            <a:srgbClr val="3F6F5F"/>
-          </a:solidFill>
-          <a:ln/>
-        </p:spPr>
-      </p:sp>
-      <p:sp>
-        <p:nvSpPr>
-          <p:cNvPr id="13" name="Text 11"/>
-          <p:cNvSpPr/>
-          <p:nvPr/>
-        </p:nvSpPr>
-        <p:spPr>
-          <a:xfrm>
-            <a:off x="1051560" y="4480560"/>
-            <a:ext cx="10424160" cy="365760"/>
-          </a:xfrm>
-          <a:prstGeom prst="rect">
-            <a:avLst/>
-          </a:prstGeom>
-          <a:noFill/>
-          <a:ln/>
-        </p:spPr>
-        <p:txBody>
-          <a:bodyPr wrap="square" rtlCol="0" anchor="ctr"/>
-          <a:lstStyle/>
-          <a:p>
-            <a:pPr indent="0" marL="0">
-              <a:buNone/>
-            </a:pPr>
-            <a:r>
-              <a:rPr lang="en-US" sz="1500" b="1" dirty="0">
-                <a:solidFill>
-                  <a:srgbClr val="3F6F5F"/>
-                </a:solidFill>
-                <a:latin typeface="Calibri" pitchFamily="34" charset="0"/>
-                <a:ea typeface="Calibri" pitchFamily="34" charset="-122"/>
-                <a:cs typeface="Calibri" pitchFamily="34" charset="-120"/>
-              </a:rPr>
-              <a:t>Sketch</a:t>
-            </a:r>
-            <a:endParaRPr lang="en-US" sz="1500" dirty="0"/>
-          </a:p>
-        </p:txBody>
-      </p:sp>
-      <p:sp>
-        <p:nvSpPr>
-          <p:cNvPr id="14" name="Text 12"/>
-          <p:cNvSpPr/>
-          <p:nvPr/>
-        </p:nvSpPr>
-        <p:spPr>
-          <a:xfrm>
-            <a:off x="1051560" y="4864608"/>
-            <a:ext cx="10424160" cy="731520"/>
-          </a:xfrm>
-          <a:prstGeom prst="rect">
-            <a:avLst/>
-          </a:prstGeom>
-          <a:noFill/>
-          <a:ln/>
-        </p:spPr>
-        <p:txBody>
-          <a:bodyPr wrap="square" rtlCol="0" anchor="t">
-            <a:spAutoFit/>
-          </a:bodyPr>
-          <a:lstStyle/>
-          <a:p>
-            <a:pPr indent="0" marL="0">
-              <a:buNone/>
-            </a:pPr>
-            <a:r>
-              <a:rPr lang="en-US" sz="1400" dirty="0">
-                <a:solidFill>
-                  <a:srgbClr val="1A1A1A"/>
-                </a:solidFill>
-                <a:latin typeface="Calibri" pitchFamily="34" charset="0"/>
-                <a:ea typeface="Calibri" pitchFamily="34" charset="-122"/>
-                <a:cs typeface="Calibri" pitchFamily="34" charset="-120"/>
-              </a:rPr>
-              <a:t>Title your essay; write the headline finding in one sentence.</a:t>
-            </a:r>
-            <a:endParaRPr lang="en-US" sz="1400" dirty="0"/>
-          </a:p>
-        </p:txBody>
-      </p:sp>
-      <p:sp>
-        <p:nvSpPr>
-          <p:cNvPr id="15" name="Shape 13"/>
-          <p:cNvSpPr/>
-          <p:nvPr/>
-        </p:nvSpPr>
-        <p:spPr>
-          <a:xfrm>
-            <a:off x="640080" y="5513832"/>
-            <a:ext cx="219456" cy="219456"/>
-          </a:xfrm>
-          <a:prstGeom prst="ellipse">
-            <a:avLst/>
-          </a:prstGeom>
-          <a:solidFill>
-            <a:srgbClr val="7A3B2E"/>
-          </a:solidFill>
-          <a:ln/>
-        </p:spPr>
-      </p:sp>
-      <p:sp>
-        <p:nvSpPr>
-          <p:cNvPr id="16" name="Text 14"/>
-          <p:cNvSpPr/>
-          <p:nvPr/>
-        </p:nvSpPr>
-        <p:spPr>
-          <a:xfrm>
-            <a:off x="1051560" y="5440680"/>
-            <a:ext cx="10424160" cy="365760"/>
-          </a:xfrm>
-          <a:prstGeom prst="rect">
-            <a:avLst/>
-          </a:prstGeom>
-          <a:noFill/>
-          <a:ln/>
-        </p:spPr>
-        <p:txBody>
-          <a:bodyPr wrap="square" rtlCol="0" anchor="ctr"/>
-          <a:lstStyle/>
-          <a:p>
-            <a:pPr indent="0" marL="0">
-              <a:buNone/>
-            </a:pPr>
-            <a:r>
-              <a:rPr lang="en-US" sz="1500" b="1" dirty="0">
-                <a:solidFill>
-                  <a:srgbClr val="7A3B2E"/>
-                </a:solidFill>
-                <a:latin typeface="Calibri" pitchFamily="34" charset="0"/>
-                <a:ea typeface="Calibri" pitchFamily="34" charset="-122"/>
-                <a:cs typeface="Calibri" pitchFamily="34" charset="-120"/>
-              </a:rPr>
-              <a:t>Check (AI closed)</a:t>
-            </a:r>
-            <a:endParaRPr lang="en-US" sz="1500" dirty="0"/>
-          </a:p>
-        </p:txBody>
-      </p:sp>
-      <p:sp>
-        <p:nvSpPr>
-          <p:cNvPr id="17" name="Text 15"/>
-          <p:cNvSpPr/>
-          <p:nvPr/>
-        </p:nvSpPr>
-        <p:spPr>
-          <a:xfrm>
-            <a:off x="1051560" y="5824728"/>
-            <a:ext cx="10424160" cy="731520"/>
-          </a:xfrm>
-          <a:prstGeom prst="rect">
-            <a:avLst/>
-          </a:prstGeom>
-          <a:noFill/>
-          <a:ln/>
-        </p:spPr>
-        <p:txBody>
-          <a:bodyPr wrap="square" rtlCol="0" anchor="t">
-            <a:spAutoFit/>
-          </a:bodyPr>
-          <a:lstStyle/>
-          <a:p>
-            <a:pPr indent="0" marL="0">
-              <a:buNone/>
-            </a:pPr>
-            <a:r>
-              <a:rPr lang="en-US" sz="1400" dirty="0">
-                <a:solidFill>
-                  <a:srgbClr val="1A1A1A"/>
-                </a:solidFill>
-                <a:latin typeface="Calibri" pitchFamily="34" charset="0"/>
-                <a:ea typeface="Calibri" pitchFamily="34" charset="-122"/>
-                <a:cs typeface="Calibri" pitchFamily="34" charset="-120"/>
-              </a:rPr>
-              <a:t>Fix it: a planted bug in publishing/layout code (or in opted-in JS). (Competencies 1, 7.)</a:t>
-            </a:r>
-            <a:endParaRPr lang="en-US" sz="1400" dirty="0"/>
+              <a:t>You leave with a deployed URL.</a:t>
+            </a:r>
+            <a:endParaRPr lang="en-US" sz="1450" dirty="0"/>
           </a:p>
         </p:txBody>
       </p:sp>

--- a/slides/pptx/week-09.pptx
+++ b/slides/pptx/week-09.pptx
@@ -5118,7 +5118,7 @@
                 <a:ea typeface="Calibri" pitchFamily="34" charset="-122"/>
                 <a:cs typeface="Calibri" pitchFamily="34" charset="-120"/>
               </a:rPr>
-              <a:t>the Critical Inquiry online forum: Underwood and others answer Da, a discipline arguing about itself in public</a:t>
+              <a:t>The Pudding, Making Internet Things: how the pros build the thing you are building this week</a:t>
             </a:r>
             <a:endParaRPr lang="en-US" sz="1400" dirty="0"/>
           </a:p>

--- a/slides/pptx/week-09.pptx
+++ b/slides/pptx/week-09.pptx
@@ -5118,7 +5118,7 @@
                 <a:ea typeface="Calibri" pitchFamily="34" charset="-122"/>
                 <a:cs typeface="Calibri" pitchFamily="34" charset="-120"/>
               </a:rPr>
-              <a:t>The Pudding, Making Internet Things: how the pros build the thing you are building this week</a:t>
+              <a:t>None; build week</a:t>
             </a:r>
             <a:endParaRPr lang="en-US" sz="1400" dirty="0"/>
           </a:p>
